--- a/Instructions/PPT/Instructions for Paper Review on EasyChair(Reviewer)[UV2026].pptx
+++ b/Instructions/PPT/Instructions for Paper Review on EasyChair(Reviewer)[UV2026].pptx
@@ -370,7 +370,7 @@
           <a:p>
             <a:fld id="{696C064A-D61B-4B21-B757-51A9B82445B8}" type="datetimeFigureOut">
               <a:rPr lang="en-US" smtClean="0"/>
-              <a:t>6/6/26</a:t>
+              <a:t>6/7/2026</a:t>
             </a:fld>
             <a:endParaRPr lang="en-US"/>
           </a:p>
@@ -4352,7 +4352,7 @@
 </file>
 
 <file path=ppt/slideLayouts/slideLayout2.xml><?xml version="1.0" encoding="utf-8"?>
-<p:sldLayout xmlns:a="http://schemas.openxmlformats.org/drawingml/2006/main" xmlns:r="http://schemas.openxmlformats.org/officeDocument/2006/relationships" xmlns:p="http://schemas.openxmlformats.org/presentationml/2006/main" matchingName="Section header" type="secHead">
+<p:sldLayout xmlns:a="http://schemas.openxmlformats.org/drawingml/2006/main" xmlns:r="http://schemas.openxmlformats.org/officeDocument/2006/relationships" xmlns:p="http://schemas.openxmlformats.org/presentationml/2006/main" matchingName="Section header" userDrawn="1">
   <p:cSld name="SECTION_HEADER">
     <p:spTree>
       <p:nvGrpSpPr>
@@ -4370,212 +4370,727 @@
       </p:grpSpPr>
       <p:sp>
         <p:nvSpPr>
-          <p:cNvPr id="14" name="Google Shape;14;p3"/>
-          <p:cNvSpPr txBox="1">
-            <a:spLocks noGrp="1"/>
-          </p:cNvSpPr>
-          <p:nvPr>
-            <p:ph type="title"/>
-          </p:nvPr>
+          <p:cNvPr id="4" name="矩形 7">
+            <a:extLst>
+              <a:ext uri="{FF2B5EF4-FFF2-40B4-BE49-F238E27FC236}">
+                <a16:creationId xmlns:a16="http://schemas.microsoft.com/office/drawing/2014/main" id="{FA24D7BF-92E9-7888-128B-67CFFB444802}"/>
+              </a:ext>
+            </a:extLst>
+          </p:cNvPr>
+          <p:cNvSpPr/>
+          <p:nvPr userDrawn="1"/>
         </p:nvSpPr>
         <p:spPr>
+          <a:xfrm flipH="1">
+            <a:off x="0" y="4778374"/>
+            <a:ext cx="9144000" cy="388032"/>
+          </a:xfrm>
+          <a:custGeom>
+            <a:avLst/>
+            <a:gdLst>
+              <a:gd name="connsiteX0" fmla="*/ 0 w 12192000"/>
+              <a:gd name="connsiteY0" fmla="*/ 0 h 609599"/>
+              <a:gd name="connsiteX1" fmla="*/ 12192000 w 12192000"/>
+              <a:gd name="connsiteY1" fmla="*/ 0 h 609599"/>
+              <a:gd name="connsiteX2" fmla="*/ 12192000 w 12192000"/>
+              <a:gd name="connsiteY2" fmla="*/ 609599 h 609599"/>
+              <a:gd name="connsiteX3" fmla="*/ 0 w 12192000"/>
+              <a:gd name="connsiteY3" fmla="*/ 609599 h 609599"/>
+              <a:gd name="connsiteX4" fmla="*/ 0 w 12192000"/>
+              <a:gd name="connsiteY4" fmla="*/ 0 h 609599"/>
+              <a:gd name="connsiteX0" fmla="*/ 0 w 12192000"/>
+              <a:gd name="connsiteY0" fmla="*/ 548640 h 1158239"/>
+              <a:gd name="connsiteX1" fmla="*/ 12192000 w 12192000"/>
+              <a:gd name="connsiteY1" fmla="*/ 548640 h 1158239"/>
+              <a:gd name="connsiteX2" fmla="*/ 12192000 w 12192000"/>
+              <a:gd name="connsiteY2" fmla="*/ 1158239 h 1158239"/>
+              <a:gd name="connsiteX3" fmla="*/ 0 w 12192000"/>
+              <a:gd name="connsiteY3" fmla="*/ 1158239 h 1158239"/>
+              <a:gd name="connsiteX4" fmla="*/ 0 w 12192000"/>
+              <a:gd name="connsiteY4" fmla="*/ 548640 h 1158239"/>
+              <a:gd name="connsiteX0" fmla="*/ 0 w 12192000"/>
+              <a:gd name="connsiteY0" fmla="*/ 376700 h 986299"/>
+              <a:gd name="connsiteX1" fmla="*/ 12192000 w 12192000"/>
+              <a:gd name="connsiteY1" fmla="*/ 376700 h 986299"/>
+              <a:gd name="connsiteX2" fmla="*/ 12192000 w 12192000"/>
+              <a:gd name="connsiteY2" fmla="*/ 986299 h 986299"/>
+              <a:gd name="connsiteX3" fmla="*/ 0 w 12192000"/>
+              <a:gd name="connsiteY3" fmla="*/ 986299 h 986299"/>
+              <a:gd name="connsiteX4" fmla="*/ 0 w 12192000"/>
+              <a:gd name="connsiteY4" fmla="*/ 376700 h 986299"/>
+              <a:gd name="connsiteX0" fmla="*/ 0 w 12192000"/>
+              <a:gd name="connsiteY0" fmla="*/ 438928 h 1048527"/>
+              <a:gd name="connsiteX1" fmla="*/ 12192000 w 12192000"/>
+              <a:gd name="connsiteY1" fmla="*/ 438928 h 1048527"/>
+              <a:gd name="connsiteX2" fmla="*/ 12192000 w 12192000"/>
+              <a:gd name="connsiteY2" fmla="*/ 1048527 h 1048527"/>
+              <a:gd name="connsiteX3" fmla="*/ 0 w 12192000"/>
+              <a:gd name="connsiteY3" fmla="*/ 1048527 h 1048527"/>
+              <a:gd name="connsiteX4" fmla="*/ 0 w 12192000"/>
+              <a:gd name="connsiteY4" fmla="*/ 438928 h 1048527"/>
+              <a:gd name="connsiteX0" fmla="*/ 0 w 12192000"/>
+              <a:gd name="connsiteY0" fmla="*/ 181799 h 791398"/>
+              <a:gd name="connsiteX1" fmla="*/ 12192000 w 12192000"/>
+              <a:gd name="connsiteY1" fmla="*/ 181799 h 791398"/>
+              <a:gd name="connsiteX2" fmla="*/ 12192000 w 12192000"/>
+              <a:gd name="connsiteY2" fmla="*/ 791398 h 791398"/>
+              <a:gd name="connsiteX3" fmla="*/ 0 w 12192000"/>
+              <a:gd name="connsiteY3" fmla="*/ 791398 h 791398"/>
+              <a:gd name="connsiteX4" fmla="*/ 0 w 12192000"/>
+              <a:gd name="connsiteY4" fmla="*/ 181799 h 791398"/>
+              <a:gd name="connsiteX0" fmla="*/ 0 w 12192000"/>
+              <a:gd name="connsiteY0" fmla="*/ 187345 h 796944"/>
+              <a:gd name="connsiteX1" fmla="*/ 12192000 w 12192000"/>
+              <a:gd name="connsiteY1" fmla="*/ 187345 h 796944"/>
+              <a:gd name="connsiteX2" fmla="*/ 12192000 w 12192000"/>
+              <a:gd name="connsiteY2" fmla="*/ 796944 h 796944"/>
+              <a:gd name="connsiteX3" fmla="*/ 0 w 12192000"/>
+              <a:gd name="connsiteY3" fmla="*/ 796944 h 796944"/>
+              <a:gd name="connsiteX4" fmla="*/ 0 w 12192000"/>
+              <a:gd name="connsiteY4" fmla="*/ 187345 h 796944"/>
+              <a:gd name="connsiteX0" fmla="*/ 0 w 12192000"/>
+              <a:gd name="connsiteY0" fmla="*/ 154569 h 764168"/>
+              <a:gd name="connsiteX1" fmla="*/ 12192000 w 12192000"/>
+              <a:gd name="connsiteY1" fmla="*/ 154569 h 764168"/>
+              <a:gd name="connsiteX2" fmla="*/ 12192000 w 12192000"/>
+              <a:gd name="connsiteY2" fmla="*/ 764168 h 764168"/>
+              <a:gd name="connsiteX3" fmla="*/ 0 w 12192000"/>
+              <a:gd name="connsiteY3" fmla="*/ 764168 h 764168"/>
+              <a:gd name="connsiteX4" fmla="*/ 0 w 12192000"/>
+              <a:gd name="connsiteY4" fmla="*/ 154569 h 764168"/>
+              <a:gd name="connsiteX0" fmla="*/ 0 w 12192000"/>
+              <a:gd name="connsiteY0" fmla="*/ 165354 h 774953"/>
+              <a:gd name="connsiteX1" fmla="*/ 12192000 w 12192000"/>
+              <a:gd name="connsiteY1" fmla="*/ 165354 h 774953"/>
+              <a:gd name="connsiteX2" fmla="*/ 12192000 w 12192000"/>
+              <a:gd name="connsiteY2" fmla="*/ 774953 h 774953"/>
+              <a:gd name="connsiteX3" fmla="*/ 0 w 12192000"/>
+              <a:gd name="connsiteY3" fmla="*/ 774953 h 774953"/>
+              <a:gd name="connsiteX4" fmla="*/ 0 w 12192000"/>
+              <a:gd name="connsiteY4" fmla="*/ 165354 h 774953"/>
+              <a:gd name="connsiteX0" fmla="*/ 0 w 12192000"/>
+              <a:gd name="connsiteY0" fmla="*/ 181798 h 791397"/>
+              <a:gd name="connsiteX1" fmla="*/ 12192000 w 12192000"/>
+              <a:gd name="connsiteY1" fmla="*/ 181798 h 791397"/>
+              <a:gd name="connsiteX2" fmla="*/ 12192000 w 12192000"/>
+              <a:gd name="connsiteY2" fmla="*/ 791397 h 791397"/>
+              <a:gd name="connsiteX3" fmla="*/ 0 w 12192000"/>
+              <a:gd name="connsiteY3" fmla="*/ 791397 h 791397"/>
+              <a:gd name="connsiteX4" fmla="*/ 0 w 12192000"/>
+              <a:gd name="connsiteY4" fmla="*/ 181798 h 791397"/>
+              <a:gd name="connsiteX0" fmla="*/ 0 w 12192000"/>
+              <a:gd name="connsiteY0" fmla="*/ 88858 h 698457"/>
+              <a:gd name="connsiteX1" fmla="*/ 12192000 w 12192000"/>
+              <a:gd name="connsiteY1" fmla="*/ 88858 h 698457"/>
+              <a:gd name="connsiteX2" fmla="*/ 12192000 w 12192000"/>
+              <a:gd name="connsiteY2" fmla="*/ 698457 h 698457"/>
+              <a:gd name="connsiteX3" fmla="*/ 0 w 12192000"/>
+              <a:gd name="connsiteY3" fmla="*/ 698457 h 698457"/>
+              <a:gd name="connsiteX4" fmla="*/ 0 w 12192000"/>
+              <a:gd name="connsiteY4" fmla="*/ 88858 h 698457"/>
+              <a:gd name="connsiteX0" fmla="*/ 10160 w 12192000"/>
+              <a:gd name="connsiteY0" fmla="*/ 93903 h 612062"/>
+              <a:gd name="connsiteX1" fmla="*/ 12192000 w 12192000"/>
+              <a:gd name="connsiteY1" fmla="*/ 2463 h 612062"/>
+              <a:gd name="connsiteX2" fmla="*/ 12192000 w 12192000"/>
+              <a:gd name="connsiteY2" fmla="*/ 612062 h 612062"/>
+              <a:gd name="connsiteX3" fmla="*/ 0 w 12192000"/>
+              <a:gd name="connsiteY3" fmla="*/ 612062 h 612062"/>
+              <a:gd name="connsiteX4" fmla="*/ 10160 w 12192000"/>
+              <a:gd name="connsiteY4" fmla="*/ 93903 h 612062"/>
+              <a:gd name="connsiteX0" fmla="*/ 0 w 12181840"/>
+              <a:gd name="connsiteY0" fmla="*/ 93903 h 612062"/>
+              <a:gd name="connsiteX1" fmla="*/ 12181840 w 12181840"/>
+              <a:gd name="connsiteY1" fmla="*/ 2463 h 612062"/>
+              <a:gd name="connsiteX2" fmla="*/ 12181840 w 12181840"/>
+              <a:gd name="connsiteY2" fmla="*/ 612062 h 612062"/>
+              <a:gd name="connsiteX3" fmla="*/ 12700 w 12181840"/>
+              <a:gd name="connsiteY3" fmla="*/ 612062 h 612062"/>
+              <a:gd name="connsiteX4" fmla="*/ 0 w 12181840"/>
+              <a:gd name="connsiteY4" fmla="*/ 93903 h 612062"/>
+              <a:gd name="connsiteX0" fmla="*/ 0 w 12181840"/>
+              <a:gd name="connsiteY0" fmla="*/ 93459 h 619238"/>
+              <a:gd name="connsiteX1" fmla="*/ 12181840 w 12181840"/>
+              <a:gd name="connsiteY1" fmla="*/ 9639 h 619238"/>
+              <a:gd name="connsiteX2" fmla="*/ 12181840 w 12181840"/>
+              <a:gd name="connsiteY2" fmla="*/ 619238 h 619238"/>
+              <a:gd name="connsiteX3" fmla="*/ 12700 w 12181840"/>
+              <a:gd name="connsiteY3" fmla="*/ 619238 h 619238"/>
+              <a:gd name="connsiteX4" fmla="*/ 0 w 12181840"/>
+              <a:gd name="connsiteY4" fmla="*/ 93459 h 619238"/>
+              <a:gd name="connsiteX0" fmla="*/ 0 w 12181840"/>
+              <a:gd name="connsiteY0" fmla="*/ 93459 h 619238"/>
+              <a:gd name="connsiteX1" fmla="*/ 12181840 w 12181840"/>
+              <a:gd name="connsiteY1" fmla="*/ 9639 h 619238"/>
+              <a:gd name="connsiteX2" fmla="*/ 12181840 w 12181840"/>
+              <a:gd name="connsiteY2" fmla="*/ 619238 h 619238"/>
+              <a:gd name="connsiteX3" fmla="*/ 12700 w 12181840"/>
+              <a:gd name="connsiteY3" fmla="*/ 619238 h 619238"/>
+              <a:gd name="connsiteX4" fmla="*/ 0 w 12181840"/>
+              <a:gd name="connsiteY4" fmla="*/ 93459 h 619238"/>
+              <a:gd name="connsiteX0" fmla="*/ 0 w 12197080"/>
+              <a:gd name="connsiteY0" fmla="*/ 93459 h 619238"/>
+              <a:gd name="connsiteX1" fmla="*/ 12197080 w 12197080"/>
+              <a:gd name="connsiteY1" fmla="*/ 9639 h 619238"/>
+              <a:gd name="connsiteX2" fmla="*/ 12197080 w 12197080"/>
+              <a:gd name="connsiteY2" fmla="*/ 619238 h 619238"/>
+              <a:gd name="connsiteX3" fmla="*/ 27940 w 12197080"/>
+              <a:gd name="connsiteY3" fmla="*/ 619238 h 619238"/>
+              <a:gd name="connsiteX4" fmla="*/ 0 w 12197080"/>
+              <a:gd name="connsiteY4" fmla="*/ 93459 h 619238"/>
+              <a:gd name="connsiteX0" fmla="*/ 2540 w 12199620"/>
+              <a:gd name="connsiteY0" fmla="*/ 93459 h 619238"/>
+              <a:gd name="connsiteX1" fmla="*/ 12199620 w 12199620"/>
+              <a:gd name="connsiteY1" fmla="*/ 9639 h 619238"/>
+              <a:gd name="connsiteX2" fmla="*/ 12199620 w 12199620"/>
+              <a:gd name="connsiteY2" fmla="*/ 619238 h 619238"/>
+              <a:gd name="connsiteX3" fmla="*/ 0 w 12199620"/>
+              <a:gd name="connsiteY3" fmla="*/ 611618 h 619238"/>
+              <a:gd name="connsiteX4" fmla="*/ 2540 w 12199620"/>
+              <a:gd name="connsiteY4" fmla="*/ 93459 h 619238"/>
+              <a:gd name="connsiteX0" fmla="*/ 153 w 12201043"/>
+              <a:gd name="connsiteY0" fmla="*/ 152400 h 609599"/>
+              <a:gd name="connsiteX1" fmla="*/ 12201043 w 12201043"/>
+              <a:gd name="connsiteY1" fmla="*/ 0 h 609599"/>
+              <a:gd name="connsiteX2" fmla="*/ 12201043 w 12201043"/>
+              <a:gd name="connsiteY2" fmla="*/ 609599 h 609599"/>
+              <a:gd name="connsiteX3" fmla="*/ 1423 w 12201043"/>
+              <a:gd name="connsiteY3" fmla="*/ 601979 h 609599"/>
+              <a:gd name="connsiteX4" fmla="*/ 153 w 12201043"/>
+              <a:gd name="connsiteY4" fmla="*/ 152400 h 609599"/>
+              <a:gd name="connsiteX0" fmla="*/ 153 w 12201043"/>
+              <a:gd name="connsiteY0" fmla="*/ 184785 h 609599"/>
+              <a:gd name="connsiteX1" fmla="*/ 12201043 w 12201043"/>
+              <a:gd name="connsiteY1" fmla="*/ 0 h 609599"/>
+              <a:gd name="connsiteX2" fmla="*/ 12201043 w 12201043"/>
+              <a:gd name="connsiteY2" fmla="*/ 609599 h 609599"/>
+              <a:gd name="connsiteX3" fmla="*/ 1423 w 12201043"/>
+              <a:gd name="connsiteY3" fmla="*/ 601979 h 609599"/>
+              <a:gd name="connsiteX4" fmla="*/ 153 w 12201043"/>
+              <a:gd name="connsiteY4" fmla="*/ 184785 h 609599"/>
+            </a:gdLst>
+            <a:ahLst/>
+            <a:cxnLst>
+              <a:cxn ang="0">
+                <a:pos x="connsiteX0" y="connsiteY0"/>
+              </a:cxn>
+              <a:cxn ang="0">
+                <a:pos x="connsiteX1" y="connsiteY1"/>
+              </a:cxn>
+              <a:cxn ang="0">
+                <a:pos x="connsiteX2" y="connsiteY2"/>
+              </a:cxn>
+              <a:cxn ang="0">
+                <a:pos x="connsiteX3" y="connsiteY3"/>
+              </a:cxn>
+              <a:cxn ang="0">
+                <a:pos x="connsiteX4" y="connsiteY4"/>
+              </a:cxn>
+            </a:cxnLst>
+            <a:rect l="l" t="t" r="r" b="b"/>
+            <a:pathLst>
+              <a:path w="12201043" h="609599">
+                <a:moveTo>
+                  <a:pt x="153" y="184785"/>
+                </a:moveTo>
+                <a:cubicBezTo>
+                  <a:pt x="6075833" y="-272415"/>
+                  <a:pt x="8457083" y="1051560"/>
+                  <a:pt x="12201043" y="0"/>
+                </a:cubicBezTo>
+                <a:lnTo>
+                  <a:pt x="12201043" y="609599"/>
+                </a:lnTo>
+                <a:lnTo>
+                  <a:pt x="1423" y="601979"/>
+                </a:lnTo>
+                <a:cubicBezTo>
+                  <a:pt x="2270" y="429259"/>
+                  <a:pt x="-694" y="357505"/>
+                  <a:pt x="153" y="184785"/>
+                </a:cubicBezTo>
+                <a:close/>
+              </a:path>
+            </a:pathLst>
+          </a:custGeom>
+          <a:gradFill flip="none" rotWithShape="1">
+            <a:gsLst>
+              <a:gs pos="60000">
+                <a:srgbClr val="008A41">
+                  <a:alpha val="49804"/>
+                </a:srgbClr>
+              </a:gs>
+              <a:gs pos="0">
+                <a:srgbClr val="008A41">
+                  <a:alpha val="70000"/>
+                </a:srgbClr>
+              </a:gs>
+              <a:gs pos="100000">
+                <a:srgbClr val="A0D2B4"/>
+              </a:gs>
+            </a:gsLst>
+            <a:lin ang="0" scaled="1"/>
+            <a:tileRect/>
+          </a:gradFill>
+          <a:ln>
+            <a:noFill/>
+          </a:ln>
+        </p:spPr>
+        <p:style>
+          <a:lnRef idx="2">
+            <a:schemeClr val="accent1">
+              <a:shade val="50000"/>
+            </a:schemeClr>
+          </a:lnRef>
+          <a:fillRef idx="1">
+            <a:schemeClr val="accent1"/>
+          </a:fillRef>
+          <a:effectRef idx="0">
+            <a:schemeClr val="accent1"/>
+          </a:effectRef>
+          <a:fontRef idx="minor">
+            <a:schemeClr val="lt1"/>
+          </a:fontRef>
+        </p:style>
+        <p:txBody>
+          <a:bodyPr rtlCol="0" anchor="ctr"/>
+          <a:lstStyle/>
+          <a:p>
+            <a:pPr algn="ctr"/>
+            <a:endParaRPr lang="zh-CN" altLang="en-US"/>
+          </a:p>
+        </p:txBody>
+      </p:sp>
+      <p:sp>
+        <p:nvSpPr>
+          <p:cNvPr id="5" name="任意多边形: 形状 4">
+            <a:extLst>
+              <a:ext uri="{FF2B5EF4-FFF2-40B4-BE49-F238E27FC236}">
+                <a16:creationId xmlns:a16="http://schemas.microsoft.com/office/drawing/2014/main" id="{E15CABD4-A156-5F7D-F379-35677D1030F0}"/>
+              </a:ext>
+            </a:extLst>
+          </p:cNvPr>
+          <p:cNvSpPr/>
+          <p:nvPr userDrawn="1"/>
+        </p:nvSpPr>
+        <p:spPr>
+          <a:xfrm flipH="1" flipV="1">
+            <a:off x="-6103" y="-10167"/>
+            <a:ext cx="9143999" cy="388031"/>
+          </a:xfrm>
+          <a:custGeom>
+            <a:avLst/>
+            <a:gdLst>
+              <a:gd name="connsiteX0" fmla="*/ 12192000 w 12192000"/>
+              <a:gd name="connsiteY0" fmla="*/ 0 h 2039768"/>
+              <a:gd name="connsiteX1" fmla="*/ 12192000 w 12192000"/>
+              <a:gd name="connsiteY1" fmla="*/ 2039768 h 2039768"/>
+              <a:gd name="connsiteX2" fmla="*/ 0 w 12192000"/>
+              <a:gd name="connsiteY2" fmla="*/ 2039768 h 2039768"/>
+              <a:gd name="connsiteX3" fmla="*/ 0 w 12192000"/>
+              <a:gd name="connsiteY3" fmla="*/ 819391 h 2039768"/>
+              <a:gd name="connsiteX4" fmla="*/ 37309 w 12192000"/>
+              <a:gd name="connsiteY4" fmla="*/ 834936 h 2039768"/>
+              <a:gd name="connsiteX5" fmla="*/ 5319640 w 12192000"/>
+              <a:gd name="connsiteY5" fmla="*/ 1747868 h 2039768"/>
+              <a:gd name="connsiteX6" fmla="*/ 11971651 w 12192000"/>
+              <a:gd name="connsiteY6" fmla="*/ 149892 h 2039768"/>
+              <a:gd name="connsiteX0" fmla="*/ 12192000 w 12192000"/>
+              <a:gd name="connsiteY0" fmla="*/ 373966 h 1893600"/>
+              <a:gd name="connsiteX1" fmla="*/ 12192000 w 12192000"/>
+              <a:gd name="connsiteY1" fmla="*/ 1893600 h 1893600"/>
+              <a:gd name="connsiteX2" fmla="*/ 0 w 12192000"/>
+              <a:gd name="connsiteY2" fmla="*/ 1893600 h 1893600"/>
+              <a:gd name="connsiteX3" fmla="*/ 0 w 12192000"/>
+              <a:gd name="connsiteY3" fmla="*/ 673223 h 1893600"/>
+              <a:gd name="connsiteX4" fmla="*/ 37309 w 12192000"/>
+              <a:gd name="connsiteY4" fmla="*/ 688768 h 1893600"/>
+              <a:gd name="connsiteX5" fmla="*/ 5319640 w 12192000"/>
+              <a:gd name="connsiteY5" fmla="*/ 1601700 h 1893600"/>
+              <a:gd name="connsiteX6" fmla="*/ 11971651 w 12192000"/>
+              <a:gd name="connsiteY6" fmla="*/ 3724 h 1893600"/>
+              <a:gd name="connsiteX7" fmla="*/ 12192000 w 12192000"/>
+              <a:gd name="connsiteY7" fmla="*/ 373966 h 1893600"/>
+              <a:gd name="connsiteX0" fmla="*/ 12192000 w 12192000"/>
+              <a:gd name="connsiteY0" fmla="*/ 1413 h 1521047"/>
+              <a:gd name="connsiteX1" fmla="*/ 12192000 w 12192000"/>
+              <a:gd name="connsiteY1" fmla="*/ 1521047 h 1521047"/>
+              <a:gd name="connsiteX2" fmla="*/ 0 w 12192000"/>
+              <a:gd name="connsiteY2" fmla="*/ 1521047 h 1521047"/>
+              <a:gd name="connsiteX3" fmla="*/ 0 w 12192000"/>
+              <a:gd name="connsiteY3" fmla="*/ 300670 h 1521047"/>
+              <a:gd name="connsiteX4" fmla="*/ 37309 w 12192000"/>
+              <a:gd name="connsiteY4" fmla="*/ 316215 h 1521047"/>
+              <a:gd name="connsiteX5" fmla="*/ 5319640 w 12192000"/>
+              <a:gd name="connsiteY5" fmla="*/ 1229147 h 1521047"/>
+              <a:gd name="connsiteX6" fmla="*/ 12192000 w 12192000"/>
+              <a:gd name="connsiteY6" fmla="*/ 1413 h 1521047"/>
+              <a:gd name="connsiteX0" fmla="*/ 12192000 w 12192000"/>
+              <a:gd name="connsiteY0" fmla="*/ 0 h 1519634"/>
+              <a:gd name="connsiteX1" fmla="*/ 12192000 w 12192000"/>
+              <a:gd name="connsiteY1" fmla="*/ 1519634 h 1519634"/>
+              <a:gd name="connsiteX2" fmla="*/ 0 w 12192000"/>
+              <a:gd name="connsiteY2" fmla="*/ 1519634 h 1519634"/>
+              <a:gd name="connsiteX3" fmla="*/ 0 w 12192000"/>
+              <a:gd name="connsiteY3" fmla="*/ 299257 h 1519634"/>
+              <a:gd name="connsiteX4" fmla="*/ 37309 w 12192000"/>
+              <a:gd name="connsiteY4" fmla="*/ 314802 h 1519634"/>
+              <a:gd name="connsiteX5" fmla="*/ 5319640 w 12192000"/>
+              <a:gd name="connsiteY5" fmla="*/ 1227734 h 1519634"/>
+              <a:gd name="connsiteX6" fmla="*/ 12192000 w 12192000"/>
+              <a:gd name="connsiteY6" fmla="*/ 0 h 1519634"/>
+              <a:gd name="connsiteX0" fmla="*/ 12192000 w 12192000"/>
+              <a:gd name="connsiteY0" fmla="*/ 0 h 1519634"/>
+              <a:gd name="connsiteX1" fmla="*/ 12192000 w 12192000"/>
+              <a:gd name="connsiteY1" fmla="*/ 1519634 h 1519634"/>
+              <a:gd name="connsiteX2" fmla="*/ 0 w 12192000"/>
+              <a:gd name="connsiteY2" fmla="*/ 1519634 h 1519634"/>
+              <a:gd name="connsiteX3" fmla="*/ 0 w 12192000"/>
+              <a:gd name="connsiteY3" fmla="*/ 299257 h 1519634"/>
+              <a:gd name="connsiteX4" fmla="*/ 140179 w 12192000"/>
+              <a:gd name="connsiteY4" fmla="*/ 401490 h 1519634"/>
+              <a:gd name="connsiteX5" fmla="*/ 5319640 w 12192000"/>
+              <a:gd name="connsiteY5" fmla="*/ 1227734 h 1519634"/>
+              <a:gd name="connsiteX6" fmla="*/ 12192000 w 12192000"/>
+              <a:gd name="connsiteY6" fmla="*/ 0 h 1519634"/>
+              <a:gd name="connsiteX0" fmla="*/ 12192000 w 12192000"/>
+              <a:gd name="connsiteY0" fmla="*/ 0 h 1519634"/>
+              <a:gd name="connsiteX1" fmla="*/ 12192000 w 12192000"/>
+              <a:gd name="connsiteY1" fmla="*/ 1519634 h 1519634"/>
+              <a:gd name="connsiteX2" fmla="*/ 0 w 12192000"/>
+              <a:gd name="connsiteY2" fmla="*/ 1519634 h 1519634"/>
+              <a:gd name="connsiteX3" fmla="*/ 0 w 12192000"/>
+              <a:gd name="connsiteY3" fmla="*/ 299257 h 1519634"/>
+              <a:gd name="connsiteX4" fmla="*/ 5319640 w 12192000"/>
+              <a:gd name="connsiteY4" fmla="*/ 1227734 h 1519634"/>
+              <a:gd name="connsiteX5" fmla="*/ 12192000 w 12192000"/>
+              <a:gd name="connsiteY5" fmla="*/ 0 h 1519634"/>
+              <a:gd name="connsiteX0" fmla="*/ 12192000 w 12192000"/>
+              <a:gd name="connsiteY0" fmla="*/ 0 h 1519634"/>
+              <a:gd name="connsiteX1" fmla="*/ 12192000 w 12192000"/>
+              <a:gd name="connsiteY1" fmla="*/ 1519634 h 1519634"/>
+              <a:gd name="connsiteX2" fmla="*/ 0 w 12192000"/>
+              <a:gd name="connsiteY2" fmla="*/ 1519634 h 1519634"/>
+              <a:gd name="connsiteX3" fmla="*/ 3810 w 12192000"/>
+              <a:gd name="connsiteY3" fmla="*/ 628674 h 1519634"/>
+              <a:gd name="connsiteX4" fmla="*/ 5319640 w 12192000"/>
+              <a:gd name="connsiteY4" fmla="*/ 1227734 h 1519634"/>
+              <a:gd name="connsiteX5" fmla="*/ 12192000 w 12192000"/>
+              <a:gd name="connsiteY5" fmla="*/ 0 h 1519634"/>
+              <a:gd name="connsiteX0" fmla="*/ 12192000 w 12192000"/>
+              <a:gd name="connsiteY0" fmla="*/ 0 h 1519634"/>
+              <a:gd name="connsiteX1" fmla="*/ 12192000 w 12192000"/>
+              <a:gd name="connsiteY1" fmla="*/ 1519634 h 1519634"/>
+              <a:gd name="connsiteX2" fmla="*/ 0 w 12192000"/>
+              <a:gd name="connsiteY2" fmla="*/ 1519634 h 1519634"/>
+              <a:gd name="connsiteX3" fmla="*/ 3810 w 12192000"/>
+              <a:gd name="connsiteY3" fmla="*/ 628674 h 1519634"/>
+              <a:gd name="connsiteX4" fmla="*/ 5319640 w 12192000"/>
+              <a:gd name="connsiteY4" fmla="*/ 1227734 h 1519634"/>
+              <a:gd name="connsiteX5" fmla="*/ 12192000 w 12192000"/>
+              <a:gd name="connsiteY5" fmla="*/ 0 h 1519634"/>
+              <a:gd name="connsiteX0" fmla="*/ 12192000 w 12192000"/>
+              <a:gd name="connsiteY0" fmla="*/ 0 h 1519634"/>
+              <a:gd name="connsiteX1" fmla="*/ 12192000 w 12192000"/>
+              <a:gd name="connsiteY1" fmla="*/ 1519634 h 1519634"/>
+              <a:gd name="connsiteX2" fmla="*/ 0 w 12192000"/>
+              <a:gd name="connsiteY2" fmla="*/ 1519634 h 1519634"/>
+              <a:gd name="connsiteX3" fmla="*/ 3810 w 12192000"/>
+              <a:gd name="connsiteY3" fmla="*/ 628674 h 1519634"/>
+              <a:gd name="connsiteX4" fmla="*/ 5319640 w 12192000"/>
+              <a:gd name="connsiteY4" fmla="*/ 1227734 h 1519634"/>
+              <a:gd name="connsiteX5" fmla="*/ 12192000 w 12192000"/>
+              <a:gd name="connsiteY5" fmla="*/ 0 h 1519634"/>
+              <a:gd name="connsiteX0" fmla="*/ 12192000 w 12192000"/>
+              <a:gd name="connsiteY0" fmla="*/ 0 h 1519634"/>
+              <a:gd name="connsiteX1" fmla="*/ 12192000 w 12192000"/>
+              <a:gd name="connsiteY1" fmla="*/ 1519634 h 1519634"/>
+              <a:gd name="connsiteX2" fmla="*/ 0 w 12192000"/>
+              <a:gd name="connsiteY2" fmla="*/ 1519634 h 1519634"/>
+              <a:gd name="connsiteX3" fmla="*/ 3810 w 12192000"/>
+              <a:gd name="connsiteY3" fmla="*/ 628674 h 1519634"/>
+              <a:gd name="connsiteX4" fmla="*/ 5319640 w 12192000"/>
+              <a:gd name="connsiteY4" fmla="*/ 1227734 h 1519634"/>
+              <a:gd name="connsiteX5" fmla="*/ 12192000 w 12192000"/>
+              <a:gd name="connsiteY5" fmla="*/ 0 h 1519634"/>
+              <a:gd name="connsiteX0" fmla="*/ 12198096 w 12198096"/>
+              <a:gd name="connsiteY0" fmla="*/ 0 h 1325451"/>
+              <a:gd name="connsiteX1" fmla="*/ 12192000 w 12198096"/>
+              <a:gd name="connsiteY1" fmla="*/ 1325451 h 1325451"/>
+              <a:gd name="connsiteX2" fmla="*/ 0 w 12198096"/>
+              <a:gd name="connsiteY2" fmla="*/ 1325451 h 1325451"/>
+              <a:gd name="connsiteX3" fmla="*/ 3810 w 12198096"/>
+              <a:gd name="connsiteY3" fmla="*/ 434491 h 1325451"/>
+              <a:gd name="connsiteX4" fmla="*/ 5319640 w 12198096"/>
+              <a:gd name="connsiteY4" fmla="*/ 1033551 h 1325451"/>
+              <a:gd name="connsiteX5" fmla="*/ 12198096 w 12198096"/>
+              <a:gd name="connsiteY5" fmla="*/ 0 h 1325451"/>
+              <a:gd name="connsiteX0" fmla="*/ 12198096 w 12198096"/>
+              <a:gd name="connsiteY0" fmla="*/ 0 h 1325451"/>
+              <a:gd name="connsiteX1" fmla="*/ 12192000 w 12198096"/>
+              <a:gd name="connsiteY1" fmla="*/ 1325451 h 1325451"/>
+              <a:gd name="connsiteX2" fmla="*/ 0 w 12198096"/>
+              <a:gd name="connsiteY2" fmla="*/ 1325451 h 1325451"/>
+              <a:gd name="connsiteX3" fmla="*/ 3810 w 12198096"/>
+              <a:gd name="connsiteY3" fmla="*/ 434491 h 1325451"/>
+              <a:gd name="connsiteX4" fmla="*/ 5325736 w 12198096"/>
+              <a:gd name="connsiteY4" fmla="*/ 978070 h 1325451"/>
+              <a:gd name="connsiteX5" fmla="*/ 12198096 w 12198096"/>
+              <a:gd name="connsiteY5" fmla="*/ 0 h 1325451"/>
+            </a:gdLst>
+            <a:ahLst/>
+            <a:cxnLst>
+              <a:cxn ang="0">
+                <a:pos x="connsiteX0" y="connsiteY0"/>
+              </a:cxn>
+              <a:cxn ang="0">
+                <a:pos x="connsiteX1" y="connsiteY1"/>
+              </a:cxn>
+              <a:cxn ang="0">
+                <a:pos x="connsiteX2" y="connsiteY2"/>
+              </a:cxn>
+              <a:cxn ang="0">
+                <a:pos x="connsiteX3" y="connsiteY3"/>
+              </a:cxn>
+              <a:cxn ang="0">
+                <a:pos x="connsiteX4" y="connsiteY4"/>
+              </a:cxn>
+              <a:cxn ang="0">
+                <a:pos x="connsiteX5" y="connsiteY5"/>
+              </a:cxn>
+            </a:cxnLst>
+            <a:rect l="l" t="t" r="r" b="b"/>
+            <a:pathLst>
+              <a:path w="12198096" h="1325451">
+                <a:moveTo>
+                  <a:pt x="12198096" y="0"/>
+                </a:moveTo>
+                <a:lnTo>
+                  <a:pt x="12192000" y="1325451"/>
+                </a:lnTo>
+                <a:lnTo>
+                  <a:pt x="0" y="1325451"/>
+                </a:lnTo>
+                <a:lnTo>
+                  <a:pt x="3810" y="434491"/>
+                </a:lnTo>
+                <a:cubicBezTo>
+                  <a:pt x="1718603" y="876908"/>
+                  <a:pt x="3533473" y="963319"/>
+                  <a:pt x="5325736" y="978070"/>
+                </a:cubicBezTo>
+                <a:cubicBezTo>
+                  <a:pt x="7351518" y="925603"/>
+                  <a:pt x="10633603" y="731550"/>
+                  <a:pt x="12198096" y="0"/>
+                </a:cubicBezTo>
+                <a:close/>
+              </a:path>
+            </a:pathLst>
+          </a:custGeom>
+          <a:gradFill flip="none" rotWithShape="1">
+            <a:gsLst>
+              <a:gs pos="60000">
+                <a:srgbClr val="A0D2B4">
+                  <a:alpha val="50000"/>
+                </a:srgbClr>
+              </a:gs>
+              <a:gs pos="0">
+                <a:srgbClr val="008A41">
+                  <a:alpha val="70000"/>
+                </a:srgbClr>
+              </a:gs>
+              <a:gs pos="100000">
+                <a:srgbClr val="A0D2B4">
+                  <a:alpha val="50000"/>
+                </a:srgbClr>
+              </a:gs>
+            </a:gsLst>
+            <a:lin ang="10800000" scaled="0"/>
+            <a:tileRect/>
+          </a:gradFill>
+          <a:ln>
+            <a:noFill/>
+          </a:ln>
+        </p:spPr>
+        <p:style>
+          <a:lnRef idx="2">
+            <a:schemeClr val="accent1">
+              <a:shade val="50000"/>
+            </a:schemeClr>
+          </a:lnRef>
+          <a:fillRef idx="1">
+            <a:schemeClr val="accent1"/>
+          </a:fillRef>
+          <a:effectRef idx="0">
+            <a:schemeClr val="accent1"/>
+          </a:effectRef>
+          <a:fontRef idx="minor">
+            <a:schemeClr val="lt1"/>
+          </a:fontRef>
+        </p:style>
+        <p:txBody>
+          <a:bodyPr rtlCol="0" anchor="ctr"/>
+          <a:lstStyle/>
+          <a:p>
+            <a:pPr lvl="0" algn="ctr"/>
+            <a:endParaRPr lang="zh-CN" altLang="en-US"/>
+          </a:p>
+        </p:txBody>
+      </p:sp>
+      <p:pic>
+        <p:nvPicPr>
+          <p:cNvPr id="6" name="图片 5">
+            <a:extLst>
+              <a:ext uri="{FF2B5EF4-FFF2-40B4-BE49-F238E27FC236}">
+                <a16:creationId xmlns:a16="http://schemas.microsoft.com/office/drawing/2014/main" id="{09EB08C6-1FC1-77E5-9547-1F786ECAFDC9}"/>
+              </a:ext>
+            </a:extLst>
+          </p:cNvPr>
+          <p:cNvPicPr>
+            <a:picLocks noChangeAspect="1"/>
+          </p:cNvPicPr>
+          <p:nvPr userDrawn="1"/>
+        </p:nvPicPr>
+        <p:blipFill>
+          <a:blip r:embed="rId2" cstate="print">
+            <a:extLst>
+              <a:ext uri="{BEBA8EAE-BF5A-486C-A8C5-ECC9F3942E4B}">
+                <a14:imgProps xmlns:a14="http://schemas.microsoft.com/office/drawing/2010/main">
+                  <a14:imgLayer r:embed="rId3">
+                    <a14:imgEffect>
+                      <a14:backgroundRemoval t="3090" b="89888" l="2563" r="97313">
+                        <a14:foregroundMark x1="7187" y1="50562" x2="61563" y2="38764"/>
+                        <a14:foregroundMark x1="61563" y1="38764" x2="63438" y2="41292"/>
+                        <a14:foregroundMark x1="29875" y1="86798" x2="41313" y2="84551"/>
+                        <a14:foregroundMark x1="41313" y1="84551" x2="57375" y2="89607"/>
+                        <a14:foregroundMark x1="57375" y1="89607" x2="63438" y2="85112"/>
+                        <a14:foregroundMark x1="63438" y1="85112" x2="64063" y2="85112"/>
+                        <a14:foregroundMark x1="22250" y1="25843" x2="23375" y2="34831"/>
+                        <a14:foregroundMark x1="22375" y1="26124" x2="26438" y2="23876"/>
+                        <a14:foregroundMark x1="26438" y1="23876" x2="28688" y2="24438"/>
+                        <a14:foregroundMark x1="22313" y1="23315" x2="28750" y2="25562"/>
+                        <a14:foregroundMark x1="68313" y1="24157" x2="68313" y2="24157"/>
+                        <a14:foregroundMark x1="68375" y1="70506" x2="68375" y2="70506"/>
+                        <a14:foregroundMark x1="68063" y1="61236" x2="68063" y2="61236"/>
+                        <a14:foregroundMark x1="83438" y1="31180" x2="87688" y2="19382"/>
+                        <a14:foregroundMark x1="87688" y1="19382" x2="91813" y2="23315"/>
+                        <a14:foregroundMark x1="91813" y1="23315" x2="95063" y2="37079"/>
+                        <a14:foregroundMark x1="95063" y1="37079" x2="95188" y2="56461"/>
+                        <a14:foregroundMark x1="95188" y1="56461" x2="91188" y2="72753"/>
+                        <a14:foregroundMark x1="91188" y1="72753" x2="86438" y2="75562"/>
+                        <a14:foregroundMark x1="86438" y1="75562" x2="82438" y2="60393"/>
+                        <a14:foregroundMark x1="82438" y1="60393" x2="82125" y2="40449"/>
+                        <a14:foregroundMark x1="82125" y1="40449" x2="83813" y2="29213"/>
+                        <a14:foregroundMark x1="85688" y1="46910" x2="91313" y2="42416"/>
+                        <a14:foregroundMark x1="84500" y1="41854" x2="89125" y2="45506"/>
+                        <a14:foregroundMark x1="89125" y1="45506" x2="89313" y2="66573"/>
+                        <a14:foregroundMark x1="89313" y1="66573" x2="85375" y2="56742"/>
+                        <a14:foregroundMark x1="85375" y1="56742" x2="86188" y2="33427"/>
+                        <a14:foregroundMark x1="86188" y1="33427" x2="89625" y2="23315"/>
+                        <a14:foregroundMark x1="89625" y1="23315" x2="93063" y2="58146"/>
+                        <a14:foregroundMark x1="93063" y1="58146" x2="92625" y2="60955"/>
+                        <a14:foregroundMark x1="83250" y1="28933" x2="87125" y2="18539"/>
+                        <a14:foregroundMark x1="87125" y1="18539" x2="92063" y2="21629"/>
+                        <a14:foregroundMark x1="92063" y1="21629" x2="95063" y2="33989"/>
+                        <a14:foregroundMark x1="95063" y1="33989" x2="95875" y2="52247"/>
+                        <a14:foregroundMark x1="95875" y1="52247" x2="92688" y2="71910"/>
+                        <a14:foregroundMark x1="92688" y1="71910" x2="89188" y2="80337"/>
+                        <a14:foregroundMark x1="89188" y1="80337" x2="84125" y2="70787"/>
+                        <a14:foregroundMark x1="84125" y1="70787" x2="81313" y2="53371"/>
+                        <a14:foregroundMark x1="81313" y1="53371" x2="81875" y2="39607"/>
+                        <a14:foregroundMark x1="60250" y1="39888" x2="58125" y2="37079"/>
+                        <a14:foregroundMark x1="67625" y1="32022" x2="69313" y2="53090"/>
+                        <a14:foregroundMark x1="69313" y1="53090" x2="75000" y2="35674"/>
+                        <a14:foregroundMark x1="75000" y1="35674" x2="68813" y2="40449"/>
+                        <a14:foregroundMark x1="68813" y1="40449" x2="69000" y2="21629"/>
+                        <a14:foregroundMark x1="69000" y1="21629" x2="74250" y2="16292"/>
+                        <a14:foregroundMark x1="74250" y1="16292" x2="78563" y2="24719"/>
+                        <a14:foregroundMark x1="78563" y1="24719" x2="80063" y2="46348"/>
+                        <a14:foregroundMark x1="80063" y1="46348" x2="75813" y2="71067"/>
+                        <a14:foregroundMark x1="75813" y1="71067" x2="70438" y2="74719"/>
+                        <a14:foregroundMark x1="70438" y1="74719" x2="77063" y2="69944"/>
+                        <a14:foregroundMark x1="77063" y1="69944" x2="72313" y2="77528"/>
+                        <a14:foregroundMark x1="72313" y1="77528" x2="67500" y2="53090"/>
+                        <a14:foregroundMark x1="67500" y1="53090" x2="68063" y2="72753"/>
+                        <a14:foregroundMark x1="68063" y1="72753" x2="69000" y2="77528"/>
+                        <a14:foregroundMark x1="70688" y1="76685" x2="72438" y2="80056"/>
+                        <a14:foregroundMark x1="73750" y1="78371" x2="75688" y2="78652"/>
+                        <a14:foregroundMark x1="70813" y1="78090" x2="72063" y2="73876"/>
+                        <a14:foregroundMark x1="5407" y1="21913" x2="10063" y2="20506"/>
+                        <a14:foregroundMark x1="10063" y1="20506" x2="33938" y2="20506"/>
+                        <a14:foregroundMark x1="33938" y1="20506" x2="53813" y2="11798"/>
+                        <a14:foregroundMark x1="53813" y1="11798" x2="64813" y2="15449"/>
+                        <a14:foregroundMark x1="64813" y1="15449" x2="67750" y2="43539"/>
+                        <a14:foregroundMark x1="67750" y1="43539" x2="67750" y2="73876"/>
+                        <a14:foregroundMark x1="67750" y1="73876" x2="59750" y2="97753"/>
+                        <a14:foregroundMark x1="59750" y1="97753" x2="40250" y2="95506"/>
+                        <a14:foregroundMark x1="40250" y1="95506" x2="9375" y2="72753"/>
+                        <a14:foregroundMark x1="9375" y1="72753" x2="5309" y2="63916"/>
+                        <a14:foregroundMark x1="10125" y1="10955" x2="11750" y2="27528"/>
+                        <a14:foregroundMark x1="11750" y1="27528" x2="9125" y2="14045"/>
+                        <a14:foregroundMark x1="9125" y1="14045" x2="13188" y2="16011"/>
+                        <a14:foregroundMark x1="86698" y1="5849" x2="92049" y2="12903"/>
+                        <a14:foregroundMark x1="97370" y1="25565" x2="99688" y2="49719"/>
+                        <a14:foregroundMark x1="99688" y1="49719" x2="98188" y2="69101"/>
+                        <a14:foregroundMark x1="98188" y1="69101" x2="93563" y2="85112"/>
+                        <a14:foregroundMark x1="93563" y1="85112" x2="55688" y2="99719"/>
+                        <a14:foregroundMark x1="55688" y1="99719" x2="7164" y2="90806"/>
+                        <a14:foregroundMark x1="5404" y1="20395" x2="5750" y2="17978"/>
+                        <a14:foregroundMark x1="5750" y1="17978" x2="44938" y2="2528"/>
+                        <a14:foregroundMark x1="44938" y1="2528" x2="90875" y2="24438"/>
+                        <a14:foregroundMark x1="90875" y1="24438" x2="80938" y2="14607"/>
+                        <a14:foregroundMark x1="80938" y1="14607" x2="81099" y2="13463"/>
+                        <a14:foregroundMark x1="68750" y1="12360" x2="78063" y2="17135"/>
+                        <a14:foregroundMark x1="78063" y1="17135" x2="87938" y2="14607"/>
+                        <a14:foregroundMark x1="87938" y1="14607" x2="93500" y2="20506"/>
+                        <a14:foregroundMark x1="93500" y1="20506" x2="97500" y2="30618"/>
+                        <a14:foregroundMark x1="97500" y1="30618" x2="97313" y2="59831"/>
+                        <a14:foregroundMark x1="97313" y1="59831" x2="89563" y2="72753"/>
+                        <a14:foregroundMark x1="89563" y1="72753" x2="79813" y2="68258"/>
+                        <a14:foregroundMark x1="79813" y1="68258" x2="69438" y2="31180"/>
+                        <a14:foregroundMark x1="69438" y1="31180" x2="68688" y2="12921"/>
+                        <a14:foregroundMark x1="68688" y1="12921" x2="68688" y2="12640"/>
+                        <a14:foregroundMark x1="5938" y1="33708" x2="6750" y2="79213"/>
+                        <a14:backgroundMark x1="95264" y1="19646" x2="99063" y2="22472"/>
+                        <a14:backgroundMark x1="72250" y1="2528" x2="84419" y2="11579"/>
+                        <a14:backgroundMark x1="99063" y1="22472" x2="99563" y2="1685"/>
+                        <a14:backgroundMark x1="99563" y1="1685" x2="71625" y2="1966"/>
+                        <a14:backgroundMark x1="563" y1="11236" x2="6375" y2="95506"/>
+                        <a14:backgroundMark x1="3125" y1="64607" x2="4500" y2="85112"/>
+                        <a14:backgroundMark x1="2313" y1="66573" x2="3375" y2="64607"/>
+                        <a14:backgroundMark x1="313" y1="17416" x2="625" y2="98315"/>
+                        <a14:backgroundMark x1="1188" y1="19382" x2="4313" y2="98596"/>
+                        <a14:backgroundMark x1="2750" y1="26685" x2="3125" y2="37079"/>
+                        <a14:backgroundMark x1="1750" y1="19382" x2="4500" y2="38483"/>
+                        <a14:backgroundMark x1="1750" y1="15449" x2="1750" y2="15449"/>
+                        <a14:backgroundMark x1="1750" y1="17135" x2="4313" y2="37640"/>
+                        <a14:backgroundMark x1="1875" y1="21910" x2="3938" y2="26966"/>
+                        <a14:backgroundMark x1="4313" y1="3371" x2="4375" y2="39888"/>
+                      </a14:backgroundRemoval>
+                    </a14:imgEffect>
+                  </a14:imgLayer>
+                </a14:imgProps>
+              </a:ext>
+              <a:ext uri="{28A0092B-C50C-407E-A947-70E740481C1C}">
+                <a14:useLocalDpi xmlns:a14="http://schemas.microsoft.com/office/drawing/2010/main" val="0"/>
+              </a:ext>
+            </a:extLst>
+          </a:blip>
+          <a:stretch>
+            <a:fillRect/>
+          </a:stretch>
+        </p:blipFill>
+        <p:spPr>
           <a:xfrm>
-            <a:off x="311700" y="2150850"/>
-            <a:ext cx="8520600" cy="841800"/>
+            <a:off x="5914739" y="183848"/>
+            <a:ext cx="3223157" cy="717152"/>
           </a:xfrm>
           <a:prstGeom prst="rect">
             <a:avLst/>
           </a:prstGeom>
         </p:spPr>
-        <p:txBody>
-          <a:bodyPr spcFirstLastPara="1" wrap="square" lIns="91425" tIns="91425" rIns="91425" bIns="91425" anchor="ctr" anchorCtr="0">
-            <a:normAutofit/>
-          </a:bodyPr>
-          <a:lstStyle>
-            <a:lvl1pPr lvl="0" algn="ctr">
-              <a:spcBef>
-                <a:spcPts val="0"/>
-              </a:spcBef>
-              <a:spcAft>
-                <a:spcPts val="0"/>
-              </a:spcAft>
-              <a:buSzPts val="3600"/>
-              <a:buNone/>
-              <a:defRPr sz="3600"/>
-            </a:lvl1pPr>
-            <a:lvl2pPr lvl="1" algn="ctr">
-              <a:spcBef>
-                <a:spcPts val="0"/>
-              </a:spcBef>
-              <a:spcAft>
-                <a:spcPts val="0"/>
-              </a:spcAft>
-              <a:buSzPts val="3600"/>
-              <a:buNone/>
-              <a:defRPr sz="3600"/>
-            </a:lvl2pPr>
-            <a:lvl3pPr lvl="2" algn="ctr">
-              <a:spcBef>
-                <a:spcPts val="0"/>
-              </a:spcBef>
-              <a:spcAft>
-                <a:spcPts val="0"/>
-              </a:spcAft>
-              <a:buSzPts val="3600"/>
-              <a:buNone/>
-              <a:defRPr sz="3600"/>
-            </a:lvl3pPr>
-            <a:lvl4pPr lvl="3" algn="ctr">
-              <a:spcBef>
-                <a:spcPts val="0"/>
-              </a:spcBef>
-              <a:spcAft>
-                <a:spcPts val="0"/>
-              </a:spcAft>
-              <a:buSzPts val="3600"/>
-              <a:buNone/>
-              <a:defRPr sz="3600"/>
-            </a:lvl4pPr>
-            <a:lvl5pPr lvl="4" algn="ctr">
-              <a:spcBef>
-                <a:spcPts val="0"/>
-              </a:spcBef>
-              <a:spcAft>
-                <a:spcPts val="0"/>
-              </a:spcAft>
-              <a:buSzPts val="3600"/>
-              <a:buNone/>
-              <a:defRPr sz="3600"/>
-            </a:lvl5pPr>
-            <a:lvl6pPr lvl="5" algn="ctr">
-              <a:spcBef>
-                <a:spcPts val="0"/>
-              </a:spcBef>
-              <a:spcAft>
-                <a:spcPts val="0"/>
-              </a:spcAft>
-              <a:buSzPts val="3600"/>
-              <a:buNone/>
-              <a:defRPr sz="3600"/>
-            </a:lvl6pPr>
-            <a:lvl7pPr lvl="6" algn="ctr">
-              <a:spcBef>
-                <a:spcPts val="0"/>
-              </a:spcBef>
-              <a:spcAft>
-                <a:spcPts val="0"/>
-              </a:spcAft>
-              <a:buSzPts val="3600"/>
-              <a:buNone/>
-              <a:defRPr sz="3600"/>
-            </a:lvl7pPr>
-            <a:lvl8pPr lvl="7" algn="ctr">
-              <a:spcBef>
-                <a:spcPts val="0"/>
-              </a:spcBef>
-              <a:spcAft>
-                <a:spcPts val="0"/>
-              </a:spcAft>
-              <a:buSzPts val="3600"/>
-              <a:buNone/>
-              <a:defRPr sz="3600"/>
-            </a:lvl8pPr>
-            <a:lvl9pPr lvl="8" algn="ctr">
-              <a:spcBef>
-                <a:spcPts val="0"/>
-              </a:spcBef>
-              <a:spcAft>
-                <a:spcPts val="0"/>
-              </a:spcAft>
-              <a:buSzPts val="3600"/>
-              <a:buNone/>
-              <a:defRPr sz="3600"/>
-            </a:lvl9pPr>
-          </a:lstStyle>
-          <a:p>
-            <a:endParaRPr/>
-          </a:p>
-        </p:txBody>
-      </p:sp>
-      <p:sp>
-        <p:nvSpPr>
-          <p:cNvPr id="15" name="Google Shape;15;p3"/>
-          <p:cNvSpPr txBox="1">
-            <a:spLocks noGrp="1"/>
-          </p:cNvSpPr>
-          <p:nvPr>
-            <p:ph type="sldNum" idx="12"/>
-          </p:nvPr>
-        </p:nvSpPr>
-        <p:spPr>
-          <a:xfrm>
-            <a:off x="8472458" y="4663217"/>
-            <a:ext cx="548700" cy="393600"/>
-          </a:xfrm>
-          <a:prstGeom prst="rect">
-            <a:avLst/>
-          </a:prstGeom>
-        </p:spPr>
-        <p:txBody>
-          <a:bodyPr spcFirstLastPara="1" wrap="square" lIns="91425" tIns="91425" rIns="91425" bIns="91425" anchor="ctr" anchorCtr="0">
-            <a:normAutofit/>
-          </a:bodyPr>
-          <a:lstStyle>
-            <a:lvl1pPr lvl="0">
-              <a:buNone/>
-              <a:defRPr/>
-            </a:lvl1pPr>
-            <a:lvl2pPr lvl="1">
-              <a:buNone/>
-              <a:defRPr/>
-            </a:lvl2pPr>
-            <a:lvl3pPr lvl="2">
-              <a:buNone/>
-              <a:defRPr/>
-            </a:lvl3pPr>
-            <a:lvl4pPr lvl="3">
-              <a:buNone/>
-              <a:defRPr/>
-            </a:lvl4pPr>
-            <a:lvl5pPr lvl="4">
-              <a:buNone/>
-              <a:defRPr/>
-            </a:lvl5pPr>
-            <a:lvl6pPr lvl="5">
-              <a:buNone/>
-              <a:defRPr/>
-            </a:lvl6pPr>
-            <a:lvl7pPr lvl="6">
-              <a:buNone/>
-              <a:defRPr/>
-            </a:lvl7pPr>
-            <a:lvl8pPr lvl="7">
-              <a:buNone/>
-              <a:defRPr/>
-            </a:lvl8pPr>
-            <a:lvl9pPr lvl="8">
-              <a:buNone/>
-              <a:defRPr/>
-            </a:lvl9pPr>
-          </a:lstStyle>
-          <a:p>
-            <a:pPr marL="0" lvl="0" indent="0" algn="r" rtl="0">
-              <a:spcBef>
-                <a:spcPts val="0"/>
-              </a:spcBef>
-              <a:spcAft>
-                <a:spcPts val="0"/>
-              </a:spcAft>
-              <a:buNone/>
-            </a:pPr>
-            <a:fld id="{00000000-1234-1234-1234-123412341234}" type="slidenum">
-              <a:rPr lang="en-GB"/>
-              <a:t>‹#›</a:t>
-            </a:fld>
-            <a:endParaRPr lang="en-GB"/>
-          </a:p>
-        </p:txBody>
-      </p:sp>
+      </p:pic>
     </p:spTree>
   </p:cSld>
   <p:clrMapOvr>
@@ -4585,7 +5100,7 @@
 </file>
 
 <file path=ppt/slideLayouts/slideLayout3.xml><?xml version="1.0" encoding="utf-8"?>
-<p:sldLayout xmlns:a="http://schemas.openxmlformats.org/drawingml/2006/main" xmlns:r="http://schemas.openxmlformats.org/officeDocument/2006/relationships" xmlns:p="http://schemas.openxmlformats.org/presentationml/2006/main" matchingName="Title and body" type="tx">
+<p:sldLayout xmlns:a="http://schemas.openxmlformats.org/drawingml/2006/main" xmlns:r="http://schemas.openxmlformats.org/officeDocument/2006/relationships" xmlns:p="http://schemas.openxmlformats.org/presentationml/2006/main" matchingName="Title and body" userDrawn="1">
   <p:cSld name="TITLE_AND_BODY">
     <p:spTree>
       <p:nvGrpSpPr>
@@ -4603,341 +5118,846 @@
       </p:grpSpPr>
       <p:sp>
         <p:nvSpPr>
-          <p:cNvPr id="17" name="Google Shape;17;p4"/>
-          <p:cNvSpPr txBox="1">
+          <p:cNvPr id="2" name="文本占位符 29">
+            <a:extLst>
+              <a:ext uri="{FF2B5EF4-FFF2-40B4-BE49-F238E27FC236}">
+                <a16:creationId xmlns:a16="http://schemas.microsoft.com/office/drawing/2014/main" id="{B02EB142-B77D-7FB8-110B-883ABED27942}"/>
+              </a:ext>
+            </a:extLst>
+          </p:cNvPr>
+          <p:cNvSpPr>
             <a:spLocks noGrp="1"/>
           </p:cNvSpPr>
           <p:nvPr>
-            <p:ph type="title"/>
+            <p:ph type="body" sz="quarter" idx="10"/>
           </p:nvPr>
         </p:nvSpPr>
         <p:spPr>
           <a:xfrm>
-            <a:off x="311700" y="445025"/>
-            <a:ext cx="8520600" cy="572700"/>
+            <a:off x="558671" y="378407"/>
+            <a:ext cx="8370918" cy="727947"/>
+          </a:xfrm>
+        </p:spPr>
+        <p:txBody>
+          <a:bodyPr>
+            <a:noAutofit/>
+          </a:bodyPr>
+          <a:lstStyle>
+            <a:lvl1pPr marL="0" indent="0">
+              <a:lnSpc>
+                <a:spcPct val="100000"/>
+              </a:lnSpc>
+              <a:buNone/>
+              <a:defRPr sz="3800" b="1">
+                <a:solidFill>
+                  <a:srgbClr val="008A41"/>
+                </a:solidFill>
+                <a:latin typeface="Times New Roman" panose="02020603050405020304" pitchFamily="18" charset="0"/>
+                <a:ea typeface="黑体" panose="02010609060101010101" pitchFamily="49" charset="-122"/>
+                <a:cs typeface="Times New Roman" panose="02020603050405020304" pitchFamily="18" charset="0"/>
+              </a:defRPr>
+            </a:lvl1pPr>
+            <a:lvl2pPr>
+              <a:defRPr sz="4000">
+                <a:latin typeface="Times New Roman" panose="02020603050405020304" pitchFamily="18" charset="0"/>
+                <a:ea typeface="宋体" panose="02010600030101010101" pitchFamily="2" charset="-122"/>
+                <a:cs typeface="Times New Roman" panose="02020603050405020304" pitchFamily="18" charset="0"/>
+              </a:defRPr>
+            </a:lvl2pPr>
+            <a:lvl3pPr>
+              <a:defRPr sz="4000">
+                <a:latin typeface="Times New Roman" panose="02020603050405020304" pitchFamily="18" charset="0"/>
+                <a:ea typeface="宋体" panose="02010600030101010101" pitchFamily="2" charset="-122"/>
+                <a:cs typeface="Times New Roman" panose="02020603050405020304" pitchFamily="18" charset="0"/>
+              </a:defRPr>
+            </a:lvl3pPr>
+            <a:lvl4pPr>
+              <a:defRPr sz="4000">
+                <a:latin typeface="Times New Roman" panose="02020603050405020304" pitchFamily="18" charset="0"/>
+                <a:ea typeface="宋体" panose="02010600030101010101" pitchFamily="2" charset="-122"/>
+                <a:cs typeface="Times New Roman" panose="02020603050405020304" pitchFamily="18" charset="0"/>
+              </a:defRPr>
+            </a:lvl4pPr>
+            <a:lvl5pPr>
+              <a:defRPr sz="4000">
+                <a:latin typeface="Times New Roman" panose="02020603050405020304" pitchFamily="18" charset="0"/>
+                <a:ea typeface="宋体" panose="02010600030101010101" pitchFamily="2" charset="-122"/>
+                <a:cs typeface="Times New Roman" panose="02020603050405020304" pitchFamily="18" charset="0"/>
+              </a:defRPr>
+            </a:lvl5pPr>
+          </a:lstStyle>
+          <a:p>
+            <a:pPr lvl="0"/>
+            <a:endParaRPr lang="zh-CN" altLang="en-US" dirty="0"/>
+          </a:p>
+        </p:txBody>
+      </p:sp>
+      <p:cxnSp>
+        <p:nvCxnSpPr>
+          <p:cNvPr id="3" name="直接连接符 2">
+            <a:extLst>
+              <a:ext uri="{FF2B5EF4-FFF2-40B4-BE49-F238E27FC236}">
+                <a16:creationId xmlns:a16="http://schemas.microsoft.com/office/drawing/2014/main" id="{C3559C77-5638-1F29-F6A6-79DA9ECFE803}"/>
+              </a:ext>
+            </a:extLst>
+          </p:cNvPr>
+          <p:cNvCxnSpPr>
+            <a:cxnSpLocks/>
+          </p:cNvCxnSpPr>
+          <p:nvPr userDrawn="1"/>
+        </p:nvCxnSpPr>
+        <p:spPr>
+          <a:xfrm flipV="1">
+            <a:off x="659760" y="1105817"/>
+            <a:ext cx="8269829" cy="1"/>
+          </a:xfrm>
+          <a:prstGeom prst="line">
+            <a:avLst/>
+          </a:prstGeom>
+          <a:ln w="31750">
+            <a:solidFill>
+              <a:srgbClr val="008A41"/>
+            </a:solidFill>
+          </a:ln>
+        </p:spPr>
+        <p:style>
+          <a:lnRef idx="1">
+            <a:schemeClr val="accent1"/>
+          </a:lnRef>
+          <a:fillRef idx="0">
+            <a:schemeClr val="accent1"/>
+          </a:fillRef>
+          <a:effectRef idx="0">
+            <a:schemeClr val="accent1"/>
+          </a:effectRef>
+          <a:fontRef idx="minor">
+            <a:schemeClr val="tx1"/>
+          </a:fontRef>
+        </p:style>
+      </p:cxnSp>
+      <p:sp>
+        <p:nvSpPr>
+          <p:cNvPr id="4" name="矩形 7">
+            <a:extLst>
+              <a:ext uri="{FF2B5EF4-FFF2-40B4-BE49-F238E27FC236}">
+                <a16:creationId xmlns:a16="http://schemas.microsoft.com/office/drawing/2014/main" id="{343F4963-B87A-77CC-92BB-20787A2A6703}"/>
+              </a:ext>
+            </a:extLst>
+          </p:cNvPr>
+          <p:cNvSpPr/>
+          <p:nvPr userDrawn="1"/>
+        </p:nvSpPr>
+        <p:spPr>
+          <a:xfrm flipH="1">
+            <a:off x="0" y="4778374"/>
+            <a:ext cx="9144000" cy="388032"/>
+          </a:xfrm>
+          <a:custGeom>
+            <a:avLst/>
+            <a:gdLst>
+              <a:gd name="connsiteX0" fmla="*/ 0 w 12192000"/>
+              <a:gd name="connsiteY0" fmla="*/ 0 h 609599"/>
+              <a:gd name="connsiteX1" fmla="*/ 12192000 w 12192000"/>
+              <a:gd name="connsiteY1" fmla="*/ 0 h 609599"/>
+              <a:gd name="connsiteX2" fmla="*/ 12192000 w 12192000"/>
+              <a:gd name="connsiteY2" fmla="*/ 609599 h 609599"/>
+              <a:gd name="connsiteX3" fmla="*/ 0 w 12192000"/>
+              <a:gd name="connsiteY3" fmla="*/ 609599 h 609599"/>
+              <a:gd name="connsiteX4" fmla="*/ 0 w 12192000"/>
+              <a:gd name="connsiteY4" fmla="*/ 0 h 609599"/>
+              <a:gd name="connsiteX0" fmla="*/ 0 w 12192000"/>
+              <a:gd name="connsiteY0" fmla="*/ 548640 h 1158239"/>
+              <a:gd name="connsiteX1" fmla="*/ 12192000 w 12192000"/>
+              <a:gd name="connsiteY1" fmla="*/ 548640 h 1158239"/>
+              <a:gd name="connsiteX2" fmla="*/ 12192000 w 12192000"/>
+              <a:gd name="connsiteY2" fmla="*/ 1158239 h 1158239"/>
+              <a:gd name="connsiteX3" fmla="*/ 0 w 12192000"/>
+              <a:gd name="connsiteY3" fmla="*/ 1158239 h 1158239"/>
+              <a:gd name="connsiteX4" fmla="*/ 0 w 12192000"/>
+              <a:gd name="connsiteY4" fmla="*/ 548640 h 1158239"/>
+              <a:gd name="connsiteX0" fmla="*/ 0 w 12192000"/>
+              <a:gd name="connsiteY0" fmla="*/ 376700 h 986299"/>
+              <a:gd name="connsiteX1" fmla="*/ 12192000 w 12192000"/>
+              <a:gd name="connsiteY1" fmla="*/ 376700 h 986299"/>
+              <a:gd name="connsiteX2" fmla="*/ 12192000 w 12192000"/>
+              <a:gd name="connsiteY2" fmla="*/ 986299 h 986299"/>
+              <a:gd name="connsiteX3" fmla="*/ 0 w 12192000"/>
+              <a:gd name="connsiteY3" fmla="*/ 986299 h 986299"/>
+              <a:gd name="connsiteX4" fmla="*/ 0 w 12192000"/>
+              <a:gd name="connsiteY4" fmla="*/ 376700 h 986299"/>
+              <a:gd name="connsiteX0" fmla="*/ 0 w 12192000"/>
+              <a:gd name="connsiteY0" fmla="*/ 438928 h 1048527"/>
+              <a:gd name="connsiteX1" fmla="*/ 12192000 w 12192000"/>
+              <a:gd name="connsiteY1" fmla="*/ 438928 h 1048527"/>
+              <a:gd name="connsiteX2" fmla="*/ 12192000 w 12192000"/>
+              <a:gd name="connsiteY2" fmla="*/ 1048527 h 1048527"/>
+              <a:gd name="connsiteX3" fmla="*/ 0 w 12192000"/>
+              <a:gd name="connsiteY3" fmla="*/ 1048527 h 1048527"/>
+              <a:gd name="connsiteX4" fmla="*/ 0 w 12192000"/>
+              <a:gd name="connsiteY4" fmla="*/ 438928 h 1048527"/>
+              <a:gd name="connsiteX0" fmla="*/ 0 w 12192000"/>
+              <a:gd name="connsiteY0" fmla="*/ 181799 h 791398"/>
+              <a:gd name="connsiteX1" fmla="*/ 12192000 w 12192000"/>
+              <a:gd name="connsiteY1" fmla="*/ 181799 h 791398"/>
+              <a:gd name="connsiteX2" fmla="*/ 12192000 w 12192000"/>
+              <a:gd name="connsiteY2" fmla="*/ 791398 h 791398"/>
+              <a:gd name="connsiteX3" fmla="*/ 0 w 12192000"/>
+              <a:gd name="connsiteY3" fmla="*/ 791398 h 791398"/>
+              <a:gd name="connsiteX4" fmla="*/ 0 w 12192000"/>
+              <a:gd name="connsiteY4" fmla="*/ 181799 h 791398"/>
+              <a:gd name="connsiteX0" fmla="*/ 0 w 12192000"/>
+              <a:gd name="connsiteY0" fmla="*/ 187345 h 796944"/>
+              <a:gd name="connsiteX1" fmla="*/ 12192000 w 12192000"/>
+              <a:gd name="connsiteY1" fmla="*/ 187345 h 796944"/>
+              <a:gd name="connsiteX2" fmla="*/ 12192000 w 12192000"/>
+              <a:gd name="connsiteY2" fmla="*/ 796944 h 796944"/>
+              <a:gd name="connsiteX3" fmla="*/ 0 w 12192000"/>
+              <a:gd name="connsiteY3" fmla="*/ 796944 h 796944"/>
+              <a:gd name="connsiteX4" fmla="*/ 0 w 12192000"/>
+              <a:gd name="connsiteY4" fmla="*/ 187345 h 796944"/>
+              <a:gd name="connsiteX0" fmla="*/ 0 w 12192000"/>
+              <a:gd name="connsiteY0" fmla="*/ 154569 h 764168"/>
+              <a:gd name="connsiteX1" fmla="*/ 12192000 w 12192000"/>
+              <a:gd name="connsiteY1" fmla="*/ 154569 h 764168"/>
+              <a:gd name="connsiteX2" fmla="*/ 12192000 w 12192000"/>
+              <a:gd name="connsiteY2" fmla="*/ 764168 h 764168"/>
+              <a:gd name="connsiteX3" fmla="*/ 0 w 12192000"/>
+              <a:gd name="connsiteY3" fmla="*/ 764168 h 764168"/>
+              <a:gd name="connsiteX4" fmla="*/ 0 w 12192000"/>
+              <a:gd name="connsiteY4" fmla="*/ 154569 h 764168"/>
+              <a:gd name="connsiteX0" fmla="*/ 0 w 12192000"/>
+              <a:gd name="connsiteY0" fmla="*/ 165354 h 774953"/>
+              <a:gd name="connsiteX1" fmla="*/ 12192000 w 12192000"/>
+              <a:gd name="connsiteY1" fmla="*/ 165354 h 774953"/>
+              <a:gd name="connsiteX2" fmla="*/ 12192000 w 12192000"/>
+              <a:gd name="connsiteY2" fmla="*/ 774953 h 774953"/>
+              <a:gd name="connsiteX3" fmla="*/ 0 w 12192000"/>
+              <a:gd name="connsiteY3" fmla="*/ 774953 h 774953"/>
+              <a:gd name="connsiteX4" fmla="*/ 0 w 12192000"/>
+              <a:gd name="connsiteY4" fmla="*/ 165354 h 774953"/>
+              <a:gd name="connsiteX0" fmla="*/ 0 w 12192000"/>
+              <a:gd name="connsiteY0" fmla="*/ 181798 h 791397"/>
+              <a:gd name="connsiteX1" fmla="*/ 12192000 w 12192000"/>
+              <a:gd name="connsiteY1" fmla="*/ 181798 h 791397"/>
+              <a:gd name="connsiteX2" fmla="*/ 12192000 w 12192000"/>
+              <a:gd name="connsiteY2" fmla="*/ 791397 h 791397"/>
+              <a:gd name="connsiteX3" fmla="*/ 0 w 12192000"/>
+              <a:gd name="connsiteY3" fmla="*/ 791397 h 791397"/>
+              <a:gd name="connsiteX4" fmla="*/ 0 w 12192000"/>
+              <a:gd name="connsiteY4" fmla="*/ 181798 h 791397"/>
+              <a:gd name="connsiteX0" fmla="*/ 0 w 12192000"/>
+              <a:gd name="connsiteY0" fmla="*/ 88858 h 698457"/>
+              <a:gd name="connsiteX1" fmla="*/ 12192000 w 12192000"/>
+              <a:gd name="connsiteY1" fmla="*/ 88858 h 698457"/>
+              <a:gd name="connsiteX2" fmla="*/ 12192000 w 12192000"/>
+              <a:gd name="connsiteY2" fmla="*/ 698457 h 698457"/>
+              <a:gd name="connsiteX3" fmla="*/ 0 w 12192000"/>
+              <a:gd name="connsiteY3" fmla="*/ 698457 h 698457"/>
+              <a:gd name="connsiteX4" fmla="*/ 0 w 12192000"/>
+              <a:gd name="connsiteY4" fmla="*/ 88858 h 698457"/>
+              <a:gd name="connsiteX0" fmla="*/ 10160 w 12192000"/>
+              <a:gd name="connsiteY0" fmla="*/ 93903 h 612062"/>
+              <a:gd name="connsiteX1" fmla="*/ 12192000 w 12192000"/>
+              <a:gd name="connsiteY1" fmla="*/ 2463 h 612062"/>
+              <a:gd name="connsiteX2" fmla="*/ 12192000 w 12192000"/>
+              <a:gd name="connsiteY2" fmla="*/ 612062 h 612062"/>
+              <a:gd name="connsiteX3" fmla="*/ 0 w 12192000"/>
+              <a:gd name="connsiteY3" fmla="*/ 612062 h 612062"/>
+              <a:gd name="connsiteX4" fmla="*/ 10160 w 12192000"/>
+              <a:gd name="connsiteY4" fmla="*/ 93903 h 612062"/>
+              <a:gd name="connsiteX0" fmla="*/ 0 w 12181840"/>
+              <a:gd name="connsiteY0" fmla="*/ 93903 h 612062"/>
+              <a:gd name="connsiteX1" fmla="*/ 12181840 w 12181840"/>
+              <a:gd name="connsiteY1" fmla="*/ 2463 h 612062"/>
+              <a:gd name="connsiteX2" fmla="*/ 12181840 w 12181840"/>
+              <a:gd name="connsiteY2" fmla="*/ 612062 h 612062"/>
+              <a:gd name="connsiteX3" fmla="*/ 12700 w 12181840"/>
+              <a:gd name="connsiteY3" fmla="*/ 612062 h 612062"/>
+              <a:gd name="connsiteX4" fmla="*/ 0 w 12181840"/>
+              <a:gd name="connsiteY4" fmla="*/ 93903 h 612062"/>
+              <a:gd name="connsiteX0" fmla="*/ 0 w 12181840"/>
+              <a:gd name="connsiteY0" fmla="*/ 93459 h 619238"/>
+              <a:gd name="connsiteX1" fmla="*/ 12181840 w 12181840"/>
+              <a:gd name="connsiteY1" fmla="*/ 9639 h 619238"/>
+              <a:gd name="connsiteX2" fmla="*/ 12181840 w 12181840"/>
+              <a:gd name="connsiteY2" fmla="*/ 619238 h 619238"/>
+              <a:gd name="connsiteX3" fmla="*/ 12700 w 12181840"/>
+              <a:gd name="connsiteY3" fmla="*/ 619238 h 619238"/>
+              <a:gd name="connsiteX4" fmla="*/ 0 w 12181840"/>
+              <a:gd name="connsiteY4" fmla="*/ 93459 h 619238"/>
+              <a:gd name="connsiteX0" fmla="*/ 0 w 12181840"/>
+              <a:gd name="connsiteY0" fmla="*/ 93459 h 619238"/>
+              <a:gd name="connsiteX1" fmla="*/ 12181840 w 12181840"/>
+              <a:gd name="connsiteY1" fmla="*/ 9639 h 619238"/>
+              <a:gd name="connsiteX2" fmla="*/ 12181840 w 12181840"/>
+              <a:gd name="connsiteY2" fmla="*/ 619238 h 619238"/>
+              <a:gd name="connsiteX3" fmla="*/ 12700 w 12181840"/>
+              <a:gd name="connsiteY3" fmla="*/ 619238 h 619238"/>
+              <a:gd name="connsiteX4" fmla="*/ 0 w 12181840"/>
+              <a:gd name="connsiteY4" fmla="*/ 93459 h 619238"/>
+              <a:gd name="connsiteX0" fmla="*/ 0 w 12197080"/>
+              <a:gd name="connsiteY0" fmla="*/ 93459 h 619238"/>
+              <a:gd name="connsiteX1" fmla="*/ 12197080 w 12197080"/>
+              <a:gd name="connsiteY1" fmla="*/ 9639 h 619238"/>
+              <a:gd name="connsiteX2" fmla="*/ 12197080 w 12197080"/>
+              <a:gd name="connsiteY2" fmla="*/ 619238 h 619238"/>
+              <a:gd name="connsiteX3" fmla="*/ 27940 w 12197080"/>
+              <a:gd name="connsiteY3" fmla="*/ 619238 h 619238"/>
+              <a:gd name="connsiteX4" fmla="*/ 0 w 12197080"/>
+              <a:gd name="connsiteY4" fmla="*/ 93459 h 619238"/>
+              <a:gd name="connsiteX0" fmla="*/ 2540 w 12199620"/>
+              <a:gd name="connsiteY0" fmla="*/ 93459 h 619238"/>
+              <a:gd name="connsiteX1" fmla="*/ 12199620 w 12199620"/>
+              <a:gd name="connsiteY1" fmla="*/ 9639 h 619238"/>
+              <a:gd name="connsiteX2" fmla="*/ 12199620 w 12199620"/>
+              <a:gd name="connsiteY2" fmla="*/ 619238 h 619238"/>
+              <a:gd name="connsiteX3" fmla="*/ 0 w 12199620"/>
+              <a:gd name="connsiteY3" fmla="*/ 611618 h 619238"/>
+              <a:gd name="connsiteX4" fmla="*/ 2540 w 12199620"/>
+              <a:gd name="connsiteY4" fmla="*/ 93459 h 619238"/>
+              <a:gd name="connsiteX0" fmla="*/ 153 w 12201043"/>
+              <a:gd name="connsiteY0" fmla="*/ 152400 h 609599"/>
+              <a:gd name="connsiteX1" fmla="*/ 12201043 w 12201043"/>
+              <a:gd name="connsiteY1" fmla="*/ 0 h 609599"/>
+              <a:gd name="connsiteX2" fmla="*/ 12201043 w 12201043"/>
+              <a:gd name="connsiteY2" fmla="*/ 609599 h 609599"/>
+              <a:gd name="connsiteX3" fmla="*/ 1423 w 12201043"/>
+              <a:gd name="connsiteY3" fmla="*/ 601979 h 609599"/>
+              <a:gd name="connsiteX4" fmla="*/ 153 w 12201043"/>
+              <a:gd name="connsiteY4" fmla="*/ 152400 h 609599"/>
+              <a:gd name="connsiteX0" fmla="*/ 153 w 12201043"/>
+              <a:gd name="connsiteY0" fmla="*/ 184785 h 609599"/>
+              <a:gd name="connsiteX1" fmla="*/ 12201043 w 12201043"/>
+              <a:gd name="connsiteY1" fmla="*/ 0 h 609599"/>
+              <a:gd name="connsiteX2" fmla="*/ 12201043 w 12201043"/>
+              <a:gd name="connsiteY2" fmla="*/ 609599 h 609599"/>
+              <a:gd name="connsiteX3" fmla="*/ 1423 w 12201043"/>
+              <a:gd name="connsiteY3" fmla="*/ 601979 h 609599"/>
+              <a:gd name="connsiteX4" fmla="*/ 153 w 12201043"/>
+              <a:gd name="connsiteY4" fmla="*/ 184785 h 609599"/>
+            </a:gdLst>
+            <a:ahLst/>
+            <a:cxnLst>
+              <a:cxn ang="0">
+                <a:pos x="connsiteX0" y="connsiteY0"/>
+              </a:cxn>
+              <a:cxn ang="0">
+                <a:pos x="connsiteX1" y="connsiteY1"/>
+              </a:cxn>
+              <a:cxn ang="0">
+                <a:pos x="connsiteX2" y="connsiteY2"/>
+              </a:cxn>
+              <a:cxn ang="0">
+                <a:pos x="connsiteX3" y="connsiteY3"/>
+              </a:cxn>
+              <a:cxn ang="0">
+                <a:pos x="connsiteX4" y="connsiteY4"/>
+              </a:cxn>
+            </a:cxnLst>
+            <a:rect l="l" t="t" r="r" b="b"/>
+            <a:pathLst>
+              <a:path w="12201043" h="609599">
+                <a:moveTo>
+                  <a:pt x="153" y="184785"/>
+                </a:moveTo>
+                <a:cubicBezTo>
+                  <a:pt x="6075833" y="-272415"/>
+                  <a:pt x="8457083" y="1051560"/>
+                  <a:pt x="12201043" y="0"/>
+                </a:cubicBezTo>
+                <a:lnTo>
+                  <a:pt x="12201043" y="609599"/>
+                </a:lnTo>
+                <a:lnTo>
+                  <a:pt x="1423" y="601979"/>
+                </a:lnTo>
+                <a:cubicBezTo>
+                  <a:pt x="2270" y="429259"/>
+                  <a:pt x="-694" y="357505"/>
+                  <a:pt x="153" y="184785"/>
+                </a:cubicBezTo>
+                <a:close/>
+              </a:path>
+            </a:pathLst>
+          </a:custGeom>
+          <a:gradFill flip="none" rotWithShape="1">
+            <a:gsLst>
+              <a:gs pos="60000">
+                <a:srgbClr val="008A41">
+                  <a:alpha val="49804"/>
+                </a:srgbClr>
+              </a:gs>
+              <a:gs pos="0">
+                <a:srgbClr val="008A41">
+                  <a:alpha val="70000"/>
+                </a:srgbClr>
+              </a:gs>
+              <a:gs pos="100000">
+                <a:srgbClr val="A0D2B4"/>
+              </a:gs>
+            </a:gsLst>
+            <a:lin ang="0" scaled="1"/>
+            <a:tileRect/>
+          </a:gradFill>
+          <a:ln>
+            <a:noFill/>
+          </a:ln>
+        </p:spPr>
+        <p:style>
+          <a:lnRef idx="2">
+            <a:schemeClr val="accent1">
+              <a:shade val="50000"/>
+            </a:schemeClr>
+          </a:lnRef>
+          <a:fillRef idx="1">
+            <a:schemeClr val="accent1"/>
+          </a:fillRef>
+          <a:effectRef idx="0">
+            <a:schemeClr val="accent1"/>
+          </a:effectRef>
+          <a:fontRef idx="minor">
+            <a:schemeClr val="lt1"/>
+          </a:fontRef>
+        </p:style>
+        <p:txBody>
+          <a:bodyPr rtlCol="0" anchor="ctr"/>
+          <a:lstStyle/>
+          <a:p>
+            <a:pPr algn="ctr"/>
+            <a:endParaRPr lang="zh-CN" altLang="en-US"/>
+          </a:p>
+        </p:txBody>
+      </p:sp>
+      <p:sp>
+        <p:nvSpPr>
+          <p:cNvPr id="5" name="任意多边形: 形状 4">
+            <a:extLst>
+              <a:ext uri="{FF2B5EF4-FFF2-40B4-BE49-F238E27FC236}">
+                <a16:creationId xmlns:a16="http://schemas.microsoft.com/office/drawing/2014/main" id="{B093E80A-D6BC-C1D2-A250-A34AC077B19D}"/>
+              </a:ext>
+            </a:extLst>
+          </p:cNvPr>
+          <p:cNvSpPr/>
+          <p:nvPr userDrawn="1"/>
+        </p:nvSpPr>
+        <p:spPr>
+          <a:xfrm flipH="1" flipV="1">
+            <a:off x="-6103" y="-10167"/>
+            <a:ext cx="9143999" cy="388031"/>
+          </a:xfrm>
+          <a:custGeom>
+            <a:avLst/>
+            <a:gdLst>
+              <a:gd name="connsiteX0" fmla="*/ 12192000 w 12192000"/>
+              <a:gd name="connsiteY0" fmla="*/ 0 h 2039768"/>
+              <a:gd name="connsiteX1" fmla="*/ 12192000 w 12192000"/>
+              <a:gd name="connsiteY1" fmla="*/ 2039768 h 2039768"/>
+              <a:gd name="connsiteX2" fmla="*/ 0 w 12192000"/>
+              <a:gd name="connsiteY2" fmla="*/ 2039768 h 2039768"/>
+              <a:gd name="connsiteX3" fmla="*/ 0 w 12192000"/>
+              <a:gd name="connsiteY3" fmla="*/ 819391 h 2039768"/>
+              <a:gd name="connsiteX4" fmla="*/ 37309 w 12192000"/>
+              <a:gd name="connsiteY4" fmla="*/ 834936 h 2039768"/>
+              <a:gd name="connsiteX5" fmla="*/ 5319640 w 12192000"/>
+              <a:gd name="connsiteY5" fmla="*/ 1747868 h 2039768"/>
+              <a:gd name="connsiteX6" fmla="*/ 11971651 w 12192000"/>
+              <a:gd name="connsiteY6" fmla="*/ 149892 h 2039768"/>
+              <a:gd name="connsiteX0" fmla="*/ 12192000 w 12192000"/>
+              <a:gd name="connsiteY0" fmla="*/ 373966 h 1893600"/>
+              <a:gd name="connsiteX1" fmla="*/ 12192000 w 12192000"/>
+              <a:gd name="connsiteY1" fmla="*/ 1893600 h 1893600"/>
+              <a:gd name="connsiteX2" fmla="*/ 0 w 12192000"/>
+              <a:gd name="connsiteY2" fmla="*/ 1893600 h 1893600"/>
+              <a:gd name="connsiteX3" fmla="*/ 0 w 12192000"/>
+              <a:gd name="connsiteY3" fmla="*/ 673223 h 1893600"/>
+              <a:gd name="connsiteX4" fmla="*/ 37309 w 12192000"/>
+              <a:gd name="connsiteY4" fmla="*/ 688768 h 1893600"/>
+              <a:gd name="connsiteX5" fmla="*/ 5319640 w 12192000"/>
+              <a:gd name="connsiteY5" fmla="*/ 1601700 h 1893600"/>
+              <a:gd name="connsiteX6" fmla="*/ 11971651 w 12192000"/>
+              <a:gd name="connsiteY6" fmla="*/ 3724 h 1893600"/>
+              <a:gd name="connsiteX7" fmla="*/ 12192000 w 12192000"/>
+              <a:gd name="connsiteY7" fmla="*/ 373966 h 1893600"/>
+              <a:gd name="connsiteX0" fmla="*/ 12192000 w 12192000"/>
+              <a:gd name="connsiteY0" fmla="*/ 1413 h 1521047"/>
+              <a:gd name="connsiteX1" fmla="*/ 12192000 w 12192000"/>
+              <a:gd name="connsiteY1" fmla="*/ 1521047 h 1521047"/>
+              <a:gd name="connsiteX2" fmla="*/ 0 w 12192000"/>
+              <a:gd name="connsiteY2" fmla="*/ 1521047 h 1521047"/>
+              <a:gd name="connsiteX3" fmla="*/ 0 w 12192000"/>
+              <a:gd name="connsiteY3" fmla="*/ 300670 h 1521047"/>
+              <a:gd name="connsiteX4" fmla="*/ 37309 w 12192000"/>
+              <a:gd name="connsiteY4" fmla="*/ 316215 h 1521047"/>
+              <a:gd name="connsiteX5" fmla="*/ 5319640 w 12192000"/>
+              <a:gd name="connsiteY5" fmla="*/ 1229147 h 1521047"/>
+              <a:gd name="connsiteX6" fmla="*/ 12192000 w 12192000"/>
+              <a:gd name="connsiteY6" fmla="*/ 1413 h 1521047"/>
+              <a:gd name="connsiteX0" fmla="*/ 12192000 w 12192000"/>
+              <a:gd name="connsiteY0" fmla="*/ 0 h 1519634"/>
+              <a:gd name="connsiteX1" fmla="*/ 12192000 w 12192000"/>
+              <a:gd name="connsiteY1" fmla="*/ 1519634 h 1519634"/>
+              <a:gd name="connsiteX2" fmla="*/ 0 w 12192000"/>
+              <a:gd name="connsiteY2" fmla="*/ 1519634 h 1519634"/>
+              <a:gd name="connsiteX3" fmla="*/ 0 w 12192000"/>
+              <a:gd name="connsiteY3" fmla="*/ 299257 h 1519634"/>
+              <a:gd name="connsiteX4" fmla="*/ 37309 w 12192000"/>
+              <a:gd name="connsiteY4" fmla="*/ 314802 h 1519634"/>
+              <a:gd name="connsiteX5" fmla="*/ 5319640 w 12192000"/>
+              <a:gd name="connsiteY5" fmla="*/ 1227734 h 1519634"/>
+              <a:gd name="connsiteX6" fmla="*/ 12192000 w 12192000"/>
+              <a:gd name="connsiteY6" fmla="*/ 0 h 1519634"/>
+              <a:gd name="connsiteX0" fmla="*/ 12192000 w 12192000"/>
+              <a:gd name="connsiteY0" fmla="*/ 0 h 1519634"/>
+              <a:gd name="connsiteX1" fmla="*/ 12192000 w 12192000"/>
+              <a:gd name="connsiteY1" fmla="*/ 1519634 h 1519634"/>
+              <a:gd name="connsiteX2" fmla="*/ 0 w 12192000"/>
+              <a:gd name="connsiteY2" fmla="*/ 1519634 h 1519634"/>
+              <a:gd name="connsiteX3" fmla="*/ 0 w 12192000"/>
+              <a:gd name="connsiteY3" fmla="*/ 299257 h 1519634"/>
+              <a:gd name="connsiteX4" fmla="*/ 140179 w 12192000"/>
+              <a:gd name="connsiteY4" fmla="*/ 401490 h 1519634"/>
+              <a:gd name="connsiteX5" fmla="*/ 5319640 w 12192000"/>
+              <a:gd name="connsiteY5" fmla="*/ 1227734 h 1519634"/>
+              <a:gd name="connsiteX6" fmla="*/ 12192000 w 12192000"/>
+              <a:gd name="connsiteY6" fmla="*/ 0 h 1519634"/>
+              <a:gd name="connsiteX0" fmla="*/ 12192000 w 12192000"/>
+              <a:gd name="connsiteY0" fmla="*/ 0 h 1519634"/>
+              <a:gd name="connsiteX1" fmla="*/ 12192000 w 12192000"/>
+              <a:gd name="connsiteY1" fmla="*/ 1519634 h 1519634"/>
+              <a:gd name="connsiteX2" fmla="*/ 0 w 12192000"/>
+              <a:gd name="connsiteY2" fmla="*/ 1519634 h 1519634"/>
+              <a:gd name="connsiteX3" fmla="*/ 0 w 12192000"/>
+              <a:gd name="connsiteY3" fmla="*/ 299257 h 1519634"/>
+              <a:gd name="connsiteX4" fmla="*/ 5319640 w 12192000"/>
+              <a:gd name="connsiteY4" fmla="*/ 1227734 h 1519634"/>
+              <a:gd name="connsiteX5" fmla="*/ 12192000 w 12192000"/>
+              <a:gd name="connsiteY5" fmla="*/ 0 h 1519634"/>
+              <a:gd name="connsiteX0" fmla="*/ 12192000 w 12192000"/>
+              <a:gd name="connsiteY0" fmla="*/ 0 h 1519634"/>
+              <a:gd name="connsiteX1" fmla="*/ 12192000 w 12192000"/>
+              <a:gd name="connsiteY1" fmla="*/ 1519634 h 1519634"/>
+              <a:gd name="connsiteX2" fmla="*/ 0 w 12192000"/>
+              <a:gd name="connsiteY2" fmla="*/ 1519634 h 1519634"/>
+              <a:gd name="connsiteX3" fmla="*/ 3810 w 12192000"/>
+              <a:gd name="connsiteY3" fmla="*/ 628674 h 1519634"/>
+              <a:gd name="connsiteX4" fmla="*/ 5319640 w 12192000"/>
+              <a:gd name="connsiteY4" fmla="*/ 1227734 h 1519634"/>
+              <a:gd name="connsiteX5" fmla="*/ 12192000 w 12192000"/>
+              <a:gd name="connsiteY5" fmla="*/ 0 h 1519634"/>
+              <a:gd name="connsiteX0" fmla="*/ 12192000 w 12192000"/>
+              <a:gd name="connsiteY0" fmla="*/ 0 h 1519634"/>
+              <a:gd name="connsiteX1" fmla="*/ 12192000 w 12192000"/>
+              <a:gd name="connsiteY1" fmla="*/ 1519634 h 1519634"/>
+              <a:gd name="connsiteX2" fmla="*/ 0 w 12192000"/>
+              <a:gd name="connsiteY2" fmla="*/ 1519634 h 1519634"/>
+              <a:gd name="connsiteX3" fmla="*/ 3810 w 12192000"/>
+              <a:gd name="connsiteY3" fmla="*/ 628674 h 1519634"/>
+              <a:gd name="connsiteX4" fmla="*/ 5319640 w 12192000"/>
+              <a:gd name="connsiteY4" fmla="*/ 1227734 h 1519634"/>
+              <a:gd name="connsiteX5" fmla="*/ 12192000 w 12192000"/>
+              <a:gd name="connsiteY5" fmla="*/ 0 h 1519634"/>
+              <a:gd name="connsiteX0" fmla="*/ 12192000 w 12192000"/>
+              <a:gd name="connsiteY0" fmla="*/ 0 h 1519634"/>
+              <a:gd name="connsiteX1" fmla="*/ 12192000 w 12192000"/>
+              <a:gd name="connsiteY1" fmla="*/ 1519634 h 1519634"/>
+              <a:gd name="connsiteX2" fmla="*/ 0 w 12192000"/>
+              <a:gd name="connsiteY2" fmla="*/ 1519634 h 1519634"/>
+              <a:gd name="connsiteX3" fmla="*/ 3810 w 12192000"/>
+              <a:gd name="connsiteY3" fmla="*/ 628674 h 1519634"/>
+              <a:gd name="connsiteX4" fmla="*/ 5319640 w 12192000"/>
+              <a:gd name="connsiteY4" fmla="*/ 1227734 h 1519634"/>
+              <a:gd name="connsiteX5" fmla="*/ 12192000 w 12192000"/>
+              <a:gd name="connsiteY5" fmla="*/ 0 h 1519634"/>
+              <a:gd name="connsiteX0" fmla="*/ 12192000 w 12192000"/>
+              <a:gd name="connsiteY0" fmla="*/ 0 h 1519634"/>
+              <a:gd name="connsiteX1" fmla="*/ 12192000 w 12192000"/>
+              <a:gd name="connsiteY1" fmla="*/ 1519634 h 1519634"/>
+              <a:gd name="connsiteX2" fmla="*/ 0 w 12192000"/>
+              <a:gd name="connsiteY2" fmla="*/ 1519634 h 1519634"/>
+              <a:gd name="connsiteX3" fmla="*/ 3810 w 12192000"/>
+              <a:gd name="connsiteY3" fmla="*/ 628674 h 1519634"/>
+              <a:gd name="connsiteX4" fmla="*/ 5319640 w 12192000"/>
+              <a:gd name="connsiteY4" fmla="*/ 1227734 h 1519634"/>
+              <a:gd name="connsiteX5" fmla="*/ 12192000 w 12192000"/>
+              <a:gd name="connsiteY5" fmla="*/ 0 h 1519634"/>
+              <a:gd name="connsiteX0" fmla="*/ 12198096 w 12198096"/>
+              <a:gd name="connsiteY0" fmla="*/ 0 h 1325451"/>
+              <a:gd name="connsiteX1" fmla="*/ 12192000 w 12198096"/>
+              <a:gd name="connsiteY1" fmla="*/ 1325451 h 1325451"/>
+              <a:gd name="connsiteX2" fmla="*/ 0 w 12198096"/>
+              <a:gd name="connsiteY2" fmla="*/ 1325451 h 1325451"/>
+              <a:gd name="connsiteX3" fmla="*/ 3810 w 12198096"/>
+              <a:gd name="connsiteY3" fmla="*/ 434491 h 1325451"/>
+              <a:gd name="connsiteX4" fmla="*/ 5319640 w 12198096"/>
+              <a:gd name="connsiteY4" fmla="*/ 1033551 h 1325451"/>
+              <a:gd name="connsiteX5" fmla="*/ 12198096 w 12198096"/>
+              <a:gd name="connsiteY5" fmla="*/ 0 h 1325451"/>
+              <a:gd name="connsiteX0" fmla="*/ 12198096 w 12198096"/>
+              <a:gd name="connsiteY0" fmla="*/ 0 h 1325451"/>
+              <a:gd name="connsiteX1" fmla="*/ 12192000 w 12198096"/>
+              <a:gd name="connsiteY1" fmla="*/ 1325451 h 1325451"/>
+              <a:gd name="connsiteX2" fmla="*/ 0 w 12198096"/>
+              <a:gd name="connsiteY2" fmla="*/ 1325451 h 1325451"/>
+              <a:gd name="connsiteX3" fmla="*/ 3810 w 12198096"/>
+              <a:gd name="connsiteY3" fmla="*/ 434491 h 1325451"/>
+              <a:gd name="connsiteX4" fmla="*/ 5325736 w 12198096"/>
+              <a:gd name="connsiteY4" fmla="*/ 978070 h 1325451"/>
+              <a:gd name="connsiteX5" fmla="*/ 12198096 w 12198096"/>
+              <a:gd name="connsiteY5" fmla="*/ 0 h 1325451"/>
+            </a:gdLst>
+            <a:ahLst/>
+            <a:cxnLst>
+              <a:cxn ang="0">
+                <a:pos x="connsiteX0" y="connsiteY0"/>
+              </a:cxn>
+              <a:cxn ang="0">
+                <a:pos x="connsiteX1" y="connsiteY1"/>
+              </a:cxn>
+              <a:cxn ang="0">
+                <a:pos x="connsiteX2" y="connsiteY2"/>
+              </a:cxn>
+              <a:cxn ang="0">
+                <a:pos x="connsiteX3" y="connsiteY3"/>
+              </a:cxn>
+              <a:cxn ang="0">
+                <a:pos x="connsiteX4" y="connsiteY4"/>
+              </a:cxn>
+              <a:cxn ang="0">
+                <a:pos x="connsiteX5" y="connsiteY5"/>
+              </a:cxn>
+            </a:cxnLst>
+            <a:rect l="l" t="t" r="r" b="b"/>
+            <a:pathLst>
+              <a:path w="12198096" h="1325451">
+                <a:moveTo>
+                  <a:pt x="12198096" y="0"/>
+                </a:moveTo>
+                <a:lnTo>
+                  <a:pt x="12192000" y="1325451"/>
+                </a:lnTo>
+                <a:lnTo>
+                  <a:pt x="0" y="1325451"/>
+                </a:lnTo>
+                <a:lnTo>
+                  <a:pt x="3810" y="434491"/>
+                </a:lnTo>
+                <a:cubicBezTo>
+                  <a:pt x="1718603" y="876908"/>
+                  <a:pt x="3533473" y="963319"/>
+                  <a:pt x="5325736" y="978070"/>
+                </a:cubicBezTo>
+                <a:cubicBezTo>
+                  <a:pt x="7351518" y="925603"/>
+                  <a:pt x="10633603" y="731550"/>
+                  <a:pt x="12198096" y="0"/>
+                </a:cubicBezTo>
+                <a:close/>
+              </a:path>
+            </a:pathLst>
+          </a:custGeom>
+          <a:gradFill flip="none" rotWithShape="1">
+            <a:gsLst>
+              <a:gs pos="60000">
+                <a:srgbClr val="A0D2B4">
+                  <a:alpha val="50000"/>
+                </a:srgbClr>
+              </a:gs>
+              <a:gs pos="0">
+                <a:srgbClr val="008A41">
+                  <a:alpha val="70000"/>
+                </a:srgbClr>
+              </a:gs>
+              <a:gs pos="100000">
+                <a:srgbClr val="A0D2B4">
+                  <a:alpha val="50000"/>
+                </a:srgbClr>
+              </a:gs>
+            </a:gsLst>
+            <a:lin ang="10800000" scaled="0"/>
+            <a:tileRect/>
+          </a:gradFill>
+          <a:ln>
+            <a:noFill/>
+          </a:ln>
+        </p:spPr>
+        <p:style>
+          <a:lnRef idx="2">
+            <a:schemeClr val="accent1">
+              <a:shade val="50000"/>
+            </a:schemeClr>
+          </a:lnRef>
+          <a:fillRef idx="1">
+            <a:schemeClr val="accent1"/>
+          </a:fillRef>
+          <a:effectRef idx="0">
+            <a:schemeClr val="accent1"/>
+          </a:effectRef>
+          <a:fontRef idx="minor">
+            <a:schemeClr val="lt1"/>
+          </a:fontRef>
+        </p:style>
+        <p:txBody>
+          <a:bodyPr rtlCol="0" anchor="ctr"/>
+          <a:lstStyle/>
+          <a:p>
+            <a:pPr lvl="0" algn="ctr"/>
+            <a:endParaRPr lang="zh-CN" altLang="en-US"/>
+          </a:p>
+        </p:txBody>
+      </p:sp>
+      <p:pic>
+        <p:nvPicPr>
+          <p:cNvPr id="6" name="图片 5">
+            <a:extLst>
+              <a:ext uri="{FF2B5EF4-FFF2-40B4-BE49-F238E27FC236}">
+                <a16:creationId xmlns:a16="http://schemas.microsoft.com/office/drawing/2014/main" id="{89BA6729-E55B-81DD-2EFA-36FD10EAD7DB}"/>
+              </a:ext>
+            </a:extLst>
+          </p:cNvPr>
+          <p:cNvPicPr>
+            <a:picLocks noChangeAspect="1"/>
+          </p:cNvPicPr>
+          <p:nvPr userDrawn="1"/>
+        </p:nvPicPr>
+        <p:blipFill>
+          <a:blip r:embed="rId2" cstate="print">
+            <a:extLst>
+              <a:ext uri="{BEBA8EAE-BF5A-486C-A8C5-ECC9F3942E4B}">
+                <a14:imgProps xmlns:a14="http://schemas.microsoft.com/office/drawing/2010/main">
+                  <a14:imgLayer r:embed="rId3">
+                    <a14:imgEffect>
+                      <a14:backgroundRemoval t="3090" b="89888" l="2563" r="97313">
+                        <a14:foregroundMark x1="7187" y1="50562" x2="61563" y2="38764"/>
+                        <a14:foregroundMark x1="61563" y1="38764" x2="63438" y2="41292"/>
+                        <a14:foregroundMark x1="29875" y1="86798" x2="41313" y2="84551"/>
+                        <a14:foregroundMark x1="41313" y1="84551" x2="57375" y2="89607"/>
+                        <a14:foregroundMark x1="57375" y1="89607" x2="63438" y2="85112"/>
+                        <a14:foregroundMark x1="63438" y1="85112" x2="64063" y2="85112"/>
+                        <a14:foregroundMark x1="22250" y1="25843" x2="23375" y2="34831"/>
+                        <a14:foregroundMark x1="22375" y1="26124" x2="26438" y2="23876"/>
+                        <a14:foregroundMark x1="26438" y1="23876" x2="28688" y2="24438"/>
+                        <a14:foregroundMark x1="22313" y1="23315" x2="28750" y2="25562"/>
+                        <a14:foregroundMark x1="68313" y1="24157" x2="68313" y2="24157"/>
+                        <a14:foregroundMark x1="68375" y1="70506" x2="68375" y2="70506"/>
+                        <a14:foregroundMark x1="68063" y1="61236" x2="68063" y2="61236"/>
+                        <a14:foregroundMark x1="83438" y1="31180" x2="87688" y2="19382"/>
+                        <a14:foregroundMark x1="87688" y1="19382" x2="91813" y2="23315"/>
+                        <a14:foregroundMark x1="91813" y1="23315" x2="95063" y2="37079"/>
+                        <a14:foregroundMark x1="95063" y1="37079" x2="95188" y2="56461"/>
+                        <a14:foregroundMark x1="95188" y1="56461" x2="91188" y2="72753"/>
+                        <a14:foregroundMark x1="91188" y1="72753" x2="86438" y2="75562"/>
+                        <a14:foregroundMark x1="86438" y1="75562" x2="82438" y2="60393"/>
+                        <a14:foregroundMark x1="82438" y1="60393" x2="82125" y2="40449"/>
+                        <a14:foregroundMark x1="82125" y1="40449" x2="83813" y2="29213"/>
+                        <a14:foregroundMark x1="85688" y1="46910" x2="91313" y2="42416"/>
+                        <a14:foregroundMark x1="84500" y1="41854" x2="89125" y2="45506"/>
+                        <a14:foregroundMark x1="89125" y1="45506" x2="89313" y2="66573"/>
+                        <a14:foregroundMark x1="89313" y1="66573" x2="85375" y2="56742"/>
+                        <a14:foregroundMark x1="85375" y1="56742" x2="86188" y2="33427"/>
+                        <a14:foregroundMark x1="86188" y1="33427" x2="89625" y2="23315"/>
+                        <a14:foregroundMark x1="89625" y1="23315" x2="93063" y2="58146"/>
+                        <a14:foregroundMark x1="93063" y1="58146" x2="92625" y2="60955"/>
+                        <a14:foregroundMark x1="83250" y1="28933" x2="87125" y2="18539"/>
+                        <a14:foregroundMark x1="87125" y1="18539" x2="92063" y2="21629"/>
+                        <a14:foregroundMark x1="92063" y1="21629" x2="95063" y2="33989"/>
+                        <a14:foregroundMark x1="95063" y1="33989" x2="95875" y2="52247"/>
+                        <a14:foregroundMark x1="95875" y1="52247" x2="92688" y2="71910"/>
+                        <a14:foregroundMark x1="92688" y1="71910" x2="89188" y2="80337"/>
+                        <a14:foregroundMark x1="89188" y1="80337" x2="84125" y2="70787"/>
+                        <a14:foregroundMark x1="84125" y1="70787" x2="81313" y2="53371"/>
+                        <a14:foregroundMark x1="81313" y1="53371" x2="81875" y2="39607"/>
+                        <a14:foregroundMark x1="60250" y1="39888" x2="58125" y2="37079"/>
+                        <a14:foregroundMark x1="67625" y1="32022" x2="69313" y2="53090"/>
+                        <a14:foregroundMark x1="69313" y1="53090" x2="75000" y2="35674"/>
+                        <a14:foregroundMark x1="75000" y1="35674" x2="68813" y2="40449"/>
+                        <a14:foregroundMark x1="68813" y1="40449" x2="69000" y2="21629"/>
+                        <a14:foregroundMark x1="69000" y1="21629" x2="74250" y2="16292"/>
+                        <a14:foregroundMark x1="74250" y1="16292" x2="78563" y2="24719"/>
+                        <a14:foregroundMark x1="78563" y1="24719" x2="80063" y2="46348"/>
+                        <a14:foregroundMark x1="80063" y1="46348" x2="75813" y2="71067"/>
+                        <a14:foregroundMark x1="75813" y1="71067" x2="70438" y2="74719"/>
+                        <a14:foregroundMark x1="70438" y1="74719" x2="77063" y2="69944"/>
+                        <a14:foregroundMark x1="77063" y1="69944" x2="72313" y2="77528"/>
+                        <a14:foregroundMark x1="72313" y1="77528" x2="67500" y2="53090"/>
+                        <a14:foregroundMark x1="67500" y1="53090" x2="68063" y2="72753"/>
+                        <a14:foregroundMark x1="68063" y1="72753" x2="69000" y2="77528"/>
+                        <a14:foregroundMark x1="70688" y1="76685" x2="72438" y2="80056"/>
+                        <a14:foregroundMark x1="73750" y1="78371" x2="75688" y2="78652"/>
+                        <a14:foregroundMark x1="70813" y1="78090" x2="72063" y2="73876"/>
+                        <a14:foregroundMark x1="5407" y1="21913" x2="10063" y2="20506"/>
+                        <a14:foregroundMark x1="10063" y1="20506" x2="33938" y2="20506"/>
+                        <a14:foregroundMark x1="33938" y1="20506" x2="53813" y2="11798"/>
+                        <a14:foregroundMark x1="53813" y1="11798" x2="64813" y2="15449"/>
+                        <a14:foregroundMark x1="64813" y1="15449" x2="67750" y2="43539"/>
+                        <a14:foregroundMark x1="67750" y1="43539" x2="67750" y2="73876"/>
+                        <a14:foregroundMark x1="67750" y1="73876" x2="59750" y2="97753"/>
+                        <a14:foregroundMark x1="59750" y1="97753" x2="40250" y2="95506"/>
+                        <a14:foregroundMark x1="40250" y1="95506" x2="9375" y2="72753"/>
+                        <a14:foregroundMark x1="9375" y1="72753" x2="5309" y2="63916"/>
+                        <a14:foregroundMark x1="10125" y1="10955" x2="11750" y2="27528"/>
+                        <a14:foregroundMark x1="11750" y1="27528" x2="9125" y2="14045"/>
+                        <a14:foregroundMark x1="9125" y1="14045" x2="13188" y2="16011"/>
+                        <a14:foregroundMark x1="86698" y1="5849" x2="92049" y2="12903"/>
+                        <a14:foregroundMark x1="97370" y1="25565" x2="99688" y2="49719"/>
+                        <a14:foregroundMark x1="99688" y1="49719" x2="98188" y2="69101"/>
+                        <a14:foregroundMark x1="98188" y1="69101" x2="93563" y2="85112"/>
+                        <a14:foregroundMark x1="93563" y1="85112" x2="55688" y2="99719"/>
+                        <a14:foregroundMark x1="55688" y1="99719" x2="7164" y2="90806"/>
+                        <a14:foregroundMark x1="5404" y1="20395" x2="5750" y2="17978"/>
+                        <a14:foregroundMark x1="5750" y1="17978" x2="44938" y2="2528"/>
+                        <a14:foregroundMark x1="44938" y1="2528" x2="90875" y2="24438"/>
+                        <a14:foregroundMark x1="90875" y1="24438" x2="80938" y2="14607"/>
+                        <a14:foregroundMark x1="80938" y1="14607" x2="81099" y2="13463"/>
+                        <a14:foregroundMark x1="68750" y1="12360" x2="78063" y2="17135"/>
+                        <a14:foregroundMark x1="78063" y1="17135" x2="87938" y2="14607"/>
+                        <a14:foregroundMark x1="87938" y1="14607" x2="93500" y2="20506"/>
+                        <a14:foregroundMark x1="93500" y1="20506" x2="97500" y2="30618"/>
+                        <a14:foregroundMark x1="97500" y1="30618" x2="97313" y2="59831"/>
+                        <a14:foregroundMark x1="97313" y1="59831" x2="89563" y2="72753"/>
+                        <a14:foregroundMark x1="89563" y1="72753" x2="79813" y2="68258"/>
+                        <a14:foregroundMark x1="79813" y1="68258" x2="69438" y2="31180"/>
+                        <a14:foregroundMark x1="69438" y1="31180" x2="68688" y2="12921"/>
+                        <a14:foregroundMark x1="68688" y1="12921" x2="68688" y2="12640"/>
+                        <a14:foregroundMark x1="5938" y1="33708" x2="6750" y2="79213"/>
+                        <a14:backgroundMark x1="95264" y1="19646" x2="99063" y2="22472"/>
+                        <a14:backgroundMark x1="72250" y1="2528" x2="84419" y2="11579"/>
+                        <a14:backgroundMark x1="99063" y1="22472" x2="99563" y2="1685"/>
+                        <a14:backgroundMark x1="99563" y1="1685" x2="71625" y2="1966"/>
+                        <a14:backgroundMark x1="563" y1="11236" x2="6375" y2="95506"/>
+                        <a14:backgroundMark x1="3125" y1="64607" x2="4500" y2="85112"/>
+                        <a14:backgroundMark x1="2313" y1="66573" x2="3375" y2="64607"/>
+                        <a14:backgroundMark x1="313" y1="17416" x2="625" y2="98315"/>
+                        <a14:backgroundMark x1="1188" y1="19382" x2="4313" y2="98596"/>
+                        <a14:backgroundMark x1="2750" y1="26685" x2="3125" y2="37079"/>
+                        <a14:backgroundMark x1="1750" y1="19382" x2="4500" y2="38483"/>
+                        <a14:backgroundMark x1="1750" y1="15449" x2="1750" y2="15449"/>
+                        <a14:backgroundMark x1="1750" y1="17135" x2="4313" y2="37640"/>
+                        <a14:backgroundMark x1="1875" y1="21910" x2="3938" y2="26966"/>
+                        <a14:backgroundMark x1="4313" y1="3371" x2="4375" y2="39888"/>
+                      </a14:backgroundRemoval>
+                    </a14:imgEffect>
+                  </a14:imgLayer>
+                </a14:imgProps>
+              </a:ext>
+              <a:ext uri="{28A0092B-C50C-407E-A947-70E740481C1C}">
+                <a14:useLocalDpi xmlns:a14="http://schemas.microsoft.com/office/drawing/2010/main" val="0"/>
+              </a:ext>
+            </a:extLst>
+          </a:blip>
+          <a:stretch>
+            <a:fillRect/>
+          </a:stretch>
+        </p:blipFill>
+        <p:spPr>
+          <a:xfrm>
+            <a:off x="5914739" y="183848"/>
+            <a:ext cx="3223157" cy="717152"/>
           </a:xfrm>
           <a:prstGeom prst="rect">
             <a:avLst/>
           </a:prstGeom>
         </p:spPr>
-        <p:txBody>
-          <a:bodyPr spcFirstLastPara="1" wrap="square" lIns="91425" tIns="91425" rIns="91425" bIns="91425" anchor="t" anchorCtr="0">
-            <a:normAutofit/>
-          </a:bodyPr>
-          <a:lstStyle>
-            <a:lvl1pPr lvl="0">
-              <a:spcBef>
-                <a:spcPts val="0"/>
-              </a:spcBef>
-              <a:spcAft>
-                <a:spcPts val="0"/>
-              </a:spcAft>
-              <a:buSzPts val="2800"/>
-              <a:buNone/>
-              <a:defRPr/>
-            </a:lvl1pPr>
-            <a:lvl2pPr lvl="1">
-              <a:spcBef>
-                <a:spcPts val="0"/>
-              </a:spcBef>
-              <a:spcAft>
-                <a:spcPts val="0"/>
-              </a:spcAft>
-              <a:buSzPts val="2800"/>
-              <a:buNone/>
-              <a:defRPr/>
-            </a:lvl2pPr>
-            <a:lvl3pPr lvl="2">
-              <a:spcBef>
-                <a:spcPts val="0"/>
-              </a:spcBef>
-              <a:spcAft>
-                <a:spcPts val="0"/>
-              </a:spcAft>
-              <a:buSzPts val="2800"/>
-              <a:buNone/>
-              <a:defRPr/>
-            </a:lvl3pPr>
-            <a:lvl4pPr lvl="3">
-              <a:spcBef>
-                <a:spcPts val="0"/>
-              </a:spcBef>
-              <a:spcAft>
-                <a:spcPts val="0"/>
-              </a:spcAft>
-              <a:buSzPts val="2800"/>
-              <a:buNone/>
-              <a:defRPr/>
-            </a:lvl4pPr>
-            <a:lvl5pPr lvl="4">
-              <a:spcBef>
-                <a:spcPts val="0"/>
-              </a:spcBef>
-              <a:spcAft>
-                <a:spcPts val="0"/>
-              </a:spcAft>
-              <a:buSzPts val="2800"/>
-              <a:buNone/>
-              <a:defRPr/>
-            </a:lvl5pPr>
-            <a:lvl6pPr lvl="5">
-              <a:spcBef>
-                <a:spcPts val="0"/>
-              </a:spcBef>
-              <a:spcAft>
-                <a:spcPts val="0"/>
-              </a:spcAft>
-              <a:buSzPts val="2800"/>
-              <a:buNone/>
-              <a:defRPr/>
-            </a:lvl6pPr>
-            <a:lvl7pPr lvl="6">
-              <a:spcBef>
-                <a:spcPts val="0"/>
-              </a:spcBef>
-              <a:spcAft>
-                <a:spcPts val="0"/>
-              </a:spcAft>
-              <a:buSzPts val="2800"/>
-              <a:buNone/>
-              <a:defRPr/>
-            </a:lvl7pPr>
-            <a:lvl8pPr lvl="7">
-              <a:spcBef>
-                <a:spcPts val="0"/>
-              </a:spcBef>
-              <a:spcAft>
-                <a:spcPts val="0"/>
-              </a:spcAft>
-              <a:buSzPts val="2800"/>
-              <a:buNone/>
-              <a:defRPr/>
-            </a:lvl8pPr>
-            <a:lvl9pPr lvl="8">
-              <a:spcBef>
-                <a:spcPts val="0"/>
-              </a:spcBef>
-              <a:spcAft>
-                <a:spcPts val="0"/>
-              </a:spcAft>
-              <a:buSzPts val="2800"/>
-              <a:buNone/>
-              <a:defRPr/>
-            </a:lvl9pPr>
-          </a:lstStyle>
-          <a:p>
-            <a:endParaRPr/>
-          </a:p>
-        </p:txBody>
-      </p:sp>
-      <p:sp>
-        <p:nvSpPr>
-          <p:cNvPr id="18" name="Google Shape;18;p4"/>
-          <p:cNvSpPr txBox="1">
-            <a:spLocks noGrp="1"/>
-          </p:cNvSpPr>
-          <p:nvPr>
-            <p:ph type="body" idx="1"/>
-          </p:nvPr>
-        </p:nvSpPr>
-        <p:spPr>
-          <a:xfrm>
-            <a:off x="311700" y="1152475"/>
-            <a:ext cx="8520600" cy="3416400"/>
-          </a:xfrm>
-          <a:prstGeom prst="rect">
-            <a:avLst/>
-          </a:prstGeom>
-        </p:spPr>
-        <p:txBody>
-          <a:bodyPr spcFirstLastPara="1" wrap="square" lIns="91425" tIns="91425" rIns="91425" bIns="91425" anchor="t" anchorCtr="0">
-            <a:normAutofit/>
-          </a:bodyPr>
-          <a:lstStyle>
-            <a:lvl1pPr marL="457200" lvl="0" indent="-342900">
-              <a:spcBef>
-                <a:spcPts val="0"/>
-              </a:spcBef>
-              <a:spcAft>
-                <a:spcPts val="0"/>
-              </a:spcAft>
-              <a:buSzPts val="1800"/>
-              <a:buChar char="●"/>
-              <a:defRPr/>
-            </a:lvl1pPr>
-            <a:lvl2pPr marL="914400" lvl="1" indent="-317500">
-              <a:spcBef>
-                <a:spcPts val="0"/>
-              </a:spcBef>
-              <a:spcAft>
-                <a:spcPts val="0"/>
-              </a:spcAft>
-              <a:buSzPts val="1400"/>
-              <a:buChar char="○"/>
-              <a:defRPr/>
-            </a:lvl2pPr>
-            <a:lvl3pPr marL="1371600" lvl="2" indent="-317500">
-              <a:spcBef>
-                <a:spcPts val="0"/>
-              </a:spcBef>
-              <a:spcAft>
-                <a:spcPts val="0"/>
-              </a:spcAft>
-              <a:buSzPts val="1400"/>
-              <a:buChar char="■"/>
-              <a:defRPr/>
-            </a:lvl3pPr>
-            <a:lvl4pPr marL="1828800" lvl="3" indent="-317500">
-              <a:spcBef>
-                <a:spcPts val="0"/>
-              </a:spcBef>
-              <a:spcAft>
-                <a:spcPts val="0"/>
-              </a:spcAft>
-              <a:buSzPts val="1400"/>
-              <a:buChar char="●"/>
-              <a:defRPr/>
-            </a:lvl4pPr>
-            <a:lvl5pPr marL="2286000" lvl="4" indent="-317500">
-              <a:spcBef>
-                <a:spcPts val="0"/>
-              </a:spcBef>
-              <a:spcAft>
-                <a:spcPts val="0"/>
-              </a:spcAft>
-              <a:buSzPts val="1400"/>
-              <a:buChar char="○"/>
-              <a:defRPr/>
-            </a:lvl5pPr>
-            <a:lvl6pPr marL="2743200" lvl="5" indent="-317500">
-              <a:spcBef>
-                <a:spcPts val="0"/>
-              </a:spcBef>
-              <a:spcAft>
-                <a:spcPts val="0"/>
-              </a:spcAft>
-              <a:buSzPts val="1400"/>
-              <a:buChar char="■"/>
-              <a:defRPr/>
-            </a:lvl6pPr>
-            <a:lvl7pPr marL="3200400" lvl="6" indent="-317500">
-              <a:spcBef>
-                <a:spcPts val="0"/>
-              </a:spcBef>
-              <a:spcAft>
-                <a:spcPts val="0"/>
-              </a:spcAft>
-              <a:buSzPts val="1400"/>
-              <a:buChar char="●"/>
-              <a:defRPr/>
-            </a:lvl7pPr>
-            <a:lvl8pPr marL="3657600" lvl="7" indent="-317500">
-              <a:spcBef>
-                <a:spcPts val="0"/>
-              </a:spcBef>
-              <a:spcAft>
-                <a:spcPts val="0"/>
-              </a:spcAft>
-              <a:buSzPts val="1400"/>
-              <a:buChar char="○"/>
-              <a:defRPr/>
-            </a:lvl8pPr>
-            <a:lvl9pPr marL="4114800" lvl="8" indent="-317500">
-              <a:spcBef>
-                <a:spcPts val="0"/>
-              </a:spcBef>
-              <a:spcAft>
-                <a:spcPts val="0"/>
-              </a:spcAft>
-              <a:buSzPts val="1400"/>
-              <a:buChar char="■"/>
-              <a:defRPr/>
-            </a:lvl9pPr>
-          </a:lstStyle>
-          <a:p>
-            <a:endParaRPr/>
-          </a:p>
-        </p:txBody>
-      </p:sp>
-      <p:sp>
-        <p:nvSpPr>
-          <p:cNvPr id="19" name="Google Shape;19;p4"/>
-          <p:cNvSpPr txBox="1">
-            <a:spLocks noGrp="1"/>
-          </p:cNvSpPr>
-          <p:nvPr>
-            <p:ph type="sldNum" idx="12"/>
-          </p:nvPr>
-        </p:nvSpPr>
-        <p:spPr>
-          <a:xfrm>
-            <a:off x="8472458" y="4663217"/>
-            <a:ext cx="548700" cy="393600"/>
-          </a:xfrm>
-          <a:prstGeom prst="rect">
-            <a:avLst/>
-          </a:prstGeom>
-        </p:spPr>
-        <p:txBody>
-          <a:bodyPr spcFirstLastPara="1" wrap="square" lIns="91425" tIns="91425" rIns="91425" bIns="91425" anchor="ctr" anchorCtr="0">
-            <a:normAutofit/>
-          </a:bodyPr>
-          <a:lstStyle>
-            <a:lvl1pPr lvl="0">
-              <a:buNone/>
-              <a:defRPr/>
-            </a:lvl1pPr>
-            <a:lvl2pPr lvl="1">
-              <a:buNone/>
-              <a:defRPr/>
-            </a:lvl2pPr>
-            <a:lvl3pPr lvl="2">
-              <a:buNone/>
-              <a:defRPr/>
-            </a:lvl3pPr>
-            <a:lvl4pPr lvl="3">
-              <a:buNone/>
-              <a:defRPr/>
-            </a:lvl4pPr>
-            <a:lvl5pPr lvl="4">
-              <a:buNone/>
-              <a:defRPr/>
-            </a:lvl5pPr>
-            <a:lvl6pPr lvl="5">
-              <a:buNone/>
-              <a:defRPr/>
-            </a:lvl6pPr>
-            <a:lvl7pPr lvl="6">
-              <a:buNone/>
-              <a:defRPr/>
-            </a:lvl7pPr>
-            <a:lvl8pPr lvl="7">
-              <a:buNone/>
-              <a:defRPr/>
-            </a:lvl8pPr>
-            <a:lvl9pPr lvl="8">
-              <a:buNone/>
-              <a:defRPr/>
-            </a:lvl9pPr>
-          </a:lstStyle>
-          <a:p>
-            <a:pPr marL="0" lvl="0" indent="0" algn="r" rtl="0">
-              <a:spcBef>
-                <a:spcPts val="0"/>
-              </a:spcBef>
-              <a:spcAft>
-                <a:spcPts val="0"/>
-              </a:spcAft>
-              <a:buNone/>
-            </a:pPr>
-            <a:fld id="{00000000-1234-1234-1234-123412341234}" type="slidenum">
-              <a:rPr lang="en-GB"/>
-              <a:t>‹#›</a:t>
-            </a:fld>
-            <a:endParaRPr lang="en-GB"/>
-          </a:p>
-        </p:txBody>
-      </p:sp>
+      </p:pic>
     </p:spTree>
   </p:cSld>
   <p:clrMapOvr>
@@ -8262,98 +9282,100 @@
       </p:grpSpPr>
       <p:sp>
         <p:nvSpPr>
-          <p:cNvPr id="54" name="Google Shape;54;p13"/>
-          <p:cNvSpPr txBox="1">
-            <a:spLocks noGrp="1"/>
-          </p:cNvSpPr>
-          <p:nvPr>
-            <p:ph type="ctrTitle"/>
-          </p:nvPr>
+          <p:cNvPr id="2" name="Google Shape;356;p20">
+            <a:extLst>
+              <a:ext uri="{FF2B5EF4-FFF2-40B4-BE49-F238E27FC236}">
+                <a16:creationId xmlns:a16="http://schemas.microsoft.com/office/drawing/2014/main" id="{6DC12CFC-FD6B-ADBA-3B80-3A8B1923AD10}"/>
+              </a:ext>
+            </a:extLst>
+          </p:cNvPr>
+          <p:cNvSpPr/>
+          <p:nvPr/>
         </p:nvSpPr>
         <p:spPr>
           <a:xfrm>
-            <a:off x="311708" y="836550"/>
-            <a:ext cx="8520600" cy="2052600"/>
+            <a:off x="0" y="1602274"/>
+            <a:ext cx="9144000" cy="1938952"/>
           </a:xfrm>
           <a:prstGeom prst="rect">
             <a:avLst/>
           </a:prstGeom>
+          <a:noFill/>
+          <a:ln>
+            <a:noFill/>
+          </a:ln>
         </p:spPr>
         <p:txBody>
-          <a:bodyPr spcFirstLastPara="1" wrap="square" lIns="91425" tIns="91425" rIns="91425" bIns="91425" anchor="b" anchorCtr="0">
-            <a:normAutofit fontScale="90000"/>
+          <a:bodyPr spcFirstLastPara="1" wrap="square" lIns="91425" tIns="45700" rIns="91425" bIns="45700" anchor="t" anchorCtr="0">
+            <a:spAutoFit/>
           </a:bodyPr>
           <a:lstStyle/>
           <a:p>
-            <a:pPr lvl="0"/>
-            <a:r>
-              <a:rPr lang="en-GB" dirty="0">
-                <a:solidFill>
-                  <a:srgbClr val="980000"/>
-                </a:solidFill>
+            <a:pPr marL="0" marR="0" lvl="0" indent="0" algn="ctr" rtl="0">
+              <a:spcBef>
+                <a:spcPts val="0"/>
+              </a:spcBef>
+              <a:spcAft>
+                <a:spcPts val="0"/>
+              </a:spcAft>
+              <a:buNone/>
+            </a:pPr>
+            <a:r>
+              <a:rPr lang="en-US" sz="4000" b="1" dirty="0">
+                <a:solidFill>
+                  <a:srgbClr val="009242"/>
+                </a:solidFill>
+                <a:latin typeface="Times New Roman"/>
+                <a:ea typeface="Times New Roman"/>
+                <a:cs typeface="Times New Roman"/>
+                <a:sym typeface="Times New Roman"/>
               </a:rPr>
               <a:t>IEEE UV2026 Paper Review Instructions on </a:t>
             </a:r>
             <a:r>
-              <a:rPr lang="en-GB" dirty="0" err="1">
-                <a:solidFill>
-                  <a:srgbClr val="980000"/>
-                </a:solidFill>
+              <a:rPr lang="en-US" sz="4000" b="1" dirty="0" err="1">
+                <a:solidFill>
+                  <a:srgbClr val="009242"/>
+                </a:solidFill>
+                <a:latin typeface="Times New Roman"/>
+                <a:ea typeface="Times New Roman"/>
+                <a:cs typeface="Times New Roman"/>
+                <a:sym typeface="Times New Roman"/>
               </a:rPr>
               <a:t>EasyChair</a:t>
             </a:r>
-            <a:endParaRPr dirty="0">
+            <a:endParaRPr lang="en-US" sz="4000" b="1" dirty="0">
               <a:solidFill>
-                <a:srgbClr val="980000"/>
+                <a:srgbClr val="009242"/>
               </a:solidFill>
+              <a:latin typeface="Times New Roman"/>
+              <a:ea typeface="Times New Roman"/>
+              <a:cs typeface="Times New Roman"/>
+              <a:sym typeface="Times New Roman"/>
             </a:endParaRPr>
           </a:p>
-        </p:txBody>
-      </p:sp>
-      <p:sp>
-        <p:nvSpPr>
-          <p:cNvPr id="55" name="Google Shape;55;p13"/>
-          <p:cNvSpPr txBox="1">
-            <a:spLocks noGrp="1"/>
-          </p:cNvSpPr>
-          <p:nvPr>
-            <p:ph type="subTitle" idx="1"/>
-          </p:nvPr>
-        </p:nvSpPr>
-        <p:spPr>
-          <a:xfrm>
-            <a:off x="311700" y="2834125"/>
-            <a:ext cx="8520600" cy="792600"/>
-          </a:xfrm>
-          <a:prstGeom prst="rect">
-            <a:avLst/>
-          </a:prstGeom>
-        </p:spPr>
-        <p:txBody>
-          <a:bodyPr spcFirstLastPara="1" wrap="square" lIns="91425" tIns="91425" rIns="91425" bIns="91425" anchor="t" anchorCtr="0">
-            <a:normAutofit/>
-          </a:bodyPr>
-          <a:lstStyle/>
           <a:p>
-            <a:pPr marL="457200" lvl="0" indent="-406400" algn="ctr" rtl="0">
-              <a:spcBef>
-                <a:spcPts val="0"/>
-              </a:spcBef>
-              <a:spcAft>
-                <a:spcPts val="0"/>
-              </a:spcAft>
-              <a:buSzPts val="2800"/>
-              <a:buChar char="-"/>
+            <a:pPr marL="0" marR="0" lvl="0" indent="0" algn="ctr" rtl="0">
+              <a:spcBef>
+                <a:spcPts val="0"/>
+              </a:spcBef>
+              <a:spcAft>
+                <a:spcPts val="0"/>
+              </a:spcAft>
+              <a:buNone/>
             </a:pPr>
             <a:r>
-              <a:rPr lang="en-GB" dirty="0"/>
-              <a:t>Reviewer G</a:t>
-            </a:r>
-            <a:r>
-              <a:rPr lang="en-US" altLang="zh-CN" dirty="0" err="1"/>
-              <a:t>uide</a:t>
-            </a:r>
-            <a:endParaRPr lang="en-GB" dirty="0"/>
+              <a:rPr lang="en-US" sz="4000" b="1" dirty="0">
+                <a:solidFill>
+                  <a:srgbClr val="009242"/>
+                </a:solidFill>
+                <a:latin typeface="Times New Roman"/>
+                <a:ea typeface="Times New Roman"/>
+                <a:cs typeface="Times New Roman"/>
+                <a:sym typeface="Times New Roman"/>
+              </a:rPr>
+              <a:t>-Reviewer Guide</a:t>
+            </a:r>
           </a:p>
         </p:txBody>
       </p:sp>
@@ -8389,12 +9411,12 @@
             <a:spLocks noGrp="1"/>
           </p:cNvSpPr>
           <p:nvPr>
-            <p:ph type="body" idx="1"/>
+            <p:ph type="body" idx="4294967295"/>
           </p:nvPr>
         </p:nvSpPr>
         <p:spPr>
           <a:xfrm>
-            <a:off x="156124" y="555425"/>
+            <a:off x="156124" y="1148093"/>
             <a:ext cx="8520600" cy="3278400"/>
           </a:xfrm>
           <a:prstGeom prst="rect">
@@ -8464,7 +9486,7 @@
         </p:nvGrpSpPr>
         <p:grpSpPr>
           <a:xfrm>
-            <a:off x="241299" y="1348277"/>
+            <a:off x="241299" y="1737744"/>
             <a:ext cx="8660766" cy="3437338"/>
             <a:chOff x="241299" y="1348277"/>
             <a:chExt cx="8660766" cy="3437338"/>
@@ -8508,10 +9530,10 @@
             <p:nvPr/>
           </p:nvPicPr>
           <p:blipFill>
-            <a:blip r:embed="rId4">
+            <a:blip>
               <a:extLst>
                 <a:ext uri="{96DAC541-7B7A-43D3-8B79-37D633B846F1}">
-                  <asvg:svgBlip xmlns:asvg="http://schemas.microsoft.com/office/drawing/2016/SVG/main" r:embed="rId5"/>
+                  <asvg:svgBlip xmlns:asvg="http://schemas.microsoft.com/office/drawing/2016/SVG/main" r:embed="rId4"/>
                 </a:ext>
               </a:extLst>
             </a:blip>
@@ -8538,10 +9560,10 @@
             <p:nvPr/>
           </p:nvPicPr>
           <p:blipFill>
-            <a:blip r:embed="rId6">
+            <a:blip>
               <a:extLst>
                 <a:ext uri="{96DAC541-7B7A-43D3-8B79-37D633B846F1}">
-                  <asvg:svgBlip xmlns:asvg="http://schemas.microsoft.com/office/drawing/2016/SVG/main" r:embed="rId7"/>
+                  <asvg:svgBlip xmlns:asvg="http://schemas.microsoft.com/office/drawing/2016/SVG/main" r:embed="rId5"/>
                 </a:ext>
               </a:extLst>
             </a:blip>
@@ -8562,15 +9584,21 @@
       </p:grpSp>
       <p:sp>
         <p:nvSpPr>
-          <p:cNvPr id="4" name="Google Shape;66;p15"/>
+          <p:cNvPr id="2" name="Google Shape;66;p15">
+            <a:extLst>
+              <a:ext uri="{FF2B5EF4-FFF2-40B4-BE49-F238E27FC236}">
+                <a16:creationId xmlns:a16="http://schemas.microsoft.com/office/drawing/2014/main" id="{666ED57F-81B1-17DB-385C-BA2E48C2AE47}"/>
+              </a:ext>
+            </a:extLst>
+          </p:cNvPr>
           <p:cNvSpPr txBox="1">
-            <a:spLocks noGrp="1"/>
+            <a:spLocks/>
           </p:cNvSpPr>
           <p:nvPr/>
         </p:nvSpPr>
         <p:spPr>
           <a:xfrm>
-            <a:off x="250740" y="62120"/>
+            <a:off x="311700" y="445025"/>
             <a:ext cx="8520600" cy="572700"/>
           </a:xfrm>
           <a:prstGeom prst="rect">
@@ -8582,8 +9610,8 @@
           </a:ln>
         </p:spPr>
         <p:txBody>
-          <a:bodyPr wrap="square" lIns="91425" tIns="91425" rIns="91425" bIns="91425" anchor="t" anchorCtr="0">
-            <a:normAutofit fontScale="70000"/>
+          <a:bodyPr spcFirstLastPara="1" wrap="square" lIns="91425" tIns="91425" rIns="91425" bIns="91425" anchor="t" anchorCtr="0">
+            <a:normAutofit fontScale="82500" lnSpcReduction="20000"/>
           </a:bodyPr>
           <a:lstStyle>
             <a:defPPr marR="0" lvl="0" algn="l" rtl="0">
@@ -8833,36 +9861,29 @@
             </a:lvl9pPr>
           </a:lstStyle>
           <a:p>
-            <a:pPr marL="457200" lvl="0" indent="-381000" algn="l" rtl="0">
+            <a:pPr marL="76200">
               <a:lnSpc>
                 <a:spcPct val="115000"/>
               </a:lnSpc>
-              <a:spcBef>
-                <a:spcPts val="0"/>
-              </a:spcBef>
-              <a:spcAft>
-                <a:spcPts val="0"/>
-              </a:spcAft>
               <a:buClr>
                 <a:srgbClr val="980000"/>
               </a:buClr>
               <a:buSzPts val="2400"/>
-              <a:buAutoNum type="arabicPeriod"/>
             </a:pPr>
             <a:r>
               <a:rPr lang="en-US" altLang="zh-CN" sz="3110" b="1" dirty="0">
                 <a:solidFill>
-                  <a:srgbClr val="980000"/>
+                  <a:srgbClr val="009242"/>
                 </a:solidFill>
                 <a:latin typeface="Times New Roman" panose="02020603050405020304" pitchFamily="18" charset="0"/>
                 <a:cs typeface="Times New Roman" panose="02020603050405020304" pitchFamily="18" charset="0"/>
               </a:rPr>
-              <a:t>Create an </a:t>
+              <a:t>1. Create an </a:t>
             </a:r>
             <a:r>
               <a:rPr lang="en-US" altLang="zh-CN" sz="3110" b="1" dirty="0" err="1">
                 <a:solidFill>
-                  <a:srgbClr val="980000"/>
+                  <a:srgbClr val="009242"/>
                 </a:solidFill>
                 <a:latin typeface="Times New Roman" panose="02020603050405020304" pitchFamily="18" charset="0"/>
                 <a:cs typeface="Times New Roman" panose="02020603050405020304" pitchFamily="18" charset="0"/>
@@ -8872,13 +9893,20 @@
             <a:r>
               <a:rPr lang="en-US" altLang="zh-CN" sz="3110" b="1" dirty="0">
                 <a:solidFill>
-                  <a:srgbClr val="980000"/>
+                  <a:srgbClr val="009242"/>
                 </a:solidFill>
                 <a:latin typeface="Times New Roman" panose="02020603050405020304" pitchFamily="18" charset="0"/>
                 <a:cs typeface="Times New Roman" panose="02020603050405020304" pitchFamily="18" charset="0"/>
               </a:rPr>
               <a:t> Account-8</a:t>
             </a:r>
+            <a:endParaRPr lang="en-US" altLang="zh-CN" sz="3110" b="1" dirty="0">
+              <a:solidFill>
+                <a:srgbClr val="980000"/>
+              </a:solidFill>
+              <a:latin typeface="Times New Roman" panose="02020603050405020304" pitchFamily="18" charset="0"/>
+              <a:cs typeface="Times New Roman" panose="02020603050405020304" pitchFamily="18" charset="0"/>
+            </a:endParaRPr>
           </a:p>
         </p:txBody>
       </p:sp>
@@ -8914,7 +9942,7 @@
             <a:spLocks noGrp="1"/>
           </p:cNvSpPr>
           <p:nvPr>
-            <p:ph type="title"/>
+            <p:ph type="title" idx="4294967295"/>
           </p:nvPr>
         </p:nvSpPr>
         <p:spPr>
@@ -8946,7 +9974,7 @@
             <a:r>
               <a:rPr lang="en-GB" b="1" dirty="0">
                 <a:solidFill>
-                  <a:srgbClr val="980000"/>
+                  <a:srgbClr val="009242"/>
                 </a:solidFill>
                 <a:latin typeface="Times New Roman" panose="02020603050405020304" pitchFamily="18" charset="0"/>
                 <a:cs typeface="Times New Roman" panose="02020603050405020304" pitchFamily="18" charset="0"/>
@@ -8955,7 +9983,7 @@
             </a:r>
             <a:endParaRPr b="1" dirty="0">
               <a:solidFill>
-                <a:srgbClr val="980000"/>
+                <a:srgbClr val="009242"/>
               </a:solidFill>
               <a:latin typeface="Times New Roman" panose="02020603050405020304" pitchFamily="18" charset="0"/>
               <a:cs typeface="Times New Roman" panose="02020603050405020304" pitchFamily="18" charset="0"/>
@@ -8970,7 +9998,7 @@
             <a:spLocks noGrp="1"/>
           </p:cNvSpPr>
           <p:nvPr>
-            <p:ph type="body" idx="1"/>
+            <p:ph type="body" idx="4294967295"/>
           </p:nvPr>
         </p:nvSpPr>
         <p:spPr>
@@ -9147,105 +10175,18 @@
       </p:grpSpPr>
       <p:sp>
         <p:nvSpPr>
-          <p:cNvPr id="114" name="Google Shape;114;p22"/>
-          <p:cNvSpPr txBox="1">
-            <a:spLocks noGrp="1"/>
-          </p:cNvSpPr>
-          <p:nvPr>
-            <p:ph type="title"/>
-          </p:nvPr>
-        </p:nvSpPr>
-        <p:spPr>
-          <a:xfrm>
-            <a:off x="311699" y="294625"/>
-            <a:ext cx="8716845" cy="572700"/>
-          </a:xfrm>
-          <a:prstGeom prst="rect">
-            <a:avLst/>
-          </a:prstGeom>
-        </p:spPr>
-        <p:txBody>
-          <a:bodyPr spcFirstLastPara="1" wrap="square" lIns="91425" tIns="91425" rIns="91425" bIns="91425" anchor="t" anchorCtr="0">
-            <a:noAutofit/>
-          </a:bodyPr>
-          <a:lstStyle/>
-          <a:p>
-            <a:pPr marL="0" lvl="0" indent="0" algn="l" rtl="0">
-              <a:lnSpc>
-                <a:spcPct val="115000"/>
-              </a:lnSpc>
-              <a:spcBef>
-                <a:spcPts val="0"/>
-              </a:spcBef>
-              <a:spcAft>
-                <a:spcPts val="1200"/>
-              </a:spcAft>
-              <a:buNone/>
-            </a:pPr>
-            <a:r>
-              <a:rPr lang="en-GB" b="1" dirty="0">
-                <a:solidFill>
-                  <a:srgbClr val="980000"/>
-                </a:solidFill>
-                <a:latin typeface="Times New Roman" panose="02020603050405020304" pitchFamily="18" charset="0"/>
-                <a:cs typeface="Times New Roman" panose="02020603050405020304" pitchFamily="18" charset="0"/>
-              </a:rPr>
-              <a:t>2.1 </a:t>
-            </a:r>
-            <a:r>
-              <a:rPr lang="en-US" b="1" dirty="0">
-                <a:solidFill>
-                  <a:srgbClr val="980000"/>
-                </a:solidFill>
-                <a:latin typeface="Times New Roman" panose="02020603050405020304" pitchFamily="18" charset="0"/>
-                <a:cs typeface="Times New Roman" panose="02020603050405020304" pitchFamily="18" charset="0"/>
-              </a:rPr>
-              <a:t>Method 1: Use Your Own </a:t>
-            </a:r>
-            <a:r>
-              <a:rPr lang="en-US" b="1" dirty="0" err="1">
-                <a:solidFill>
-                  <a:srgbClr val="980000"/>
-                </a:solidFill>
-                <a:latin typeface="Times New Roman" panose="02020603050405020304" pitchFamily="18" charset="0"/>
-                <a:cs typeface="Times New Roman" panose="02020603050405020304" pitchFamily="18" charset="0"/>
-              </a:rPr>
-              <a:t>EasyChair</a:t>
-            </a:r>
-            <a:r>
-              <a:rPr lang="en-US" b="1" dirty="0">
-                <a:solidFill>
-                  <a:srgbClr val="980000"/>
-                </a:solidFill>
-                <a:latin typeface="Times New Roman" panose="02020603050405020304" pitchFamily="18" charset="0"/>
-                <a:cs typeface="Times New Roman" panose="02020603050405020304" pitchFamily="18" charset="0"/>
-              </a:rPr>
-              <a:t> Account-1</a:t>
-            </a:r>
-            <a:endParaRPr b="1" dirty="0">
-              <a:solidFill>
-                <a:srgbClr val="980000"/>
-              </a:solidFill>
-              <a:latin typeface="Times New Roman" panose="02020603050405020304" pitchFamily="18" charset="0"/>
-              <a:cs typeface="Times New Roman" panose="02020603050405020304" pitchFamily="18" charset="0"/>
-            </a:endParaRPr>
-          </a:p>
-        </p:txBody>
-      </p:sp>
-      <p:sp>
-        <p:nvSpPr>
           <p:cNvPr id="115" name="Google Shape;115;p22"/>
           <p:cNvSpPr txBox="1">
             <a:spLocks noGrp="1"/>
           </p:cNvSpPr>
           <p:nvPr>
-            <p:ph type="body" idx="1"/>
+            <p:ph type="body" idx="4294967295"/>
           </p:nvPr>
         </p:nvSpPr>
         <p:spPr>
           <a:xfrm>
-            <a:off x="311700" y="1072275"/>
-            <a:ext cx="8520600" cy="3930900"/>
+            <a:off x="311700" y="1490133"/>
+            <a:ext cx="8520600" cy="3513042"/>
           </a:xfrm>
           <a:prstGeom prst="rect">
             <a:avLst/>
@@ -9315,6 +10256,324 @@
                 <a:cs typeface="Times New Roman" panose="02020603050405020304" pitchFamily="18" charset="0"/>
               </a:rPr>
               <a:t> account. Once the assignment has been completed, please follow the steps below to review the paper(s).</a:t>
+            </a:r>
+          </a:p>
+        </p:txBody>
+      </p:sp>
+      <p:sp>
+        <p:nvSpPr>
+          <p:cNvPr id="2" name="Google Shape;121;p23">
+            <a:extLst>
+              <a:ext uri="{FF2B5EF4-FFF2-40B4-BE49-F238E27FC236}">
+                <a16:creationId xmlns:a16="http://schemas.microsoft.com/office/drawing/2014/main" id="{A622819B-11FB-8ACA-37F6-D356EF8A74AD}"/>
+              </a:ext>
+            </a:extLst>
+          </p:cNvPr>
+          <p:cNvSpPr txBox="1"/>
+          <p:nvPr/>
+        </p:nvSpPr>
+        <p:spPr>
+          <a:xfrm>
+            <a:off x="557233" y="76635"/>
+            <a:ext cx="6241500" cy="654938"/>
+          </a:xfrm>
+          <a:prstGeom prst="rect">
+            <a:avLst/>
+          </a:prstGeom>
+          <a:noFill/>
+          <a:ln>
+            <a:noFill/>
+          </a:ln>
+        </p:spPr>
+        <p:txBody>
+          <a:bodyPr spcFirstLastPara="1" wrap="square" lIns="91425" tIns="91425" rIns="91425" bIns="91425" anchor="t" anchorCtr="0">
+            <a:noAutofit/>
+          </a:bodyPr>
+          <a:lstStyle>
+            <a:defPPr marR="0" lvl="0" algn="l" rtl="0">
+              <a:lnSpc>
+                <a:spcPct val="100000"/>
+              </a:lnSpc>
+              <a:spcBef>
+                <a:spcPts val="0"/>
+              </a:spcBef>
+              <a:spcAft>
+                <a:spcPts val="0"/>
+              </a:spcAft>
+            </a:defPPr>
+            <a:lvl1pPr marR="0" lvl="0" algn="l" rtl="0">
+              <a:lnSpc>
+                <a:spcPct val="100000"/>
+              </a:lnSpc>
+              <a:spcBef>
+                <a:spcPts val="0"/>
+              </a:spcBef>
+              <a:spcAft>
+                <a:spcPts val="0"/>
+              </a:spcAft>
+              <a:buClr>
+                <a:schemeClr val="dk1"/>
+              </a:buClr>
+              <a:buSzPts val="2800"/>
+              <a:buFont typeface="Arial" panose="020B0604020202020204"/>
+              <a:buNone/>
+              <a:defRPr sz="2800" b="0" i="0" u="none" strike="noStrike" cap="none">
+                <a:solidFill>
+                  <a:schemeClr val="dk1"/>
+                </a:solidFill>
+                <a:latin typeface="Arial" panose="020B0604020202020204"/>
+                <a:ea typeface="Arial" panose="020B0604020202020204"/>
+                <a:cs typeface="Arial" panose="020B0604020202020204"/>
+                <a:sym typeface="Arial" panose="020B0604020202020204"/>
+              </a:defRPr>
+            </a:lvl1pPr>
+            <a:lvl2pPr marR="0" lvl="1" algn="l" rtl="0">
+              <a:lnSpc>
+                <a:spcPct val="100000"/>
+              </a:lnSpc>
+              <a:spcBef>
+                <a:spcPts val="0"/>
+              </a:spcBef>
+              <a:spcAft>
+                <a:spcPts val="0"/>
+              </a:spcAft>
+              <a:buClr>
+                <a:schemeClr val="dk1"/>
+              </a:buClr>
+              <a:buSzPts val="2800"/>
+              <a:buFont typeface="Arial" panose="020B0604020202020204"/>
+              <a:buNone/>
+              <a:defRPr sz="2800" b="0" i="0" u="none" strike="noStrike" cap="none">
+                <a:solidFill>
+                  <a:schemeClr val="dk1"/>
+                </a:solidFill>
+                <a:latin typeface="Arial" panose="020B0604020202020204"/>
+                <a:ea typeface="Arial" panose="020B0604020202020204"/>
+                <a:cs typeface="Arial" panose="020B0604020202020204"/>
+                <a:sym typeface="Arial" panose="020B0604020202020204"/>
+              </a:defRPr>
+            </a:lvl2pPr>
+            <a:lvl3pPr marR="0" lvl="2" algn="l" rtl="0">
+              <a:lnSpc>
+                <a:spcPct val="100000"/>
+              </a:lnSpc>
+              <a:spcBef>
+                <a:spcPts val="0"/>
+              </a:spcBef>
+              <a:spcAft>
+                <a:spcPts val="0"/>
+              </a:spcAft>
+              <a:buClr>
+                <a:schemeClr val="dk1"/>
+              </a:buClr>
+              <a:buSzPts val="2800"/>
+              <a:buFont typeface="Arial" panose="020B0604020202020204"/>
+              <a:buNone/>
+              <a:defRPr sz="2800" b="0" i="0" u="none" strike="noStrike" cap="none">
+                <a:solidFill>
+                  <a:schemeClr val="dk1"/>
+                </a:solidFill>
+                <a:latin typeface="Arial" panose="020B0604020202020204"/>
+                <a:ea typeface="Arial" panose="020B0604020202020204"/>
+                <a:cs typeface="Arial" panose="020B0604020202020204"/>
+                <a:sym typeface="Arial" panose="020B0604020202020204"/>
+              </a:defRPr>
+            </a:lvl3pPr>
+            <a:lvl4pPr marR="0" lvl="3" algn="l" rtl="0">
+              <a:lnSpc>
+                <a:spcPct val="100000"/>
+              </a:lnSpc>
+              <a:spcBef>
+                <a:spcPts val="0"/>
+              </a:spcBef>
+              <a:spcAft>
+                <a:spcPts val="0"/>
+              </a:spcAft>
+              <a:buClr>
+                <a:schemeClr val="dk1"/>
+              </a:buClr>
+              <a:buSzPts val="2800"/>
+              <a:buFont typeface="Arial" panose="020B0604020202020204"/>
+              <a:buNone/>
+              <a:defRPr sz="2800" b="0" i="0" u="none" strike="noStrike" cap="none">
+                <a:solidFill>
+                  <a:schemeClr val="dk1"/>
+                </a:solidFill>
+                <a:latin typeface="Arial" panose="020B0604020202020204"/>
+                <a:ea typeface="Arial" panose="020B0604020202020204"/>
+                <a:cs typeface="Arial" panose="020B0604020202020204"/>
+                <a:sym typeface="Arial" panose="020B0604020202020204"/>
+              </a:defRPr>
+            </a:lvl4pPr>
+            <a:lvl5pPr marR="0" lvl="4" algn="l" rtl="0">
+              <a:lnSpc>
+                <a:spcPct val="100000"/>
+              </a:lnSpc>
+              <a:spcBef>
+                <a:spcPts val="0"/>
+              </a:spcBef>
+              <a:spcAft>
+                <a:spcPts val="0"/>
+              </a:spcAft>
+              <a:buClr>
+                <a:schemeClr val="dk1"/>
+              </a:buClr>
+              <a:buSzPts val="2800"/>
+              <a:buFont typeface="Arial" panose="020B0604020202020204"/>
+              <a:buNone/>
+              <a:defRPr sz="2800" b="0" i="0" u="none" strike="noStrike" cap="none">
+                <a:solidFill>
+                  <a:schemeClr val="dk1"/>
+                </a:solidFill>
+                <a:latin typeface="Arial" panose="020B0604020202020204"/>
+                <a:ea typeface="Arial" panose="020B0604020202020204"/>
+                <a:cs typeface="Arial" panose="020B0604020202020204"/>
+                <a:sym typeface="Arial" panose="020B0604020202020204"/>
+              </a:defRPr>
+            </a:lvl5pPr>
+            <a:lvl6pPr marR="0" lvl="5" algn="l" rtl="0">
+              <a:lnSpc>
+                <a:spcPct val="100000"/>
+              </a:lnSpc>
+              <a:spcBef>
+                <a:spcPts val="0"/>
+              </a:spcBef>
+              <a:spcAft>
+                <a:spcPts val="0"/>
+              </a:spcAft>
+              <a:buClr>
+                <a:schemeClr val="dk1"/>
+              </a:buClr>
+              <a:buSzPts val="2800"/>
+              <a:buFont typeface="Arial" panose="020B0604020202020204"/>
+              <a:buNone/>
+              <a:defRPr sz="2800" b="0" i="0" u="none" strike="noStrike" cap="none">
+                <a:solidFill>
+                  <a:schemeClr val="dk1"/>
+                </a:solidFill>
+                <a:latin typeface="Arial" panose="020B0604020202020204"/>
+                <a:ea typeface="Arial" panose="020B0604020202020204"/>
+                <a:cs typeface="Arial" panose="020B0604020202020204"/>
+                <a:sym typeface="Arial" panose="020B0604020202020204"/>
+              </a:defRPr>
+            </a:lvl6pPr>
+            <a:lvl7pPr marR="0" lvl="6" algn="l" rtl="0">
+              <a:lnSpc>
+                <a:spcPct val="100000"/>
+              </a:lnSpc>
+              <a:spcBef>
+                <a:spcPts val="0"/>
+              </a:spcBef>
+              <a:spcAft>
+                <a:spcPts val="0"/>
+              </a:spcAft>
+              <a:buClr>
+                <a:schemeClr val="dk1"/>
+              </a:buClr>
+              <a:buSzPts val="2800"/>
+              <a:buFont typeface="Arial" panose="020B0604020202020204"/>
+              <a:buNone/>
+              <a:defRPr sz="2800" b="0" i="0" u="none" strike="noStrike" cap="none">
+                <a:solidFill>
+                  <a:schemeClr val="dk1"/>
+                </a:solidFill>
+                <a:latin typeface="Arial" panose="020B0604020202020204"/>
+                <a:ea typeface="Arial" panose="020B0604020202020204"/>
+                <a:cs typeface="Arial" panose="020B0604020202020204"/>
+                <a:sym typeface="Arial" panose="020B0604020202020204"/>
+              </a:defRPr>
+            </a:lvl7pPr>
+            <a:lvl8pPr marR="0" lvl="7" algn="l" rtl="0">
+              <a:lnSpc>
+                <a:spcPct val="100000"/>
+              </a:lnSpc>
+              <a:spcBef>
+                <a:spcPts val="0"/>
+              </a:spcBef>
+              <a:spcAft>
+                <a:spcPts val="0"/>
+              </a:spcAft>
+              <a:buClr>
+                <a:schemeClr val="dk1"/>
+              </a:buClr>
+              <a:buSzPts val="2800"/>
+              <a:buFont typeface="Arial" panose="020B0604020202020204"/>
+              <a:buNone/>
+              <a:defRPr sz="2800" b="0" i="0" u="none" strike="noStrike" cap="none">
+                <a:solidFill>
+                  <a:schemeClr val="dk1"/>
+                </a:solidFill>
+                <a:latin typeface="Arial" panose="020B0604020202020204"/>
+                <a:ea typeface="Arial" panose="020B0604020202020204"/>
+                <a:cs typeface="Arial" panose="020B0604020202020204"/>
+                <a:sym typeface="Arial" panose="020B0604020202020204"/>
+              </a:defRPr>
+            </a:lvl8pPr>
+            <a:lvl9pPr marR="0" lvl="8" algn="l" rtl="0">
+              <a:lnSpc>
+                <a:spcPct val="100000"/>
+              </a:lnSpc>
+              <a:spcBef>
+                <a:spcPts val="0"/>
+              </a:spcBef>
+              <a:spcAft>
+                <a:spcPts val="0"/>
+              </a:spcAft>
+              <a:buClr>
+                <a:schemeClr val="dk1"/>
+              </a:buClr>
+              <a:buSzPts val="2800"/>
+              <a:buFont typeface="Arial" panose="020B0604020202020204"/>
+              <a:buNone/>
+              <a:defRPr sz="2800" b="0" i="0" u="none" strike="noStrike" cap="none">
+                <a:solidFill>
+                  <a:schemeClr val="dk1"/>
+                </a:solidFill>
+                <a:latin typeface="Arial" panose="020B0604020202020204"/>
+                <a:ea typeface="Arial" panose="020B0604020202020204"/>
+                <a:cs typeface="Arial" panose="020B0604020202020204"/>
+                <a:sym typeface="Arial" panose="020B0604020202020204"/>
+              </a:defRPr>
+            </a:lvl9pPr>
+          </a:lstStyle>
+          <a:p>
+            <a:pPr>
+              <a:lnSpc>
+                <a:spcPct val="115000"/>
+              </a:lnSpc>
+              <a:spcAft>
+                <a:spcPts val="1200"/>
+              </a:spcAft>
+            </a:pPr>
+            <a:r>
+              <a:rPr lang="en-US" b="1" dirty="0">
+                <a:solidFill>
+                  <a:srgbClr val="009242"/>
+                </a:solidFill>
+                <a:latin typeface="Times New Roman" panose="02020603050405020304" pitchFamily="18" charset="0"/>
+                <a:cs typeface="Times New Roman" panose="02020603050405020304" pitchFamily="18" charset="0"/>
+              </a:rPr>
+              <a:t>2.1 Method 1: Use Your Own </a:t>
+            </a:r>
+            <a:r>
+              <a:rPr lang="en-US" b="1" dirty="0" err="1">
+                <a:solidFill>
+                  <a:srgbClr val="009242"/>
+                </a:solidFill>
+                <a:latin typeface="Times New Roman" panose="02020603050405020304" pitchFamily="18" charset="0"/>
+                <a:cs typeface="Times New Roman" panose="02020603050405020304" pitchFamily="18" charset="0"/>
+              </a:rPr>
+              <a:t>EasyChair</a:t>
+            </a:r>
+            <a:r>
+              <a:rPr lang="en-US" b="1" dirty="0">
+                <a:solidFill>
+                  <a:srgbClr val="009242"/>
+                </a:solidFill>
+                <a:latin typeface="Times New Roman" panose="02020603050405020304" pitchFamily="18" charset="0"/>
+                <a:cs typeface="Times New Roman" panose="02020603050405020304" pitchFamily="18" charset="0"/>
+              </a:rPr>
+              <a:t> Account-1</a:t>
             </a:r>
           </a:p>
         </p:txBody>
@@ -9351,12 +10610,12 @@
             <a:spLocks noGrp="1"/>
           </p:cNvSpPr>
           <p:nvPr>
-            <p:ph type="body" idx="1"/>
+            <p:ph type="body" idx="4294967295"/>
           </p:nvPr>
         </p:nvSpPr>
         <p:spPr>
           <a:xfrm>
-            <a:off x="229425" y="867325"/>
+            <a:off x="229425" y="1078995"/>
             <a:ext cx="8816100" cy="3930900"/>
           </a:xfrm>
           <a:prstGeom prst="rect">
@@ -9508,83 +10767,6 @@
               <a:buNone/>
             </a:pPr>
             <a:endParaRPr sz="2000" dirty="0">
-              <a:latin typeface="Times New Roman" panose="02020603050405020304" pitchFamily="18" charset="0"/>
-              <a:cs typeface="Times New Roman" panose="02020603050405020304" pitchFamily="18" charset="0"/>
-            </a:endParaRPr>
-          </a:p>
-        </p:txBody>
-      </p:sp>
-      <p:sp>
-        <p:nvSpPr>
-          <p:cNvPr id="121" name="Google Shape;121;p23"/>
-          <p:cNvSpPr txBox="1">
-            <a:spLocks noGrp="1"/>
-          </p:cNvSpPr>
-          <p:nvPr>
-            <p:ph type="title"/>
-          </p:nvPr>
-        </p:nvSpPr>
-        <p:spPr>
-          <a:xfrm>
-            <a:off x="311700" y="294625"/>
-            <a:ext cx="8520600" cy="572700"/>
-          </a:xfrm>
-          <a:prstGeom prst="rect">
-            <a:avLst/>
-          </a:prstGeom>
-        </p:spPr>
-        <p:txBody>
-          <a:bodyPr spcFirstLastPara="1" wrap="square" lIns="91425" tIns="91425" rIns="91425" bIns="91425" anchor="t" anchorCtr="0">
-            <a:noAutofit/>
-          </a:bodyPr>
-          <a:lstStyle/>
-          <a:p>
-            <a:pPr marL="0" lvl="0" indent="0" algn="l" rtl="0">
-              <a:lnSpc>
-                <a:spcPct val="115000"/>
-              </a:lnSpc>
-              <a:spcBef>
-                <a:spcPts val="0"/>
-              </a:spcBef>
-              <a:spcAft>
-                <a:spcPts val="1200"/>
-              </a:spcAft>
-              <a:buNone/>
-            </a:pPr>
-            <a:r>
-              <a:rPr lang="en-US" b="1" dirty="0">
-                <a:solidFill>
-                  <a:srgbClr val="980000"/>
-                </a:solidFill>
-                <a:latin typeface="Times New Roman" panose="02020603050405020304" pitchFamily="18" charset="0"/>
-                <a:cs typeface="Times New Roman" panose="02020603050405020304" pitchFamily="18" charset="0"/>
-              </a:rPr>
-              <a:t>2.1 Method 1: Use Your Own </a:t>
-            </a:r>
-            <a:r>
-              <a:rPr lang="en-US" b="1" dirty="0" err="1">
-                <a:solidFill>
-                  <a:srgbClr val="980000"/>
-                </a:solidFill>
-                <a:latin typeface="Times New Roman" panose="02020603050405020304" pitchFamily="18" charset="0"/>
-                <a:cs typeface="Times New Roman" panose="02020603050405020304" pitchFamily="18" charset="0"/>
-              </a:rPr>
-              <a:t>EasyChair</a:t>
-            </a:r>
-            <a:r>
-              <a:rPr lang="en-US" b="1" dirty="0">
-                <a:solidFill>
-                  <a:srgbClr val="980000"/>
-                </a:solidFill>
-                <a:latin typeface="Times New Roman" panose="02020603050405020304" pitchFamily="18" charset="0"/>
-                <a:cs typeface="Times New Roman" panose="02020603050405020304" pitchFamily="18" charset="0"/>
-              </a:rPr>
-              <a:t> Account-2</a:t>
-            </a:r>
-            <a:endParaRPr b="1" dirty="0">
-              <a:solidFill>
-                <a:srgbClr val="FF0000"/>
-              </a:solidFill>
               <a:latin typeface="Times New Roman" panose="02020603050405020304" pitchFamily="18" charset="0"/>
               <a:cs typeface="Times New Roman" panose="02020603050405020304" pitchFamily="18" charset="0"/>
             </a:endParaRPr>
@@ -9608,7 +10790,7 @@
         </p:blipFill>
         <p:spPr>
           <a:xfrm>
-            <a:off x="389343" y="2370213"/>
+            <a:off x="389343" y="2581883"/>
             <a:ext cx="4652846" cy="2478662"/>
           </a:xfrm>
           <a:prstGeom prst="rect">
@@ -9629,7 +10811,7 @@
         </p:nvSpPr>
         <p:spPr>
           <a:xfrm>
-            <a:off x="436151" y="3149600"/>
+            <a:off x="436151" y="3361270"/>
             <a:ext cx="891310" cy="203200"/>
           </a:xfrm>
           <a:prstGeom prst="rect">
@@ -9685,7 +10867,7 @@
         </p:blipFill>
         <p:spPr>
           <a:xfrm>
-            <a:off x="5202106" y="2370213"/>
+            <a:off x="5202106" y="2581883"/>
             <a:ext cx="3522732" cy="2472687"/>
           </a:xfrm>
           <a:prstGeom prst="rect">
@@ -9698,6 +10880,324 @@
           </a:ln>
         </p:spPr>
       </p:pic>
+      <p:sp>
+        <p:nvSpPr>
+          <p:cNvPr id="2" name="Google Shape;121;p23">
+            <a:extLst>
+              <a:ext uri="{FF2B5EF4-FFF2-40B4-BE49-F238E27FC236}">
+                <a16:creationId xmlns:a16="http://schemas.microsoft.com/office/drawing/2014/main" id="{DACE9DB3-1AA1-3C51-E0AC-128B60F1C736}"/>
+              </a:ext>
+            </a:extLst>
+          </p:cNvPr>
+          <p:cNvSpPr txBox="1"/>
+          <p:nvPr/>
+        </p:nvSpPr>
+        <p:spPr>
+          <a:xfrm>
+            <a:off x="557233" y="76635"/>
+            <a:ext cx="6241500" cy="654938"/>
+          </a:xfrm>
+          <a:prstGeom prst="rect">
+            <a:avLst/>
+          </a:prstGeom>
+          <a:noFill/>
+          <a:ln>
+            <a:noFill/>
+          </a:ln>
+        </p:spPr>
+        <p:txBody>
+          <a:bodyPr spcFirstLastPara="1" wrap="square" lIns="91425" tIns="91425" rIns="91425" bIns="91425" anchor="t" anchorCtr="0">
+            <a:noAutofit/>
+          </a:bodyPr>
+          <a:lstStyle>
+            <a:defPPr marR="0" lvl="0" algn="l" rtl="0">
+              <a:lnSpc>
+                <a:spcPct val="100000"/>
+              </a:lnSpc>
+              <a:spcBef>
+                <a:spcPts val="0"/>
+              </a:spcBef>
+              <a:spcAft>
+                <a:spcPts val="0"/>
+              </a:spcAft>
+            </a:defPPr>
+            <a:lvl1pPr marR="0" lvl="0" algn="l" rtl="0">
+              <a:lnSpc>
+                <a:spcPct val="100000"/>
+              </a:lnSpc>
+              <a:spcBef>
+                <a:spcPts val="0"/>
+              </a:spcBef>
+              <a:spcAft>
+                <a:spcPts val="0"/>
+              </a:spcAft>
+              <a:buClr>
+                <a:schemeClr val="dk1"/>
+              </a:buClr>
+              <a:buSzPts val="2800"/>
+              <a:buFont typeface="Arial" panose="020B0604020202020204"/>
+              <a:buNone/>
+              <a:defRPr sz="2800" b="0" i="0" u="none" strike="noStrike" cap="none">
+                <a:solidFill>
+                  <a:schemeClr val="dk1"/>
+                </a:solidFill>
+                <a:latin typeface="Arial" panose="020B0604020202020204"/>
+                <a:ea typeface="Arial" panose="020B0604020202020204"/>
+                <a:cs typeface="Arial" panose="020B0604020202020204"/>
+                <a:sym typeface="Arial" panose="020B0604020202020204"/>
+              </a:defRPr>
+            </a:lvl1pPr>
+            <a:lvl2pPr marR="0" lvl="1" algn="l" rtl="0">
+              <a:lnSpc>
+                <a:spcPct val="100000"/>
+              </a:lnSpc>
+              <a:spcBef>
+                <a:spcPts val="0"/>
+              </a:spcBef>
+              <a:spcAft>
+                <a:spcPts val="0"/>
+              </a:spcAft>
+              <a:buClr>
+                <a:schemeClr val="dk1"/>
+              </a:buClr>
+              <a:buSzPts val="2800"/>
+              <a:buFont typeface="Arial" panose="020B0604020202020204"/>
+              <a:buNone/>
+              <a:defRPr sz="2800" b="0" i="0" u="none" strike="noStrike" cap="none">
+                <a:solidFill>
+                  <a:schemeClr val="dk1"/>
+                </a:solidFill>
+                <a:latin typeface="Arial" panose="020B0604020202020204"/>
+                <a:ea typeface="Arial" panose="020B0604020202020204"/>
+                <a:cs typeface="Arial" panose="020B0604020202020204"/>
+                <a:sym typeface="Arial" panose="020B0604020202020204"/>
+              </a:defRPr>
+            </a:lvl2pPr>
+            <a:lvl3pPr marR="0" lvl="2" algn="l" rtl="0">
+              <a:lnSpc>
+                <a:spcPct val="100000"/>
+              </a:lnSpc>
+              <a:spcBef>
+                <a:spcPts val="0"/>
+              </a:spcBef>
+              <a:spcAft>
+                <a:spcPts val="0"/>
+              </a:spcAft>
+              <a:buClr>
+                <a:schemeClr val="dk1"/>
+              </a:buClr>
+              <a:buSzPts val="2800"/>
+              <a:buFont typeface="Arial" panose="020B0604020202020204"/>
+              <a:buNone/>
+              <a:defRPr sz="2800" b="0" i="0" u="none" strike="noStrike" cap="none">
+                <a:solidFill>
+                  <a:schemeClr val="dk1"/>
+                </a:solidFill>
+                <a:latin typeface="Arial" panose="020B0604020202020204"/>
+                <a:ea typeface="Arial" panose="020B0604020202020204"/>
+                <a:cs typeface="Arial" panose="020B0604020202020204"/>
+                <a:sym typeface="Arial" panose="020B0604020202020204"/>
+              </a:defRPr>
+            </a:lvl3pPr>
+            <a:lvl4pPr marR="0" lvl="3" algn="l" rtl="0">
+              <a:lnSpc>
+                <a:spcPct val="100000"/>
+              </a:lnSpc>
+              <a:spcBef>
+                <a:spcPts val="0"/>
+              </a:spcBef>
+              <a:spcAft>
+                <a:spcPts val="0"/>
+              </a:spcAft>
+              <a:buClr>
+                <a:schemeClr val="dk1"/>
+              </a:buClr>
+              <a:buSzPts val="2800"/>
+              <a:buFont typeface="Arial" panose="020B0604020202020204"/>
+              <a:buNone/>
+              <a:defRPr sz="2800" b="0" i="0" u="none" strike="noStrike" cap="none">
+                <a:solidFill>
+                  <a:schemeClr val="dk1"/>
+                </a:solidFill>
+                <a:latin typeface="Arial" panose="020B0604020202020204"/>
+                <a:ea typeface="Arial" panose="020B0604020202020204"/>
+                <a:cs typeface="Arial" panose="020B0604020202020204"/>
+                <a:sym typeface="Arial" panose="020B0604020202020204"/>
+              </a:defRPr>
+            </a:lvl4pPr>
+            <a:lvl5pPr marR="0" lvl="4" algn="l" rtl="0">
+              <a:lnSpc>
+                <a:spcPct val="100000"/>
+              </a:lnSpc>
+              <a:spcBef>
+                <a:spcPts val="0"/>
+              </a:spcBef>
+              <a:spcAft>
+                <a:spcPts val="0"/>
+              </a:spcAft>
+              <a:buClr>
+                <a:schemeClr val="dk1"/>
+              </a:buClr>
+              <a:buSzPts val="2800"/>
+              <a:buFont typeface="Arial" panose="020B0604020202020204"/>
+              <a:buNone/>
+              <a:defRPr sz="2800" b="0" i="0" u="none" strike="noStrike" cap="none">
+                <a:solidFill>
+                  <a:schemeClr val="dk1"/>
+                </a:solidFill>
+                <a:latin typeface="Arial" panose="020B0604020202020204"/>
+                <a:ea typeface="Arial" panose="020B0604020202020204"/>
+                <a:cs typeface="Arial" panose="020B0604020202020204"/>
+                <a:sym typeface="Arial" panose="020B0604020202020204"/>
+              </a:defRPr>
+            </a:lvl5pPr>
+            <a:lvl6pPr marR="0" lvl="5" algn="l" rtl="0">
+              <a:lnSpc>
+                <a:spcPct val="100000"/>
+              </a:lnSpc>
+              <a:spcBef>
+                <a:spcPts val="0"/>
+              </a:spcBef>
+              <a:spcAft>
+                <a:spcPts val="0"/>
+              </a:spcAft>
+              <a:buClr>
+                <a:schemeClr val="dk1"/>
+              </a:buClr>
+              <a:buSzPts val="2800"/>
+              <a:buFont typeface="Arial" panose="020B0604020202020204"/>
+              <a:buNone/>
+              <a:defRPr sz="2800" b="0" i="0" u="none" strike="noStrike" cap="none">
+                <a:solidFill>
+                  <a:schemeClr val="dk1"/>
+                </a:solidFill>
+                <a:latin typeface="Arial" panose="020B0604020202020204"/>
+                <a:ea typeface="Arial" panose="020B0604020202020204"/>
+                <a:cs typeface="Arial" panose="020B0604020202020204"/>
+                <a:sym typeface="Arial" panose="020B0604020202020204"/>
+              </a:defRPr>
+            </a:lvl6pPr>
+            <a:lvl7pPr marR="0" lvl="6" algn="l" rtl="0">
+              <a:lnSpc>
+                <a:spcPct val="100000"/>
+              </a:lnSpc>
+              <a:spcBef>
+                <a:spcPts val="0"/>
+              </a:spcBef>
+              <a:spcAft>
+                <a:spcPts val="0"/>
+              </a:spcAft>
+              <a:buClr>
+                <a:schemeClr val="dk1"/>
+              </a:buClr>
+              <a:buSzPts val="2800"/>
+              <a:buFont typeface="Arial" panose="020B0604020202020204"/>
+              <a:buNone/>
+              <a:defRPr sz="2800" b="0" i="0" u="none" strike="noStrike" cap="none">
+                <a:solidFill>
+                  <a:schemeClr val="dk1"/>
+                </a:solidFill>
+                <a:latin typeface="Arial" panose="020B0604020202020204"/>
+                <a:ea typeface="Arial" panose="020B0604020202020204"/>
+                <a:cs typeface="Arial" panose="020B0604020202020204"/>
+                <a:sym typeface="Arial" panose="020B0604020202020204"/>
+              </a:defRPr>
+            </a:lvl7pPr>
+            <a:lvl8pPr marR="0" lvl="7" algn="l" rtl="0">
+              <a:lnSpc>
+                <a:spcPct val="100000"/>
+              </a:lnSpc>
+              <a:spcBef>
+                <a:spcPts val="0"/>
+              </a:spcBef>
+              <a:spcAft>
+                <a:spcPts val="0"/>
+              </a:spcAft>
+              <a:buClr>
+                <a:schemeClr val="dk1"/>
+              </a:buClr>
+              <a:buSzPts val="2800"/>
+              <a:buFont typeface="Arial" panose="020B0604020202020204"/>
+              <a:buNone/>
+              <a:defRPr sz="2800" b="0" i="0" u="none" strike="noStrike" cap="none">
+                <a:solidFill>
+                  <a:schemeClr val="dk1"/>
+                </a:solidFill>
+                <a:latin typeface="Arial" panose="020B0604020202020204"/>
+                <a:ea typeface="Arial" panose="020B0604020202020204"/>
+                <a:cs typeface="Arial" panose="020B0604020202020204"/>
+                <a:sym typeface="Arial" panose="020B0604020202020204"/>
+              </a:defRPr>
+            </a:lvl8pPr>
+            <a:lvl9pPr marR="0" lvl="8" algn="l" rtl="0">
+              <a:lnSpc>
+                <a:spcPct val="100000"/>
+              </a:lnSpc>
+              <a:spcBef>
+                <a:spcPts val="0"/>
+              </a:spcBef>
+              <a:spcAft>
+                <a:spcPts val="0"/>
+              </a:spcAft>
+              <a:buClr>
+                <a:schemeClr val="dk1"/>
+              </a:buClr>
+              <a:buSzPts val="2800"/>
+              <a:buFont typeface="Arial" panose="020B0604020202020204"/>
+              <a:buNone/>
+              <a:defRPr sz="2800" b="0" i="0" u="none" strike="noStrike" cap="none">
+                <a:solidFill>
+                  <a:schemeClr val="dk1"/>
+                </a:solidFill>
+                <a:latin typeface="Arial" panose="020B0604020202020204"/>
+                <a:ea typeface="Arial" panose="020B0604020202020204"/>
+                <a:cs typeface="Arial" panose="020B0604020202020204"/>
+                <a:sym typeface="Arial" panose="020B0604020202020204"/>
+              </a:defRPr>
+            </a:lvl9pPr>
+          </a:lstStyle>
+          <a:p>
+            <a:pPr>
+              <a:lnSpc>
+                <a:spcPct val="115000"/>
+              </a:lnSpc>
+              <a:spcAft>
+                <a:spcPts val="1200"/>
+              </a:spcAft>
+            </a:pPr>
+            <a:r>
+              <a:rPr lang="en-US" b="1" dirty="0">
+                <a:solidFill>
+                  <a:srgbClr val="009242"/>
+                </a:solidFill>
+                <a:latin typeface="Times New Roman" panose="02020603050405020304" pitchFamily="18" charset="0"/>
+                <a:cs typeface="Times New Roman" panose="02020603050405020304" pitchFamily="18" charset="0"/>
+              </a:rPr>
+              <a:t>2.1 Method 1: Use Your Own </a:t>
+            </a:r>
+            <a:r>
+              <a:rPr lang="en-US" b="1" dirty="0" err="1">
+                <a:solidFill>
+                  <a:srgbClr val="009242"/>
+                </a:solidFill>
+                <a:latin typeface="Times New Roman" panose="02020603050405020304" pitchFamily="18" charset="0"/>
+                <a:cs typeface="Times New Roman" panose="02020603050405020304" pitchFamily="18" charset="0"/>
+              </a:rPr>
+              <a:t>EasyChair</a:t>
+            </a:r>
+            <a:r>
+              <a:rPr lang="en-US" b="1" dirty="0">
+                <a:solidFill>
+                  <a:srgbClr val="009242"/>
+                </a:solidFill>
+                <a:latin typeface="Times New Roman" panose="02020603050405020304" pitchFamily="18" charset="0"/>
+                <a:cs typeface="Times New Roman" panose="02020603050405020304" pitchFamily="18" charset="0"/>
+              </a:rPr>
+              <a:t> Account-2</a:t>
+            </a:r>
+          </a:p>
+        </p:txBody>
+      </p:sp>
     </p:spTree>
   </p:cSld>
   <p:clrMapOvr>
@@ -9730,12 +11230,12 @@
             <a:spLocks noGrp="1"/>
           </p:cNvSpPr>
           <p:nvPr>
-            <p:ph type="body" idx="1"/>
+            <p:ph type="body" idx="4294967295"/>
           </p:nvPr>
         </p:nvSpPr>
         <p:spPr>
           <a:xfrm>
-            <a:off x="311700" y="898400"/>
+            <a:off x="311700" y="1101602"/>
             <a:ext cx="8520600" cy="3930900"/>
           </a:xfrm>
           <a:prstGeom prst="rect">
@@ -9785,7 +11285,7 @@
         </p:blipFill>
         <p:spPr>
           <a:xfrm>
-            <a:off x="3171296" y="1016000"/>
+            <a:off x="3171296" y="1219202"/>
             <a:ext cx="555577" cy="323273"/>
           </a:xfrm>
           <a:prstGeom prst="rect">
@@ -9799,83 +11299,6 @@
           </a:ln>
         </p:spPr>
       </p:pic>
-      <p:sp>
-        <p:nvSpPr>
-          <p:cNvPr id="5" name="Google Shape;121;p23"/>
-          <p:cNvSpPr txBox="1">
-            <a:spLocks noGrp="1"/>
-          </p:cNvSpPr>
-          <p:nvPr>
-            <p:ph type="title"/>
-          </p:nvPr>
-        </p:nvSpPr>
-        <p:spPr>
-          <a:xfrm>
-            <a:off x="311700" y="294625"/>
-            <a:ext cx="8520600" cy="572700"/>
-          </a:xfrm>
-          <a:prstGeom prst="rect">
-            <a:avLst/>
-          </a:prstGeom>
-        </p:spPr>
-        <p:txBody>
-          <a:bodyPr spcFirstLastPara="1" wrap="square" lIns="91425" tIns="91425" rIns="91425" bIns="91425" anchor="t" anchorCtr="0">
-            <a:noAutofit/>
-          </a:bodyPr>
-          <a:lstStyle/>
-          <a:p>
-            <a:pPr marL="0" lvl="0" indent="0" algn="l" rtl="0">
-              <a:lnSpc>
-                <a:spcPct val="115000"/>
-              </a:lnSpc>
-              <a:spcBef>
-                <a:spcPts val="0"/>
-              </a:spcBef>
-              <a:spcAft>
-                <a:spcPts val="1200"/>
-              </a:spcAft>
-              <a:buNone/>
-            </a:pPr>
-            <a:r>
-              <a:rPr lang="en-US" b="1" dirty="0">
-                <a:solidFill>
-                  <a:srgbClr val="980000"/>
-                </a:solidFill>
-                <a:latin typeface="Times New Roman" panose="02020603050405020304" pitchFamily="18" charset="0"/>
-                <a:cs typeface="Times New Roman" panose="02020603050405020304" pitchFamily="18" charset="0"/>
-              </a:rPr>
-              <a:t>2.1 Method 1: Use Your Own </a:t>
-            </a:r>
-            <a:r>
-              <a:rPr lang="en-US" b="1" dirty="0" err="1">
-                <a:solidFill>
-                  <a:srgbClr val="980000"/>
-                </a:solidFill>
-                <a:latin typeface="Times New Roman" panose="02020603050405020304" pitchFamily="18" charset="0"/>
-                <a:cs typeface="Times New Roman" panose="02020603050405020304" pitchFamily="18" charset="0"/>
-              </a:rPr>
-              <a:t>EasyChair</a:t>
-            </a:r>
-            <a:r>
-              <a:rPr lang="en-US" b="1" dirty="0">
-                <a:solidFill>
-                  <a:srgbClr val="980000"/>
-                </a:solidFill>
-                <a:latin typeface="Times New Roman" panose="02020603050405020304" pitchFamily="18" charset="0"/>
-                <a:cs typeface="Times New Roman" panose="02020603050405020304" pitchFamily="18" charset="0"/>
-              </a:rPr>
-              <a:t> Account-3</a:t>
-            </a:r>
-            <a:endParaRPr b="1" dirty="0">
-              <a:solidFill>
-                <a:srgbClr val="FF0000"/>
-              </a:solidFill>
-              <a:latin typeface="Times New Roman" panose="02020603050405020304" pitchFamily="18" charset="0"/>
-              <a:cs typeface="Times New Roman" panose="02020603050405020304" pitchFamily="18" charset="0"/>
-            </a:endParaRPr>
-          </a:p>
-        </p:txBody>
-      </p:sp>
       <p:pic>
         <p:nvPicPr>
           <p:cNvPr id="10" name="图片 9"/>
@@ -9892,7 +11315,7 @@
         </p:blipFill>
         <p:spPr>
           <a:xfrm>
-            <a:off x="770020" y="1796327"/>
+            <a:off x="770020" y="1999529"/>
             <a:ext cx="7603960" cy="2331173"/>
           </a:xfrm>
           <a:prstGeom prst="rect">
@@ -9905,6 +11328,324 @@
           </a:ln>
         </p:spPr>
       </p:pic>
+      <p:sp>
+        <p:nvSpPr>
+          <p:cNvPr id="2" name="Google Shape;121;p23">
+            <a:extLst>
+              <a:ext uri="{FF2B5EF4-FFF2-40B4-BE49-F238E27FC236}">
+                <a16:creationId xmlns:a16="http://schemas.microsoft.com/office/drawing/2014/main" id="{C19805C2-E2A0-AC51-B7D3-C0A17AFA2D58}"/>
+              </a:ext>
+            </a:extLst>
+          </p:cNvPr>
+          <p:cNvSpPr txBox="1"/>
+          <p:nvPr/>
+        </p:nvSpPr>
+        <p:spPr>
+          <a:xfrm>
+            <a:off x="557233" y="76635"/>
+            <a:ext cx="6241500" cy="654938"/>
+          </a:xfrm>
+          <a:prstGeom prst="rect">
+            <a:avLst/>
+          </a:prstGeom>
+          <a:noFill/>
+          <a:ln>
+            <a:noFill/>
+          </a:ln>
+        </p:spPr>
+        <p:txBody>
+          <a:bodyPr spcFirstLastPara="1" wrap="square" lIns="91425" tIns="91425" rIns="91425" bIns="91425" anchor="t" anchorCtr="0">
+            <a:noAutofit/>
+          </a:bodyPr>
+          <a:lstStyle>
+            <a:defPPr marR="0" lvl="0" algn="l" rtl="0">
+              <a:lnSpc>
+                <a:spcPct val="100000"/>
+              </a:lnSpc>
+              <a:spcBef>
+                <a:spcPts val="0"/>
+              </a:spcBef>
+              <a:spcAft>
+                <a:spcPts val="0"/>
+              </a:spcAft>
+            </a:defPPr>
+            <a:lvl1pPr marR="0" lvl="0" algn="l" rtl="0">
+              <a:lnSpc>
+                <a:spcPct val="100000"/>
+              </a:lnSpc>
+              <a:spcBef>
+                <a:spcPts val="0"/>
+              </a:spcBef>
+              <a:spcAft>
+                <a:spcPts val="0"/>
+              </a:spcAft>
+              <a:buClr>
+                <a:schemeClr val="dk1"/>
+              </a:buClr>
+              <a:buSzPts val="2800"/>
+              <a:buFont typeface="Arial" panose="020B0604020202020204"/>
+              <a:buNone/>
+              <a:defRPr sz="2800" b="0" i="0" u="none" strike="noStrike" cap="none">
+                <a:solidFill>
+                  <a:schemeClr val="dk1"/>
+                </a:solidFill>
+                <a:latin typeface="Arial" panose="020B0604020202020204"/>
+                <a:ea typeface="Arial" panose="020B0604020202020204"/>
+                <a:cs typeface="Arial" panose="020B0604020202020204"/>
+                <a:sym typeface="Arial" panose="020B0604020202020204"/>
+              </a:defRPr>
+            </a:lvl1pPr>
+            <a:lvl2pPr marR="0" lvl="1" algn="l" rtl="0">
+              <a:lnSpc>
+                <a:spcPct val="100000"/>
+              </a:lnSpc>
+              <a:spcBef>
+                <a:spcPts val="0"/>
+              </a:spcBef>
+              <a:spcAft>
+                <a:spcPts val="0"/>
+              </a:spcAft>
+              <a:buClr>
+                <a:schemeClr val="dk1"/>
+              </a:buClr>
+              <a:buSzPts val="2800"/>
+              <a:buFont typeface="Arial" panose="020B0604020202020204"/>
+              <a:buNone/>
+              <a:defRPr sz="2800" b="0" i="0" u="none" strike="noStrike" cap="none">
+                <a:solidFill>
+                  <a:schemeClr val="dk1"/>
+                </a:solidFill>
+                <a:latin typeface="Arial" panose="020B0604020202020204"/>
+                <a:ea typeface="Arial" panose="020B0604020202020204"/>
+                <a:cs typeface="Arial" panose="020B0604020202020204"/>
+                <a:sym typeface="Arial" panose="020B0604020202020204"/>
+              </a:defRPr>
+            </a:lvl2pPr>
+            <a:lvl3pPr marR="0" lvl="2" algn="l" rtl="0">
+              <a:lnSpc>
+                <a:spcPct val="100000"/>
+              </a:lnSpc>
+              <a:spcBef>
+                <a:spcPts val="0"/>
+              </a:spcBef>
+              <a:spcAft>
+                <a:spcPts val="0"/>
+              </a:spcAft>
+              <a:buClr>
+                <a:schemeClr val="dk1"/>
+              </a:buClr>
+              <a:buSzPts val="2800"/>
+              <a:buFont typeface="Arial" panose="020B0604020202020204"/>
+              <a:buNone/>
+              <a:defRPr sz="2800" b="0" i="0" u="none" strike="noStrike" cap="none">
+                <a:solidFill>
+                  <a:schemeClr val="dk1"/>
+                </a:solidFill>
+                <a:latin typeface="Arial" panose="020B0604020202020204"/>
+                <a:ea typeface="Arial" panose="020B0604020202020204"/>
+                <a:cs typeface="Arial" panose="020B0604020202020204"/>
+                <a:sym typeface="Arial" panose="020B0604020202020204"/>
+              </a:defRPr>
+            </a:lvl3pPr>
+            <a:lvl4pPr marR="0" lvl="3" algn="l" rtl="0">
+              <a:lnSpc>
+                <a:spcPct val="100000"/>
+              </a:lnSpc>
+              <a:spcBef>
+                <a:spcPts val="0"/>
+              </a:spcBef>
+              <a:spcAft>
+                <a:spcPts val="0"/>
+              </a:spcAft>
+              <a:buClr>
+                <a:schemeClr val="dk1"/>
+              </a:buClr>
+              <a:buSzPts val="2800"/>
+              <a:buFont typeface="Arial" panose="020B0604020202020204"/>
+              <a:buNone/>
+              <a:defRPr sz="2800" b="0" i="0" u="none" strike="noStrike" cap="none">
+                <a:solidFill>
+                  <a:schemeClr val="dk1"/>
+                </a:solidFill>
+                <a:latin typeface="Arial" panose="020B0604020202020204"/>
+                <a:ea typeface="Arial" panose="020B0604020202020204"/>
+                <a:cs typeface="Arial" panose="020B0604020202020204"/>
+                <a:sym typeface="Arial" panose="020B0604020202020204"/>
+              </a:defRPr>
+            </a:lvl4pPr>
+            <a:lvl5pPr marR="0" lvl="4" algn="l" rtl="0">
+              <a:lnSpc>
+                <a:spcPct val="100000"/>
+              </a:lnSpc>
+              <a:spcBef>
+                <a:spcPts val="0"/>
+              </a:spcBef>
+              <a:spcAft>
+                <a:spcPts val="0"/>
+              </a:spcAft>
+              <a:buClr>
+                <a:schemeClr val="dk1"/>
+              </a:buClr>
+              <a:buSzPts val="2800"/>
+              <a:buFont typeface="Arial" panose="020B0604020202020204"/>
+              <a:buNone/>
+              <a:defRPr sz="2800" b="0" i="0" u="none" strike="noStrike" cap="none">
+                <a:solidFill>
+                  <a:schemeClr val="dk1"/>
+                </a:solidFill>
+                <a:latin typeface="Arial" panose="020B0604020202020204"/>
+                <a:ea typeface="Arial" panose="020B0604020202020204"/>
+                <a:cs typeface="Arial" panose="020B0604020202020204"/>
+                <a:sym typeface="Arial" panose="020B0604020202020204"/>
+              </a:defRPr>
+            </a:lvl5pPr>
+            <a:lvl6pPr marR="0" lvl="5" algn="l" rtl="0">
+              <a:lnSpc>
+                <a:spcPct val="100000"/>
+              </a:lnSpc>
+              <a:spcBef>
+                <a:spcPts val="0"/>
+              </a:spcBef>
+              <a:spcAft>
+                <a:spcPts val="0"/>
+              </a:spcAft>
+              <a:buClr>
+                <a:schemeClr val="dk1"/>
+              </a:buClr>
+              <a:buSzPts val="2800"/>
+              <a:buFont typeface="Arial" panose="020B0604020202020204"/>
+              <a:buNone/>
+              <a:defRPr sz="2800" b="0" i="0" u="none" strike="noStrike" cap="none">
+                <a:solidFill>
+                  <a:schemeClr val="dk1"/>
+                </a:solidFill>
+                <a:latin typeface="Arial" panose="020B0604020202020204"/>
+                <a:ea typeface="Arial" panose="020B0604020202020204"/>
+                <a:cs typeface="Arial" panose="020B0604020202020204"/>
+                <a:sym typeface="Arial" panose="020B0604020202020204"/>
+              </a:defRPr>
+            </a:lvl6pPr>
+            <a:lvl7pPr marR="0" lvl="6" algn="l" rtl="0">
+              <a:lnSpc>
+                <a:spcPct val="100000"/>
+              </a:lnSpc>
+              <a:spcBef>
+                <a:spcPts val="0"/>
+              </a:spcBef>
+              <a:spcAft>
+                <a:spcPts val="0"/>
+              </a:spcAft>
+              <a:buClr>
+                <a:schemeClr val="dk1"/>
+              </a:buClr>
+              <a:buSzPts val="2800"/>
+              <a:buFont typeface="Arial" panose="020B0604020202020204"/>
+              <a:buNone/>
+              <a:defRPr sz="2800" b="0" i="0" u="none" strike="noStrike" cap="none">
+                <a:solidFill>
+                  <a:schemeClr val="dk1"/>
+                </a:solidFill>
+                <a:latin typeface="Arial" panose="020B0604020202020204"/>
+                <a:ea typeface="Arial" panose="020B0604020202020204"/>
+                <a:cs typeface="Arial" panose="020B0604020202020204"/>
+                <a:sym typeface="Arial" panose="020B0604020202020204"/>
+              </a:defRPr>
+            </a:lvl7pPr>
+            <a:lvl8pPr marR="0" lvl="7" algn="l" rtl="0">
+              <a:lnSpc>
+                <a:spcPct val="100000"/>
+              </a:lnSpc>
+              <a:spcBef>
+                <a:spcPts val="0"/>
+              </a:spcBef>
+              <a:spcAft>
+                <a:spcPts val="0"/>
+              </a:spcAft>
+              <a:buClr>
+                <a:schemeClr val="dk1"/>
+              </a:buClr>
+              <a:buSzPts val="2800"/>
+              <a:buFont typeface="Arial" panose="020B0604020202020204"/>
+              <a:buNone/>
+              <a:defRPr sz="2800" b="0" i="0" u="none" strike="noStrike" cap="none">
+                <a:solidFill>
+                  <a:schemeClr val="dk1"/>
+                </a:solidFill>
+                <a:latin typeface="Arial" panose="020B0604020202020204"/>
+                <a:ea typeface="Arial" panose="020B0604020202020204"/>
+                <a:cs typeface="Arial" panose="020B0604020202020204"/>
+                <a:sym typeface="Arial" panose="020B0604020202020204"/>
+              </a:defRPr>
+            </a:lvl8pPr>
+            <a:lvl9pPr marR="0" lvl="8" algn="l" rtl="0">
+              <a:lnSpc>
+                <a:spcPct val="100000"/>
+              </a:lnSpc>
+              <a:spcBef>
+                <a:spcPts val="0"/>
+              </a:spcBef>
+              <a:spcAft>
+                <a:spcPts val="0"/>
+              </a:spcAft>
+              <a:buClr>
+                <a:schemeClr val="dk1"/>
+              </a:buClr>
+              <a:buSzPts val="2800"/>
+              <a:buFont typeface="Arial" panose="020B0604020202020204"/>
+              <a:buNone/>
+              <a:defRPr sz="2800" b="0" i="0" u="none" strike="noStrike" cap="none">
+                <a:solidFill>
+                  <a:schemeClr val="dk1"/>
+                </a:solidFill>
+                <a:latin typeface="Arial" panose="020B0604020202020204"/>
+                <a:ea typeface="Arial" panose="020B0604020202020204"/>
+                <a:cs typeface="Arial" panose="020B0604020202020204"/>
+                <a:sym typeface="Arial" panose="020B0604020202020204"/>
+              </a:defRPr>
+            </a:lvl9pPr>
+          </a:lstStyle>
+          <a:p>
+            <a:pPr>
+              <a:lnSpc>
+                <a:spcPct val="115000"/>
+              </a:lnSpc>
+              <a:spcAft>
+                <a:spcPts val="1200"/>
+              </a:spcAft>
+            </a:pPr>
+            <a:r>
+              <a:rPr lang="en-US" b="1" dirty="0">
+                <a:solidFill>
+                  <a:srgbClr val="009242"/>
+                </a:solidFill>
+                <a:latin typeface="Times New Roman" panose="02020603050405020304" pitchFamily="18" charset="0"/>
+                <a:cs typeface="Times New Roman" panose="02020603050405020304" pitchFamily="18" charset="0"/>
+              </a:rPr>
+              <a:t>2.1 Method 1: Use Your Own </a:t>
+            </a:r>
+            <a:r>
+              <a:rPr lang="en-US" b="1" dirty="0" err="1">
+                <a:solidFill>
+                  <a:srgbClr val="009242"/>
+                </a:solidFill>
+                <a:latin typeface="Times New Roman" panose="02020603050405020304" pitchFamily="18" charset="0"/>
+                <a:cs typeface="Times New Roman" panose="02020603050405020304" pitchFamily="18" charset="0"/>
+              </a:rPr>
+              <a:t>EasyChair</a:t>
+            </a:r>
+            <a:r>
+              <a:rPr lang="en-US" b="1" dirty="0">
+                <a:solidFill>
+                  <a:srgbClr val="009242"/>
+                </a:solidFill>
+                <a:latin typeface="Times New Roman" panose="02020603050405020304" pitchFamily="18" charset="0"/>
+                <a:cs typeface="Times New Roman" panose="02020603050405020304" pitchFamily="18" charset="0"/>
+              </a:rPr>
+              <a:t> Account-3</a:t>
+            </a:r>
+          </a:p>
+        </p:txBody>
+      </p:sp>
     </p:spTree>
   </p:cSld>
   <p:clrMapOvr>
@@ -9937,7 +11678,7 @@
             <a:spLocks noGrp="1"/>
           </p:cNvSpPr>
           <p:nvPr>
-            <p:ph type="body" idx="1"/>
+            <p:ph type="body" idx="4294967295"/>
           </p:nvPr>
         </p:nvSpPr>
         <p:spPr>
@@ -10056,83 +11797,6 @@
             <a:endParaRPr sz="2000" dirty="0">
               <a:solidFill>
                 <a:schemeClr val="dk1"/>
-              </a:solidFill>
-              <a:latin typeface="Times New Roman" panose="02020603050405020304" pitchFamily="18" charset="0"/>
-              <a:cs typeface="Times New Roman" panose="02020603050405020304" pitchFamily="18" charset="0"/>
-            </a:endParaRPr>
-          </a:p>
-        </p:txBody>
-      </p:sp>
-      <p:sp>
-        <p:nvSpPr>
-          <p:cNvPr id="4" name="Google Shape;121;p23"/>
-          <p:cNvSpPr txBox="1">
-            <a:spLocks noGrp="1"/>
-          </p:cNvSpPr>
-          <p:nvPr>
-            <p:ph type="title"/>
-          </p:nvPr>
-        </p:nvSpPr>
-        <p:spPr>
-          <a:xfrm>
-            <a:off x="311700" y="294625"/>
-            <a:ext cx="8520600" cy="572700"/>
-          </a:xfrm>
-          <a:prstGeom prst="rect">
-            <a:avLst/>
-          </a:prstGeom>
-        </p:spPr>
-        <p:txBody>
-          <a:bodyPr spcFirstLastPara="1" wrap="square" lIns="91425" tIns="91425" rIns="91425" bIns="91425" anchor="t" anchorCtr="0">
-            <a:noAutofit/>
-          </a:bodyPr>
-          <a:lstStyle/>
-          <a:p>
-            <a:pPr marL="0" lvl="0" indent="0" algn="l" rtl="0">
-              <a:lnSpc>
-                <a:spcPct val="115000"/>
-              </a:lnSpc>
-              <a:spcBef>
-                <a:spcPts val="0"/>
-              </a:spcBef>
-              <a:spcAft>
-                <a:spcPts val="1200"/>
-              </a:spcAft>
-              <a:buNone/>
-            </a:pPr>
-            <a:r>
-              <a:rPr lang="en-US" b="1" dirty="0">
-                <a:solidFill>
-                  <a:srgbClr val="980000"/>
-                </a:solidFill>
-                <a:latin typeface="Times New Roman" panose="02020603050405020304" pitchFamily="18" charset="0"/>
-                <a:cs typeface="Times New Roman" panose="02020603050405020304" pitchFamily="18" charset="0"/>
-              </a:rPr>
-              <a:t>2.1 Method 1: Use Your Own </a:t>
-            </a:r>
-            <a:r>
-              <a:rPr lang="en-US" b="1" dirty="0" err="1">
-                <a:solidFill>
-                  <a:srgbClr val="980000"/>
-                </a:solidFill>
-                <a:latin typeface="Times New Roman" panose="02020603050405020304" pitchFamily="18" charset="0"/>
-                <a:cs typeface="Times New Roman" panose="02020603050405020304" pitchFamily="18" charset="0"/>
-              </a:rPr>
-              <a:t>EasyChair</a:t>
-            </a:r>
-            <a:r>
-              <a:rPr lang="en-US" b="1" dirty="0">
-                <a:solidFill>
-                  <a:srgbClr val="980000"/>
-                </a:solidFill>
-                <a:latin typeface="Times New Roman" panose="02020603050405020304" pitchFamily="18" charset="0"/>
-                <a:cs typeface="Times New Roman" panose="02020603050405020304" pitchFamily="18" charset="0"/>
-              </a:rPr>
-              <a:t> Account-4</a:t>
-            </a:r>
-            <a:endParaRPr b="1" dirty="0">
-              <a:solidFill>
-                <a:srgbClr val="FF0000"/>
               </a:solidFill>
               <a:latin typeface="Times New Roman" panose="02020603050405020304" pitchFamily="18" charset="0"/>
               <a:cs typeface="Times New Roman" panose="02020603050405020304" pitchFamily="18" charset="0"/>
@@ -10170,6 +11834,324 @@
           </a:ln>
         </p:spPr>
       </p:pic>
+      <p:sp>
+        <p:nvSpPr>
+          <p:cNvPr id="2" name="Google Shape;121;p23">
+            <a:extLst>
+              <a:ext uri="{FF2B5EF4-FFF2-40B4-BE49-F238E27FC236}">
+                <a16:creationId xmlns:a16="http://schemas.microsoft.com/office/drawing/2014/main" id="{2254BD91-CC9A-169B-E40F-0107C8A01572}"/>
+              </a:ext>
+            </a:extLst>
+          </p:cNvPr>
+          <p:cNvSpPr txBox="1"/>
+          <p:nvPr/>
+        </p:nvSpPr>
+        <p:spPr>
+          <a:xfrm>
+            <a:off x="557233" y="76635"/>
+            <a:ext cx="6241500" cy="654938"/>
+          </a:xfrm>
+          <a:prstGeom prst="rect">
+            <a:avLst/>
+          </a:prstGeom>
+          <a:noFill/>
+          <a:ln>
+            <a:noFill/>
+          </a:ln>
+        </p:spPr>
+        <p:txBody>
+          <a:bodyPr spcFirstLastPara="1" wrap="square" lIns="91425" tIns="91425" rIns="91425" bIns="91425" anchor="t" anchorCtr="0">
+            <a:noAutofit/>
+          </a:bodyPr>
+          <a:lstStyle>
+            <a:defPPr marR="0" lvl="0" algn="l" rtl="0">
+              <a:lnSpc>
+                <a:spcPct val="100000"/>
+              </a:lnSpc>
+              <a:spcBef>
+                <a:spcPts val="0"/>
+              </a:spcBef>
+              <a:spcAft>
+                <a:spcPts val="0"/>
+              </a:spcAft>
+            </a:defPPr>
+            <a:lvl1pPr marR="0" lvl="0" algn="l" rtl="0">
+              <a:lnSpc>
+                <a:spcPct val="100000"/>
+              </a:lnSpc>
+              <a:spcBef>
+                <a:spcPts val="0"/>
+              </a:spcBef>
+              <a:spcAft>
+                <a:spcPts val="0"/>
+              </a:spcAft>
+              <a:buClr>
+                <a:schemeClr val="dk1"/>
+              </a:buClr>
+              <a:buSzPts val="2800"/>
+              <a:buFont typeface="Arial" panose="020B0604020202020204"/>
+              <a:buNone/>
+              <a:defRPr sz="2800" b="0" i="0" u="none" strike="noStrike" cap="none">
+                <a:solidFill>
+                  <a:schemeClr val="dk1"/>
+                </a:solidFill>
+                <a:latin typeface="Arial" panose="020B0604020202020204"/>
+                <a:ea typeface="Arial" panose="020B0604020202020204"/>
+                <a:cs typeface="Arial" panose="020B0604020202020204"/>
+                <a:sym typeface="Arial" panose="020B0604020202020204"/>
+              </a:defRPr>
+            </a:lvl1pPr>
+            <a:lvl2pPr marR="0" lvl="1" algn="l" rtl="0">
+              <a:lnSpc>
+                <a:spcPct val="100000"/>
+              </a:lnSpc>
+              <a:spcBef>
+                <a:spcPts val="0"/>
+              </a:spcBef>
+              <a:spcAft>
+                <a:spcPts val="0"/>
+              </a:spcAft>
+              <a:buClr>
+                <a:schemeClr val="dk1"/>
+              </a:buClr>
+              <a:buSzPts val="2800"/>
+              <a:buFont typeface="Arial" panose="020B0604020202020204"/>
+              <a:buNone/>
+              <a:defRPr sz="2800" b="0" i="0" u="none" strike="noStrike" cap="none">
+                <a:solidFill>
+                  <a:schemeClr val="dk1"/>
+                </a:solidFill>
+                <a:latin typeface="Arial" panose="020B0604020202020204"/>
+                <a:ea typeface="Arial" panose="020B0604020202020204"/>
+                <a:cs typeface="Arial" panose="020B0604020202020204"/>
+                <a:sym typeface="Arial" panose="020B0604020202020204"/>
+              </a:defRPr>
+            </a:lvl2pPr>
+            <a:lvl3pPr marR="0" lvl="2" algn="l" rtl="0">
+              <a:lnSpc>
+                <a:spcPct val="100000"/>
+              </a:lnSpc>
+              <a:spcBef>
+                <a:spcPts val="0"/>
+              </a:spcBef>
+              <a:spcAft>
+                <a:spcPts val="0"/>
+              </a:spcAft>
+              <a:buClr>
+                <a:schemeClr val="dk1"/>
+              </a:buClr>
+              <a:buSzPts val="2800"/>
+              <a:buFont typeface="Arial" panose="020B0604020202020204"/>
+              <a:buNone/>
+              <a:defRPr sz="2800" b="0" i="0" u="none" strike="noStrike" cap="none">
+                <a:solidFill>
+                  <a:schemeClr val="dk1"/>
+                </a:solidFill>
+                <a:latin typeface="Arial" panose="020B0604020202020204"/>
+                <a:ea typeface="Arial" panose="020B0604020202020204"/>
+                <a:cs typeface="Arial" panose="020B0604020202020204"/>
+                <a:sym typeface="Arial" panose="020B0604020202020204"/>
+              </a:defRPr>
+            </a:lvl3pPr>
+            <a:lvl4pPr marR="0" lvl="3" algn="l" rtl="0">
+              <a:lnSpc>
+                <a:spcPct val="100000"/>
+              </a:lnSpc>
+              <a:spcBef>
+                <a:spcPts val="0"/>
+              </a:spcBef>
+              <a:spcAft>
+                <a:spcPts val="0"/>
+              </a:spcAft>
+              <a:buClr>
+                <a:schemeClr val="dk1"/>
+              </a:buClr>
+              <a:buSzPts val="2800"/>
+              <a:buFont typeface="Arial" panose="020B0604020202020204"/>
+              <a:buNone/>
+              <a:defRPr sz="2800" b="0" i="0" u="none" strike="noStrike" cap="none">
+                <a:solidFill>
+                  <a:schemeClr val="dk1"/>
+                </a:solidFill>
+                <a:latin typeface="Arial" panose="020B0604020202020204"/>
+                <a:ea typeface="Arial" panose="020B0604020202020204"/>
+                <a:cs typeface="Arial" panose="020B0604020202020204"/>
+                <a:sym typeface="Arial" panose="020B0604020202020204"/>
+              </a:defRPr>
+            </a:lvl4pPr>
+            <a:lvl5pPr marR="0" lvl="4" algn="l" rtl="0">
+              <a:lnSpc>
+                <a:spcPct val="100000"/>
+              </a:lnSpc>
+              <a:spcBef>
+                <a:spcPts val="0"/>
+              </a:spcBef>
+              <a:spcAft>
+                <a:spcPts val="0"/>
+              </a:spcAft>
+              <a:buClr>
+                <a:schemeClr val="dk1"/>
+              </a:buClr>
+              <a:buSzPts val="2800"/>
+              <a:buFont typeface="Arial" panose="020B0604020202020204"/>
+              <a:buNone/>
+              <a:defRPr sz="2800" b="0" i="0" u="none" strike="noStrike" cap="none">
+                <a:solidFill>
+                  <a:schemeClr val="dk1"/>
+                </a:solidFill>
+                <a:latin typeface="Arial" panose="020B0604020202020204"/>
+                <a:ea typeface="Arial" panose="020B0604020202020204"/>
+                <a:cs typeface="Arial" panose="020B0604020202020204"/>
+                <a:sym typeface="Arial" panose="020B0604020202020204"/>
+              </a:defRPr>
+            </a:lvl5pPr>
+            <a:lvl6pPr marR="0" lvl="5" algn="l" rtl="0">
+              <a:lnSpc>
+                <a:spcPct val="100000"/>
+              </a:lnSpc>
+              <a:spcBef>
+                <a:spcPts val="0"/>
+              </a:spcBef>
+              <a:spcAft>
+                <a:spcPts val="0"/>
+              </a:spcAft>
+              <a:buClr>
+                <a:schemeClr val="dk1"/>
+              </a:buClr>
+              <a:buSzPts val="2800"/>
+              <a:buFont typeface="Arial" panose="020B0604020202020204"/>
+              <a:buNone/>
+              <a:defRPr sz="2800" b="0" i="0" u="none" strike="noStrike" cap="none">
+                <a:solidFill>
+                  <a:schemeClr val="dk1"/>
+                </a:solidFill>
+                <a:latin typeface="Arial" panose="020B0604020202020204"/>
+                <a:ea typeface="Arial" panose="020B0604020202020204"/>
+                <a:cs typeface="Arial" panose="020B0604020202020204"/>
+                <a:sym typeface="Arial" panose="020B0604020202020204"/>
+              </a:defRPr>
+            </a:lvl6pPr>
+            <a:lvl7pPr marR="0" lvl="6" algn="l" rtl="0">
+              <a:lnSpc>
+                <a:spcPct val="100000"/>
+              </a:lnSpc>
+              <a:spcBef>
+                <a:spcPts val="0"/>
+              </a:spcBef>
+              <a:spcAft>
+                <a:spcPts val="0"/>
+              </a:spcAft>
+              <a:buClr>
+                <a:schemeClr val="dk1"/>
+              </a:buClr>
+              <a:buSzPts val="2800"/>
+              <a:buFont typeface="Arial" panose="020B0604020202020204"/>
+              <a:buNone/>
+              <a:defRPr sz="2800" b="0" i="0" u="none" strike="noStrike" cap="none">
+                <a:solidFill>
+                  <a:schemeClr val="dk1"/>
+                </a:solidFill>
+                <a:latin typeface="Arial" panose="020B0604020202020204"/>
+                <a:ea typeface="Arial" panose="020B0604020202020204"/>
+                <a:cs typeface="Arial" panose="020B0604020202020204"/>
+                <a:sym typeface="Arial" panose="020B0604020202020204"/>
+              </a:defRPr>
+            </a:lvl7pPr>
+            <a:lvl8pPr marR="0" lvl="7" algn="l" rtl="0">
+              <a:lnSpc>
+                <a:spcPct val="100000"/>
+              </a:lnSpc>
+              <a:spcBef>
+                <a:spcPts val="0"/>
+              </a:spcBef>
+              <a:spcAft>
+                <a:spcPts val="0"/>
+              </a:spcAft>
+              <a:buClr>
+                <a:schemeClr val="dk1"/>
+              </a:buClr>
+              <a:buSzPts val="2800"/>
+              <a:buFont typeface="Arial" panose="020B0604020202020204"/>
+              <a:buNone/>
+              <a:defRPr sz="2800" b="0" i="0" u="none" strike="noStrike" cap="none">
+                <a:solidFill>
+                  <a:schemeClr val="dk1"/>
+                </a:solidFill>
+                <a:latin typeface="Arial" panose="020B0604020202020204"/>
+                <a:ea typeface="Arial" panose="020B0604020202020204"/>
+                <a:cs typeface="Arial" panose="020B0604020202020204"/>
+                <a:sym typeface="Arial" panose="020B0604020202020204"/>
+              </a:defRPr>
+            </a:lvl8pPr>
+            <a:lvl9pPr marR="0" lvl="8" algn="l" rtl="0">
+              <a:lnSpc>
+                <a:spcPct val="100000"/>
+              </a:lnSpc>
+              <a:spcBef>
+                <a:spcPts val="0"/>
+              </a:spcBef>
+              <a:spcAft>
+                <a:spcPts val="0"/>
+              </a:spcAft>
+              <a:buClr>
+                <a:schemeClr val="dk1"/>
+              </a:buClr>
+              <a:buSzPts val="2800"/>
+              <a:buFont typeface="Arial" panose="020B0604020202020204"/>
+              <a:buNone/>
+              <a:defRPr sz="2800" b="0" i="0" u="none" strike="noStrike" cap="none">
+                <a:solidFill>
+                  <a:schemeClr val="dk1"/>
+                </a:solidFill>
+                <a:latin typeface="Arial" panose="020B0604020202020204"/>
+                <a:ea typeface="Arial" panose="020B0604020202020204"/>
+                <a:cs typeface="Arial" panose="020B0604020202020204"/>
+                <a:sym typeface="Arial" panose="020B0604020202020204"/>
+              </a:defRPr>
+            </a:lvl9pPr>
+          </a:lstStyle>
+          <a:p>
+            <a:pPr>
+              <a:lnSpc>
+                <a:spcPct val="115000"/>
+              </a:lnSpc>
+              <a:spcAft>
+                <a:spcPts val="1200"/>
+              </a:spcAft>
+            </a:pPr>
+            <a:r>
+              <a:rPr lang="en-US" b="1" dirty="0">
+                <a:solidFill>
+                  <a:srgbClr val="009242"/>
+                </a:solidFill>
+                <a:latin typeface="Times New Roman" panose="02020603050405020304" pitchFamily="18" charset="0"/>
+                <a:cs typeface="Times New Roman" panose="02020603050405020304" pitchFamily="18" charset="0"/>
+              </a:rPr>
+              <a:t>2.1 Method 1: Use Your Own </a:t>
+            </a:r>
+            <a:r>
+              <a:rPr lang="en-US" b="1" dirty="0" err="1">
+                <a:solidFill>
+                  <a:srgbClr val="009242"/>
+                </a:solidFill>
+                <a:latin typeface="Times New Roman" panose="02020603050405020304" pitchFamily="18" charset="0"/>
+                <a:cs typeface="Times New Roman" panose="02020603050405020304" pitchFamily="18" charset="0"/>
+              </a:rPr>
+              <a:t>EasyChair</a:t>
+            </a:r>
+            <a:r>
+              <a:rPr lang="en-US" b="1" dirty="0">
+                <a:solidFill>
+                  <a:srgbClr val="009242"/>
+                </a:solidFill>
+                <a:latin typeface="Times New Roman" panose="02020603050405020304" pitchFamily="18" charset="0"/>
+                <a:cs typeface="Times New Roman" panose="02020603050405020304" pitchFamily="18" charset="0"/>
+              </a:rPr>
+              <a:t> Account-4</a:t>
+            </a:r>
+          </a:p>
+        </p:txBody>
+      </p:sp>
     </p:spTree>
   </p:cSld>
   <p:clrMapOvr>
@@ -10202,7 +12184,7 @@
             <a:spLocks noGrp="1"/>
           </p:cNvSpPr>
           <p:nvPr>
-            <p:ph type="body" idx="1"/>
+            <p:ph type="body" idx="4294967295"/>
           </p:nvPr>
         </p:nvSpPr>
         <p:spPr>
@@ -10252,83 +12234,6 @@
             <a:endParaRPr sz="2000" dirty="0">
               <a:solidFill>
                 <a:schemeClr val="tx1"/>
-              </a:solidFill>
-              <a:latin typeface="Times New Roman" panose="02020603050405020304" pitchFamily="18" charset="0"/>
-              <a:cs typeface="Times New Roman" panose="02020603050405020304" pitchFamily="18" charset="0"/>
-            </a:endParaRPr>
-          </a:p>
-        </p:txBody>
-      </p:sp>
-      <p:sp>
-        <p:nvSpPr>
-          <p:cNvPr id="4" name="Google Shape;121;p23"/>
-          <p:cNvSpPr txBox="1">
-            <a:spLocks noGrp="1"/>
-          </p:cNvSpPr>
-          <p:nvPr>
-            <p:ph type="title"/>
-          </p:nvPr>
-        </p:nvSpPr>
-        <p:spPr>
-          <a:xfrm>
-            <a:off x="311700" y="294625"/>
-            <a:ext cx="8520600" cy="572700"/>
-          </a:xfrm>
-          <a:prstGeom prst="rect">
-            <a:avLst/>
-          </a:prstGeom>
-        </p:spPr>
-        <p:txBody>
-          <a:bodyPr spcFirstLastPara="1" wrap="square" lIns="91425" tIns="91425" rIns="91425" bIns="91425" anchor="t" anchorCtr="0">
-            <a:noAutofit/>
-          </a:bodyPr>
-          <a:lstStyle/>
-          <a:p>
-            <a:pPr marL="0" lvl="0" indent="0" algn="l" rtl="0">
-              <a:lnSpc>
-                <a:spcPct val="115000"/>
-              </a:lnSpc>
-              <a:spcBef>
-                <a:spcPts val="0"/>
-              </a:spcBef>
-              <a:spcAft>
-                <a:spcPts val="1200"/>
-              </a:spcAft>
-              <a:buNone/>
-            </a:pPr>
-            <a:r>
-              <a:rPr lang="en-US" b="1" dirty="0">
-                <a:solidFill>
-                  <a:srgbClr val="980000"/>
-                </a:solidFill>
-                <a:latin typeface="Times New Roman" panose="02020603050405020304" pitchFamily="18" charset="0"/>
-                <a:cs typeface="Times New Roman" panose="02020603050405020304" pitchFamily="18" charset="0"/>
-              </a:rPr>
-              <a:t>2.1 Method 1: Use Your Own </a:t>
-            </a:r>
-            <a:r>
-              <a:rPr lang="en-US" b="1" dirty="0" err="1">
-                <a:solidFill>
-                  <a:srgbClr val="980000"/>
-                </a:solidFill>
-                <a:latin typeface="Times New Roman" panose="02020603050405020304" pitchFamily="18" charset="0"/>
-                <a:cs typeface="Times New Roman" panose="02020603050405020304" pitchFamily="18" charset="0"/>
-              </a:rPr>
-              <a:t>EasyChair</a:t>
-            </a:r>
-            <a:r>
-              <a:rPr lang="en-US" b="1" dirty="0">
-                <a:solidFill>
-                  <a:srgbClr val="980000"/>
-                </a:solidFill>
-                <a:latin typeface="Times New Roman" panose="02020603050405020304" pitchFamily="18" charset="0"/>
-                <a:cs typeface="Times New Roman" panose="02020603050405020304" pitchFamily="18" charset="0"/>
-              </a:rPr>
-              <a:t> Account-5</a:t>
-            </a:r>
-            <a:endParaRPr b="1" dirty="0">
-              <a:solidFill>
-                <a:srgbClr val="FF0000"/>
               </a:solidFill>
               <a:latin typeface="Times New Roman" panose="02020603050405020304" pitchFamily="18" charset="0"/>
               <a:cs typeface="Times New Roman" panose="02020603050405020304" pitchFamily="18" charset="0"/>
@@ -10446,6 +12351,324 @@
           </a:p>
         </p:txBody>
       </p:sp>
+      <p:sp>
+        <p:nvSpPr>
+          <p:cNvPr id="2" name="Google Shape;121;p23">
+            <a:extLst>
+              <a:ext uri="{FF2B5EF4-FFF2-40B4-BE49-F238E27FC236}">
+                <a16:creationId xmlns:a16="http://schemas.microsoft.com/office/drawing/2014/main" id="{92DD3045-4A68-170D-BA7D-4016823284A9}"/>
+              </a:ext>
+            </a:extLst>
+          </p:cNvPr>
+          <p:cNvSpPr txBox="1"/>
+          <p:nvPr/>
+        </p:nvSpPr>
+        <p:spPr>
+          <a:xfrm>
+            <a:off x="557233" y="76635"/>
+            <a:ext cx="6241500" cy="654938"/>
+          </a:xfrm>
+          <a:prstGeom prst="rect">
+            <a:avLst/>
+          </a:prstGeom>
+          <a:noFill/>
+          <a:ln>
+            <a:noFill/>
+          </a:ln>
+        </p:spPr>
+        <p:txBody>
+          <a:bodyPr spcFirstLastPara="1" wrap="square" lIns="91425" tIns="91425" rIns="91425" bIns="91425" anchor="t" anchorCtr="0">
+            <a:noAutofit/>
+          </a:bodyPr>
+          <a:lstStyle>
+            <a:defPPr marR="0" lvl="0" algn="l" rtl="0">
+              <a:lnSpc>
+                <a:spcPct val="100000"/>
+              </a:lnSpc>
+              <a:spcBef>
+                <a:spcPts val="0"/>
+              </a:spcBef>
+              <a:spcAft>
+                <a:spcPts val="0"/>
+              </a:spcAft>
+            </a:defPPr>
+            <a:lvl1pPr marR="0" lvl="0" algn="l" rtl="0">
+              <a:lnSpc>
+                <a:spcPct val="100000"/>
+              </a:lnSpc>
+              <a:spcBef>
+                <a:spcPts val="0"/>
+              </a:spcBef>
+              <a:spcAft>
+                <a:spcPts val="0"/>
+              </a:spcAft>
+              <a:buClr>
+                <a:schemeClr val="dk1"/>
+              </a:buClr>
+              <a:buSzPts val="2800"/>
+              <a:buFont typeface="Arial" panose="020B0604020202020204"/>
+              <a:buNone/>
+              <a:defRPr sz="2800" b="0" i="0" u="none" strike="noStrike" cap="none">
+                <a:solidFill>
+                  <a:schemeClr val="dk1"/>
+                </a:solidFill>
+                <a:latin typeface="Arial" panose="020B0604020202020204"/>
+                <a:ea typeface="Arial" panose="020B0604020202020204"/>
+                <a:cs typeface="Arial" panose="020B0604020202020204"/>
+                <a:sym typeface="Arial" panose="020B0604020202020204"/>
+              </a:defRPr>
+            </a:lvl1pPr>
+            <a:lvl2pPr marR="0" lvl="1" algn="l" rtl="0">
+              <a:lnSpc>
+                <a:spcPct val="100000"/>
+              </a:lnSpc>
+              <a:spcBef>
+                <a:spcPts val="0"/>
+              </a:spcBef>
+              <a:spcAft>
+                <a:spcPts val="0"/>
+              </a:spcAft>
+              <a:buClr>
+                <a:schemeClr val="dk1"/>
+              </a:buClr>
+              <a:buSzPts val="2800"/>
+              <a:buFont typeface="Arial" panose="020B0604020202020204"/>
+              <a:buNone/>
+              <a:defRPr sz="2800" b="0" i="0" u="none" strike="noStrike" cap="none">
+                <a:solidFill>
+                  <a:schemeClr val="dk1"/>
+                </a:solidFill>
+                <a:latin typeface="Arial" panose="020B0604020202020204"/>
+                <a:ea typeface="Arial" panose="020B0604020202020204"/>
+                <a:cs typeface="Arial" panose="020B0604020202020204"/>
+                <a:sym typeface="Arial" panose="020B0604020202020204"/>
+              </a:defRPr>
+            </a:lvl2pPr>
+            <a:lvl3pPr marR="0" lvl="2" algn="l" rtl="0">
+              <a:lnSpc>
+                <a:spcPct val="100000"/>
+              </a:lnSpc>
+              <a:spcBef>
+                <a:spcPts val="0"/>
+              </a:spcBef>
+              <a:spcAft>
+                <a:spcPts val="0"/>
+              </a:spcAft>
+              <a:buClr>
+                <a:schemeClr val="dk1"/>
+              </a:buClr>
+              <a:buSzPts val="2800"/>
+              <a:buFont typeface="Arial" panose="020B0604020202020204"/>
+              <a:buNone/>
+              <a:defRPr sz="2800" b="0" i="0" u="none" strike="noStrike" cap="none">
+                <a:solidFill>
+                  <a:schemeClr val="dk1"/>
+                </a:solidFill>
+                <a:latin typeface="Arial" panose="020B0604020202020204"/>
+                <a:ea typeface="Arial" panose="020B0604020202020204"/>
+                <a:cs typeface="Arial" panose="020B0604020202020204"/>
+                <a:sym typeface="Arial" panose="020B0604020202020204"/>
+              </a:defRPr>
+            </a:lvl3pPr>
+            <a:lvl4pPr marR="0" lvl="3" algn="l" rtl="0">
+              <a:lnSpc>
+                <a:spcPct val="100000"/>
+              </a:lnSpc>
+              <a:spcBef>
+                <a:spcPts val="0"/>
+              </a:spcBef>
+              <a:spcAft>
+                <a:spcPts val="0"/>
+              </a:spcAft>
+              <a:buClr>
+                <a:schemeClr val="dk1"/>
+              </a:buClr>
+              <a:buSzPts val="2800"/>
+              <a:buFont typeface="Arial" panose="020B0604020202020204"/>
+              <a:buNone/>
+              <a:defRPr sz="2800" b="0" i="0" u="none" strike="noStrike" cap="none">
+                <a:solidFill>
+                  <a:schemeClr val="dk1"/>
+                </a:solidFill>
+                <a:latin typeface="Arial" panose="020B0604020202020204"/>
+                <a:ea typeface="Arial" panose="020B0604020202020204"/>
+                <a:cs typeface="Arial" panose="020B0604020202020204"/>
+                <a:sym typeface="Arial" panose="020B0604020202020204"/>
+              </a:defRPr>
+            </a:lvl4pPr>
+            <a:lvl5pPr marR="0" lvl="4" algn="l" rtl="0">
+              <a:lnSpc>
+                <a:spcPct val="100000"/>
+              </a:lnSpc>
+              <a:spcBef>
+                <a:spcPts val="0"/>
+              </a:spcBef>
+              <a:spcAft>
+                <a:spcPts val="0"/>
+              </a:spcAft>
+              <a:buClr>
+                <a:schemeClr val="dk1"/>
+              </a:buClr>
+              <a:buSzPts val="2800"/>
+              <a:buFont typeface="Arial" panose="020B0604020202020204"/>
+              <a:buNone/>
+              <a:defRPr sz="2800" b="0" i="0" u="none" strike="noStrike" cap="none">
+                <a:solidFill>
+                  <a:schemeClr val="dk1"/>
+                </a:solidFill>
+                <a:latin typeface="Arial" panose="020B0604020202020204"/>
+                <a:ea typeface="Arial" panose="020B0604020202020204"/>
+                <a:cs typeface="Arial" panose="020B0604020202020204"/>
+                <a:sym typeface="Arial" panose="020B0604020202020204"/>
+              </a:defRPr>
+            </a:lvl5pPr>
+            <a:lvl6pPr marR="0" lvl="5" algn="l" rtl="0">
+              <a:lnSpc>
+                <a:spcPct val="100000"/>
+              </a:lnSpc>
+              <a:spcBef>
+                <a:spcPts val="0"/>
+              </a:spcBef>
+              <a:spcAft>
+                <a:spcPts val="0"/>
+              </a:spcAft>
+              <a:buClr>
+                <a:schemeClr val="dk1"/>
+              </a:buClr>
+              <a:buSzPts val="2800"/>
+              <a:buFont typeface="Arial" panose="020B0604020202020204"/>
+              <a:buNone/>
+              <a:defRPr sz="2800" b="0" i="0" u="none" strike="noStrike" cap="none">
+                <a:solidFill>
+                  <a:schemeClr val="dk1"/>
+                </a:solidFill>
+                <a:latin typeface="Arial" panose="020B0604020202020204"/>
+                <a:ea typeface="Arial" panose="020B0604020202020204"/>
+                <a:cs typeface="Arial" panose="020B0604020202020204"/>
+                <a:sym typeface="Arial" panose="020B0604020202020204"/>
+              </a:defRPr>
+            </a:lvl6pPr>
+            <a:lvl7pPr marR="0" lvl="6" algn="l" rtl="0">
+              <a:lnSpc>
+                <a:spcPct val="100000"/>
+              </a:lnSpc>
+              <a:spcBef>
+                <a:spcPts val="0"/>
+              </a:spcBef>
+              <a:spcAft>
+                <a:spcPts val="0"/>
+              </a:spcAft>
+              <a:buClr>
+                <a:schemeClr val="dk1"/>
+              </a:buClr>
+              <a:buSzPts val="2800"/>
+              <a:buFont typeface="Arial" panose="020B0604020202020204"/>
+              <a:buNone/>
+              <a:defRPr sz="2800" b="0" i="0" u="none" strike="noStrike" cap="none">
+                <a:solidFill>
+                  <a:schemeClr val="dk1"/>
+                </a:solidFill>
+                <a:latin typeface="Arial" panose="020B0604020202020204"/>
+                <a:ea typeface="Arial" panose="020B0604020202020204"/>
+                <a:cs typeface="Arial" panose="020B0604020202020204"/>
+                <a:sym typeface="Arial" panose="020B0604020202020204"/>
+              </a:defRPr>
+            </a:lvl7pPr>
+            <a:lvl8pPr marR="0" lvl="7" algn="l" rtl="0">
+              <a:lnSpc>
+                <a:spcPct val="100000"/>
+              </a:lnSpc>
+              <a:spcBef>
+                <a:spcPts val="0"/>
+              </a:spcBef>
+              <a:spcAft>
+                <a:spcPts val="0"/>
+              </a:spcAft>
+              <a:buClr>
+                <a:schemeClr val="dk1"/>
+              </a:buClr>
+              <a:buSzPts val="2800"/>
+              <a:buFont typeface="Arial" panose="020B0604020202020204"/>
+              <a:buNone/>
+              <a:defRPr sz="2800" b="0" i="0" u="none" strike="noStrike" cap="none">
+                <a:solidFill>
+                  <a:schemeClr val="dk1"/>
+                </a:solidFill>
+                <a:latin typeface="Arial" panose="020B0604020202020204"/>
+                <a:ea typeface="Arial" panose="020B0604020202020204"/>
+                <a:cs typeface="Arial" panose="020B0604020202020204"/>
+                <a:sym typeface="Arial" panose="020B0604020202020204"/>
+              </a:defRPr>
+            </a:lvl8pPr>
+            <a:lvl9pPr marR="0" lvl="8" algn="l" rtl="0">
+              <a:lnSpc>
+                <a:spcPct val="100000"/>
+              </a:lnSpc>
+              <a:spcBef>
+                <a:spcPts val="0"/>
+              </a:spcBef>
+              <a:spcAft>
+                <a:spcPts val="0"/>
+              </a:spcAft>
+              <a:buClr>
+                <a:schemeClr val="dk1"/>
+              </a:buClr>
+              <a:buSzPts val="2800"/>
+              <a:buFont typeface="Arial" panose="020B0604020202020204"/>
+              <a:buNone/>
+              <a:defRPr sz="2800" b="0" i="0" u="none" strike="noStrike" cap="none">
+                <a:solidFill>
+                  <a:schemeClr val="dk1"/>
+                </a:solidFill>
+                <a:latin typeface="Arial" panose="020B0604020202020204"/>
+                <a:ea typeface="Arial" panose="020B0604020202020204"/>
+                <a:cs typeface="Arial" panose="020B0604020202020204"/>
+                <a:sym typeface="Arial" panose="020B0604020202020204"/>
+              </a:defRPr>
+            </a:lvl9pPr>
+          </a:lstStyle>
+          <a:p>
+            <a:pPr>
+              <a:lnSpc>
+                <a:spcPct val="115000"/>
+              </a:lnSpc>
+              <a:spcAft>
+                <a:spcPts val="1200"/>
+              </a:spcAft>
+            </a:pPr>
+            <a:r>
+              <a:rPr lang="en-US" b="1" dirty="0">
+                <a:solidFill>
+                  <a:srgbClr val="009242"/>
+                </a:solidFill>
+                <a:latin typeface="Times New Roman" panose="02020603050405020304" pitchFamily="18" charset="0"/>
+                <a:cs typeface="Times New Roman" panose="02020603050405020304" pitchFamily="18" charset="0"/>
+              </a:rPr>
+              <a:t>2.1 Method 1: Use Your Own </a:t>
+            </a:r>
+            <a:r>
+              <a:rPr lang="en-US" b="1" dirty="0" err="1">
+                <a:solidFill>
+                  <a:srgbClr val="009242"/>
+                </a:solidFill>
+                <a:latin typeface="Times New Roman" panose="02020603050405020304" pitchFamily="18" charset="0"/>
+                <a:cs typeface="Times New Roman" panose="02020603050405020304" pitchFamily="18" charset="0"/>
+              </a:rPr>
+              <a:t>EasyChair</a:t>
+            </a:r>
+            <a:r>
+              <a:rPr lang="en-US" b="1" dirty="0">
+                <a:solidFill>
+                  <a:srgbClr val="009242"/>
+                </a:solidFill>
+                <a:latin typeface="Times New Roman" panose="02020603050405020304" pitchFamily="18" charset="0"/>
+                <a:cs typeface="Times New Roman" panose="02020603050405020304" pitchFamily="18" charset="0"/>
+              </a:rPr>
+              <a:t> Account-5</a:t>
+            </a:r>
+          </a:p>
+        </p:txBody>
+      </p:sp>
     </p:spTree>
   </p:cSld>
   <p:clrMapOvr>
@@ -10479,7 +12702,7 @@
         </p:nvSpPr>
         <p:spPr>
           <a:xfrm>
-            <a:off x="311598" y="1010200"/>
+            <a:off x="311598" y="1061002"/>
             <a:ext cx="8264265" cy="639257"/>
           </a:xfrm>
           <a:prstGeom prst="rect">
@@ -10769,12 +12992,12 @@
             <a:spLocks noGrp="1"/>
           </p:cNvSpPr>
           <p:nvPr>
-            <p:ph type="body" idx="1"/>
+            <p:ph type="body" idx="4294967295"/>
           </p:nvPr>
         </p:nvSpPr>
         <p:spPr>
           <a:xfrm>
-            <a:off x="1067200" y="1072275"/>
+            <a:off x="1067200" y="1123077"/>
             <a:ext cx="7765200" cy="3930900"/>
           </a:xfrm>
           <a:prstGeom prst="rect">
@@ -10796,7 +13019,7 @@
               </a:spcAft>
               <a:buNone/>
             </a:pPr>
-            <a:endParaRPr sz="1100">
+            <a:endParaRPr sz="1100" dirty="0">
               <a:solidFill>
                 <a:schemeClr val="dk1"/>
               </a:solidFill>
@@ -10812,7 +13035,7 @@
               </a:spcAft>
               <a:buNone/>
             </a:pPr>
-            <a:endParaRPr sz="1100">
+            <a:endParaRPr sz="1100" dirty="0">
               <a:solidFill>
                 <a:schemeClr val="dk1"/>
               </a:solidFill>
@@ -10834,7 +13057,7 @@
         </p:blipFill>
         <p:spPr>
           <a:xfrm>
-            <a:off x="6552907" y="1059955"/>
+            <a:off x="6552907" y="1110757"/>
             <a:ext cx="333675" cy="346837"/>
           </a:xfrm>
           <a:prstGeom prst="rect">
@@ -10848,83 +13071,6 @@
           </a:ln>
         </p:spPr>
       </p:pic>
-      <p:sp>
-        <p:nvSpPr>
-          <p:cNvPr id="4" name="Google Shape;121;p23"/>
-          <p:cNvSpPr txBox="1">
-            <a:spLocks noGrp="1"/>
-          </p:cNvSpPr>
-          <p:nvPr>
-            <p:ph type="title"/>
-          </p:nvPr>
-        </p:nvSpPr>
-        <p:spPr>
-          <a:xfrm>
-            <a:off x="311700" y="294625"/>
-            <a:ext cx="8520600" cy="572700"/>
-          </a:xfrm>
-          <a:prstGeom prst="rect">
-            <a:avLst/>
-          </a:prstGeom>
-        </p:spPr>
-        <p:txBody>
-          <a:bodyPr spcFirstLastPara="1" wrap="square" lIns="91425" tIns="91425" rIns="91425" bIns="91425" anchor="t" anchorCtr="0">
-            <a:noAutofit/>
-          </a:bodyPr>
-          <a:lstStyle/>
-          <a:p>
-            <a:pPr marL="0" lvl="0" indent="0" algn="l" rtl="0">
-              <a:lnSpc>
-                <a:spcPct val="115000"/>
-              </a:lnSpc>
-              <a:spcBef>
-                <a:spcPts val="0"/>
-              </a:spcBef>
-              <a:spcAft>
-                <a:spcPts val="1200"/>
-              </a:spcAft>
-              <a:buNone/>
-            </a:pPr>
-            <a:r>
-              <a:rPr lang="en-US" b="1" dirty="0">
-                <a:solidFill>
-                  <a:srgbClr val="980000"/>
-                </a:solidFill>
-                <a:latin typeface="Times New Roman" panose="02020603050405020304" pitchFamily="18" charset="0"/>
-                <a:cs typeface="Times New Roman" panose="02020603050405020304" pitchFamily="18" charset="0"/>
-              </a:rPr>
-              <a:t>2.1 Method 1: Use Your Own </a:t>
-            </a:r>
-            <a:r>
-              <a:rPr lang="en-US" b="1" dirty="0" err="1">
-                <a:solidFill>
-                  <a:srgbClr val="980000"/>
-                </a:solidFill>
-                <a:latin typeface="Times New Roman" panose="02020603050405020304" pitchFamily="18" charset="0"/>
-                <a:cs typeface="Times New Roman" panose="02020603050405020304" pitchFamily="18" charset="0"/>
-              </a:rPr>
-              <a:t>EasyChair</a:t>
-            </a:r>
-            <a:r>
-              <a:rPr lang="en-US" b="1" dirty="0">
-                <a:solidFill>
-                  <a:srgbClr val="980000"/>
-                </a:solidFill>
-                <a:latin typeface="Times New Roman" panose="02020603050405020304" pitchFamily="18" charset="0"/>
-                <a:cs typeface="Times New Roman" panose="02020603050405020304" pitchFamily="18" charset="0"/>
-              </a:rPr>
-              <a:t> Account-6</a:t>
-            </a:r>
-            <a:endParaRPr b="1" dirty="0">
-              <a:solidFill>
-                <a:srgbClr val="FF0000"/>
-              </a:solidFill>
-              <a:latin typeface="Times New Roman" panose="02020603050405020304" pitchFamily="18" charset="0"/>
-              <a:cs typeface="Times New Roman" panose="02020603050405020304" pitchFamily="18" charset="0"/>
-            </a:endParaRPr>
-          </a:p>
-        </p:txBody>
-      </p:sp>
       <p:pic>
         <p:nvPicPr>
           <p:cNvPr id="10" name="图片 9"/>
@@ -10941,7 +13087,7 @@
         </p:blipFill>
         <p:spPr>
           <a:xfrm>
-            <a:off x="2112695" y="1502208"/>
+            <a:off x="2112695" y="1553010"/>
             <a:ext cx="4918609" cy="3552825"/>
           </a:xfrm>
           <a:prstGeom prst="rect">
@@ -10954,6 +13100,324 @@
           </a:ln>
         </p:spPr>
       </p:pic>
+      <p:sp>
+        <p:nvSpPr>
+          <p:cNvPr id="2" name="Google Shape;121;p23">
+            <a:extLst>
+              <a:ext uri="{FF2B5EF4-FFF2-40B4-BE49-F238E27FC236}">
+                <a16:creationId xmlns:a16="http://schemas.microsoft.com/office/drawing/2014/main" id="{F130E0B4-87B9-386A-D34A-293A64F5F96F}"/>
+              </a:ext>
+            </a:extLst>
+          </p:cNvPr>
+          <p:cNvSpPr txBox="1"/>
+          <p:nvPr/>
+        </p:nvSpPr>
+        <p:spPr>
+          <a:xfrm>
+            <a:off x="557233" y="76635"/>
+            <a:ext cx="6241500" cy="654938"/>
+          </a:xfrm>
+          <a:prstGeom prst="rect">
+            <a:avLst/>
+          </a:prstGeom>
+          <a:noFill/>
+          <a:ln>
+            <a:noFill/>
+          </a:ln>
+        </p:spPr>
+        <p:txBody>
+          <a:bodyPr spcFirstLastPara="1" wrap="square" lIns="91425" tIns="91425" rIns="91425" bIns="91425" anchor="t" anchorCtr="0">
+            <a:noAutofit/>
+          </a:bodyPr>
+          <a:lstStyle>
+            <a:defPPr marR="0" lvl="0" algn="l" rtl="0">
+              <a:lnSpc>
+                <a:spcPct val="100000"/>
+              </a:lnSpc>
+              <a:spcBef>
+                <a:spcPts val="0"/>
+              </a:spcBef>
+              <a:spcAft>
+                <a:spcPts val="0"/>
+              </a:spcAft>
+            </a:defPPr>
+            <a:lvl1pPr marR="0" lvl="0" algn="l" rtl="0">
+              <a:lnSpc>
+                <a:spcPct val="100000"/>
+              </a:lnSpc>
+              <a:spcBef>
+                <a:spcPts val="0"/>
+              </a:spcBef>
+              <a:spcAft>
+                <a:spcPts val="0"/>
+              </a:spcAft>
+              <a:buClr>
+                <a:schemeClr val="dk1"/>
+              </a:buClr>
+              <a:buSzPts val="2800"/>
+              <a:buFont typeface="Arial" panose="020B0604020202020204"/>
+              <a:buNone/>
+              <a:defRPr sz="2800" b="0" i="0" u="none" strike="noStrike" cap="none">
+                <a:solidFill>
+                  <a:schemeClr val="dk1"/>
+                </a:solidFill>
+                <a:latin typeface="Arial" panose="020B0604020202020204"/>
+                <a:ea typeface="Arial" panose="020B0604020202020204"/>
+                <a:cs typeface="Arial" panose="020B0604020202020204"/>
+                <a:sym typeface="Arial" panose="020B0604020202020204"/>
+              </a:defRPr>
+            </a:lvl1pPr>
+            <a:lvl2pPr marR="0" lvl="1" algn="l" rtl="0">
+              <a:lnSpc>
+                <a:spcPct val="100000"/>
+              </a:lnSpc>
+              <a:spcBef>
+                <a:spcPts val="0"/>
+              </a:spcBef>
+              <a:spcAft>
+                <a:spcPts val="0"/>
+              </a:spcAft>
+              <a:buClr>
+                <a:schemeClr val="dk1"/>
+              </a:buClr>
+              <a:buSzPts val="2800"/>
+              <a:buFont typeface="Arial" panose="020B0604020202020204"/>
+              <a:buNone/>
+              <a:defRPr sz="2800" b="0" i="0" u="none" strike="noStrike" cap="none">
+                <a:solidFill>
+                  <a:schemeClr val="dk1"/>
+                </a:solidFill>
+                <a:latin typeface="Arial" panose="020B0604020202020204"/>
+                <a:ea typeface="Arial" panose="020B0604020202020204"/>
+                <a:cs typeface="Arial" panose="020B0604020202020204"/>
+                <a:sym typeface="Arial" panose="020B0604020202020204"/>
+              </a:defRPr>
+            </a:lvl2pPr>
+            <a:lvl3pPr marR="0" lvl="2" algn="l" rtl="0">
+              <a:lnSpc>
+                <a:spcPct val="100000"/>
+              </a:lnSpc>
+              <a:spcBef>
+                <a:spcPts val="0"/>
+              </a:spcBef>
+              <a:spcAft>
+                <a:spcPts val="0"/>
+              </a:spcAft>
+              <a:buClr>
+                <a:schemeClr val="dk1"/>
+              </a:buClr>
+              <a:buSzPts val="2800"/>
+              <a:buFont typeface="Arial" panose="020B0604020202020204"/>
+              <a:buNone/>
+              <a:defRPr sz="2800" b="0" i="0" u="none" strike="noStrike" cap="none">
+                <a:solidFill>
+                  <a:schemeClr val="dk1"/>
+                </a:solidFill>
+                <a:latin typeface="Arial" panose="020B0604020202020204"/>
+                <a:ea typeface="Arial" panose="020B0604020202020204"/>
+                <a:cs typeface="Arial" panose="020B0604020202020204"/>
+                <a:sym typeface="Arial" panose="020B0604020202020204"/>
+              </a:defRPr>
+            </a:lvl3pPr>
+            <a:lvl4pPr marR="0" lvl="3" algn="l" rtl="0">
+              <a:lnSpc>
+                <a:spcPct val="100000"/>
+              </a:lnSpc>
+              <a:spcBef>
+                <a:spcPts val="0"/>
+              </a:spcBef>
+              <a:spcAft>
+                <a:spcPts val="0"/>
+              </a:spcAft>
+              <a:buClr>
+                <a:schemeClr val="dk1"/>
+              </a:buClr>
+              <a:buSzPts val="2800"/>
+              <a:buFont typeface="Arial" panose="020B0604020202020204"/>
+              <a:buNone/>
+              <a:defRPr sz="2800" b="0" i="0" u="none" strike="noStrike" cap="none">
+                <a:solidFill>
+                  <a:schemeClr val="dk1"/>
+                </a:solidFill>
+                <a:latin typeface="Arial" panose="020B0604020202020204"/>
+                <a:ea typeface="Arial" panose="020B0604020202020204"/>
+                <a:cs typeface="Arial" panose="020B0604020202020204"/>
+                <a:sym typeface="Arial" panose="020B0604020202020204"/>
+              </a:defRPr>
+            </a:lvl4pPr>
+            <a:lvl5pPr marR="0" lvl="4" algn="l" rtl="0">
+              <a:lnSpc>
+                <a:spcPct val="100000"/>
+              </a:lnSpc>
+              <a:spcBef>
+                <a:spcPts val="0"/>
+              </a:spcBef>
+              <a:spcAft>
+                <a:spcPts val="0"/>
+              </a:spcAft>
+              <a:buClr>
+                <a:schemeClr val="dk1"/>
+              </a:buClr>
+              <a:buSzPts val="2800"/>
+              <a:buFont typeface="Arial" panose="020B0604020202020204"/>
+              <a:buNone/>
+              <a:defRPr sz="2800" b="0" i="0" u="none" strike="noStrike" cap="none">
+                <a:solidFill>
+                  <a:schemeClr val="dk1"/>
+                </a:solidFill>
+                <a:latin typeface="Arial" panose="020B0604020202020204"/>
+                <a:ea typeface="Arial" panose="020B0604020202020204"/>
+                <a:cs typeface="Arial" panose="020B0604020202020204"/>
+                <a:sym typeface="Arial" panose="020B0604020202020204"/>
+              </a:defRPr>
+            </a:lvl5pPr>
+            <a:lvl6pPr marR="0" lvl="5" algn="l" rtl="0">
+              <a:lnSpc>
+                <a:spcPct val="100000"/>
+              </a:lnSpc>
+              <a:spcBef>
+                <a:spcPts val="0"/>
+              </a:spcBef>
+              <a:spcAft>
+                <a:spcPts val="0"/>
+              </a:spcAft>
+              <a:buClr>
+                <a:schemeClr val="dk1"/>
+              </a:buClr>
+              <a:buSzPts val="2800"/>
+              <a:buFont typeface="Arial" panose="020B0604020202020204"/>
+              <a:buNone/>
+              <a:defRPr sz="2800" b="0" i="0" u="none" strike="noStrike" cap="none">
+                <a:solidFill>
+                  <a:schemeClr val="dk1"/>
+                </a:solidFill>
+                <a:latin typeface="Arial" panose="020B0604020202020204"/>
+                <a:ea typeface="Arial" panose="020B0604020202020204"/>
+                <a:cs typeface="Arial" panose="020B0604020202020204"/>
+                <a:sym typeface="Arial" panose="020B0604020202020204"/>
+              </a:defRPr>
+            </a:lvl6pPr>
+            <a:lvl7pPr marR="0" lvl="6" algn="l" rtl="0">
+              <a:lnSpc>
+                <a:spcPct val="100000"/>
+              </a:lnSpc>
+              <a:spcBef>
+                <a:spcPts val="0"/>
+              </a:spcBef>
+              <a:spcAft>
+                <a:spcPts val="0"/>
+              </a:spcAft>
+              <a:buClr>
+                <a:schemeClr val="dk1"/>
+              </a:buClr>
+              <a:buSzPts val="2800"/>
+              <a:buFont typeface="Arial" panose="020B0604020202020204"/>
+              <a:buNone/>
+              <a:defRPr sz="2800" b="0" i="0" u="none" strike="noStrike" cap="none">
+                <a:solidFill>
+                  <a:schemeClr val="dk1"/>
+                </a:solidFill>
+                <a:latin typeface="Arial" panose="020B0604020202020204"/>
+                <a:ea typeface="Arial" panose="020B0604020202020204"/>
+                <a:cs typeface="Arial" panose="020B0604020202020204"/>
+                <a:sym typeface="Arial" panose="020B0604020202020204"/>
+              </a:defRPr>
+            </a:lvl7pPr>
+            <a:lvl8pPr marR="0" lvl="7" algn="l" rtl="0">
+              <a:lnSpc>
+                <a:spcPct val="100000"/>
+              </a:lnSpc>
+              <a:spcBef>
+                <a:spcPts val="0"/>
+              </a:spcBef>
+              <a:spcAft>
+                <a:spcPts val="0"/>
+              </a:spcAft>
+              <a:buClr>
+                <a:schemeClr val="dk1"/>
+              </a:buClr>
+              <a:buSzPts val="2800"/>
+              <a:buFont typeface="Arial" panose="020B0604020202020204"/>
+              <a:buNone/>
+              <a:defRPr sz="2800" b="0" i="0" u="none" strike="noStrike" cap="none">
+                <a:solidFill>
+                  <a:schemeClr val="dk1"/>
+                </a:solidFill>
+                <a:latin typeface="Arial" panose="020B0604020202020204"/>
+                <a:ea typeface="Arial" panose="020B0604020202020204"/>
+                <a:cs typeface="Arial" panose="020B0604020202020204"/>
+                <a:sym typeface="Arial" panose="020B0604020202020204"/>
+              </a:defRPr>
+            </a:lvl8pPr>
+            <a:lvl9pPr marR="0" lvl="8" algn="l" rtl="0">
+              <a:lnSpc>
+                <a:spcPct val="100000"/>
+              </a:lnSpc>
+              <a:spcBef>
+                <a:spcPts val="0"/>
+              </a:spcBef>
+              <a:spcAft>
+                <a:spcPts val="0"/>
+              </a:spcAft>
+              <a:buClr>
+                <a:schemeClr val="dk1"/>
+              </a:buClr>
+              <a:buSzPts val="2800"/>
+              <a:buFont typeface="Arial" panose="020B0604020202020204"/>
+              <a:buNone/>
+              <a:defRPr sz="2800" b="0" i="0" u="none" strike="noStrike" cap="none">
+                <a:solidFill>
+                  <a:schemeClr val="dk1"/>
+                </a:solidFill>
+                <a:latin typeface="Arial" panose="020B0604020202020204"/>
+                <a:ea typeface="Arial" panose="020B0604020202020204"/>
+                <a:cs typeface="Arial" panose="020B0604020202020204"/>
+                <a:sym typeface="Arial" panose="020B0604020202020204"/>
+              </a:defRPr>
+            </a:lvl9pPr>
+          </a:lstStyle>
+          <a:p>
+            <a:pPr>
+              <a:lnSpc>
+                <a:spcPct val="115000"/>
+              </a:lnSpc>
+              <a:spcAft>
+                <a:spcPts val="1200"/>
+              </a:spcAft>
+            </a:pPr>
+            <a:r>
+              <a:rPr lang="en-US" b="1" dirty="0">
+                <a:solidFill>
+                  <a:srgbClr val="009242"/>
+                </a:solidFill>
+                <a:latin typeface="Times New Roman" panose="02020603050405020304" pitchFamily="18" charset="0"/>
+                <a:cs typeface="Times New Roman" panose="02020603050405020304" pitchFamily="18" charset="0"/>
+              </a:rPr>
+              <a:t>2.1 Method 1: Use Your Own </a:t>
+            </a:r>
+            <a:r>
+              <a:rPr lang="en-US" b="1" dirty="0" err="1">
+                <a:solidFill>
+                  <a:srgbClr val="009242"/>
+                </a:solidFill>
+                <a:latin typeface="Times New Roman" panose="02020603050405020304" pitchFamily="18" charset="0"/>
+                <a:cs typeface="Times New Roman" panose="02020603050405020304" pitchFamily="18" charset="0"/>
+              </a:rPr>
+              <a:t>EasyChair</a:t>
+            </a:r>
+            <a:r>
+              <a:rPr lang="en-US" b="1" dirty="0">
+                <a:solidFill>
+                  <a:srgbClr val="009242"/>
+                </a:solidFill>
+                <a:latin typeface="Times New Roman" panose="02020603050405020304" pitchFamily="18" charset="0"/>
+                <a:cs typeface="Times New Roman" panose="02020603050405020304" pitchFamily="18" charset="0"/>
+              </a:rPr>
+              <a:t> Account-6</a:t>
+            </a:r>
+          </a:p>
+        </p:txBody>
+      </p:sp>
     </p:spTree>
   </p:cSld>
   <p:clrMapOvr>
@@ -11046,7 +13510,7 @@
         </p:nvSpPr>
         <p:spPr>
           <a:xfrm>
-            <a:off x="311598" y="1010200"/>
+            <a:off x="311598" y="1137202"/>
             <a:ext cx="8264265" cy="639257"/>
           </a:xfrm>
           <a:prstGeom prst="rect">
@@ -11371,45 +13835,293 @@
       </p:sp>
       <p:sp>
         <p:nvSpPr>
-          <p:cNvPr id="15" name="Google Shape;121;p23"/>
-          <p:cNvSpPr txBox="1">
-            <a:spLocks noGrp="1"/>
-          </p:cNvSpPr>
-          <p:nvPr>
-            <p:ph type="title"/>
-          </p:nvPr>
+          <p:cNvPr id="2" name="Google Shape;121;p23">
+            <a:extLst>
+              <a:ext uri="{FF2B5EF4-FFF2-40B4-BE49-F238E27FC236}">
+                <a16:creationId xmlns:a16="http://schemas.microsoft.com/office/drawing/2014/main" id="{50C48FB2-2BCF-0CE5-C0F6-5F96B43D9ADD}"/>
+              </a:ext>
+            </a:extLst>
+          </p:cNvPr>
+          <p:cNvSpPr txBox="1"/>
+          <p:nvPr/>
         </p:nvSpPr>
         <p:spPr>
           <a:xfrm>
-            <a:off x="311700" y="294625"/>
-            <a:ext cx="8520600" cy="572700"/>
+            <a:off x="557233" y="76635"/>
+            <a:ext cx="6241500" cy="654938"/>
           </a:xfrm>
           <a:prstGeom prst="rect">
             <a:avLst/>
           </a:prstGeom>
+          <a:noFill/>
+          <a:ln>
+            <a:noFill/>
+          </a:ln>
         </p:spPr>
         <p:txBody>
           <a:bodyPr spcFirstLastPara="1" wrap="square" lIns="91425" tIns="91425" rIns="91425" bIns="91425" anchor="t" anchorCtr="0">
             <a:noAutofit/>
           </a:bodyPr>
-          <a:lstStyle/>
+          <a:lstStyle>
+            <a:defPPr marR="0" lvl="0" algn="l" rtl="0">
+              <a:lnSpc>
+                <a:spcPct val="100000"/>
+              </a:lnSpc>
+              <a:spcBef>
+                <a:spcPts val="0"/>
+              </a:spcBef>
+              <a:spcAft>
+                <a:spcPts val="0"/>
+              </a:spcAft>
+            </a:defPPr>
+            <a:lvl1pPr marR="0" lvl="0" algn="l" rtl="0">
+              <a:lnSpc>
+                <a:spcPct val="100000"/>
+              </a:lnSpc>
+              <a:spcBef>
+                <a:spcPts val="0"/>
+              </a:spcBef>
+              <a:spcAft>
+                <a:spcPts val="0"/>
+              </a:spcAft>
+              <a:buClr>
+                <a:schemeClr val="dk1"/>
+              </a:buClr>
+              <a:buSzPts val="2800"/>
+              <a:buFont typeface="Arial" panose="020B0604020202020204"/>
+              <a:buNone/>
+              <a:defRPr sz="2800" b="0" i="0" u="none" strike="noStrike" cap="none">
+                <a:solidFill>
+                  <a:schemeClr val="dk1"/>
+                </a:solidFill>
+                <a:latin typeface="Arial" panose="020B0604020202020204"/>
+                <a:ea typeface="Arial" panose="020B0604020202020204"/>
+                <a:cs typeface="Arial" panose="020B0604020202020204"/>
+                <a:sym typeface="Arial" panose="020B0604020202020204"/>
+              </a:defRPr>
+            </a:lvl1pPr>
+            <a:lvl2pPr marR="0" lvl="1" algn="l" rtl="0">
+              <a:lnSpc>
+                <a:spcPct val="100000"/>
+              </a:lnSpc>
+              <a:spcBef>
+                <a:spcPts val="0"/>
+              </a:spcBef>
+              <a:spcAft>
+                <a:spcPts val="0"/>
+              </a:spcAft>
+              <a:buClr>
+                <a:schemeClr val="dk1"/>
+              </a:buClr>
+              <a:buSzPts val="2800"/>
+              <a:buFont typeface="Arial" panose="020B0604020202020204"/>
+              <a:buNone/>
+              <a:defRPr sz="2800" b="0" i="0" u="none" strike="noStrike" cap="none">
+                <a:solidFill>
+                  <a:schemeClr val="dk1"/>
+                </a:solidFill>
+                <a:latin typeface="Arial" panose="020B0604020202020204"/>
+                <a:ea typeface="Arial" panose="020B0604020202020204"/>
+                <a:cs typeface="Arial" panose="020B0604020202020204"/>
+                <a:sym typeface="Arial" panose="020B0604020202020204"/>
+              </a:defRPr>
+            </a:lvl2pPr>
+            <a:lvl3pPr marR="0" lvl="2" algn="l" rtl="0">
+              <a:lnSpc>
+                <a:spcPct val="100000"/>
+              </a:lnSpc>
+              <a:spcBef>
+                <a:spcPts val="0"/>
+              </a:spcBef>
+              <a:spcAft>
+                <a:spcPts val="0"/>
+              </a:spcAft>
+              <a:buClr>
+                <a:schemeClr val="dk1"/>
+              </a:buClr>
+              <a:buSzPts val="2800"/>
+              <a:buFont typeface="Arial" panose="020B0604020202020204"/>
+              <a:buNone/>
+              <a:defRPr sz="2800" b="0" i="0" u="none" strike="noStrike" cap="none">
+                <a:solidFill>
+                  <a:schemeClr val="dk1"/>
+                </a:solidFill>
+                <a:latin typeface="Arial" panose="020B0604020202020204"/>
+                <a:ea typeface="Arial" panose="020B0604020202020204"/>
+                <a:cs typeface="Arial" panose="020B0604020202020204"/>
+                <a:sym typeface="Arial" panose="020B0604020202020204"/>
+              </a:defRPr>
+            </a:lvl3pPr>
+            <a:lvl4pPr marR="0" lvl="3" algn="l" rtl="0">
+              <a:lnSpc>
+                <a:spcPct val="100000"/>
+              </a:lnSpc>
+              <a:spcBef>
+                <a:spcPts val="0"/>
+              </a:spcBef>
+              <a:spcAft>
+                <a:spcPts val="0"/>
+              </a:spcAft>
+              <a:buClr>
+                <a:schemeClr val="dk1"/>
+              </a:buClr>
+              <a:buSzPts val="2800"/>
+              <a:buFont typeface="Arial" panose="020B0604020202020204"/>
+              <a:buNone/>
+              <a:defRPr sz="2800" b="0" i="0" u="none" strike="noStrike" cap="none">
+                <a:solidFill>
+                  <a:schemeClr val="dk1"/>
+                </a:solidFill>
+                <a:latin typeface="Arial" panose="020B0604020202020204"/>
+                <a:ea typeface="Arial" panose="020B0604020202020204"/>
+                <a:cs typeface="Arial" panose="020B0604020202020204"/>
+                <a:sym typeface="Arial" panose="020B0604020202020204"/>
+              </a:defRPr>
+            </a:lvl4pPr>
+            <a:lvl5pPr marR="0" lvl="4" algn="l" rtl="0">
+              <a:lnSpc>
+                <a:spcPct val="100000"/>
+              </a:lnSpc>
+              <a:spcBef>
+                <a:spcPts val="0"/>
+              </a:spcBef>
+              <a:spcAft>
+                <a:spcPts val="0"/>
+              </a:spcAft>
+              <a:buClr>
+                <a:schemeClr val="dk1"/>
+              </a:buClr>
+              <a:buSzPts val="2800"/>
+              <a:buFont typeface="Arial" panose="020B0604020202020204"/>
+              <a:buNone/>
+              <a:defRPr sz="2800" b="0" i="0" u="none" strike="noStrike" cap="none">
+                <a:solidFill>
+                  <a:schemeClr val="dk1"/>
+                </a:solidFill>
+                <a:latin typeface="Arial" panose="020B0604020202020204"/>
+                <a:ea typeface="Arial" panose="020B0604020202020204"/>
+                <a:cs typeface="Arial" panose="020B0604020202020204"/>
+                <a:sym typeface="Arial" panose="020B0604020202020204"/>
+              </a:defRPr>
+            </a:lvl5pPr>
+            <a:lvl6pPr marR="0" lvl="5" algn="l" rtl="0">
+              <a:lnSpc>
+                <a:spcPct val="100000"/>
+              </a:lnSpc>
+              <a:spcBef>
+                <a:spcPts val="0"/>
+              </a:spcBef>
+              <a:spcAft>
+                <a:spcPts val="0"/>
+              </a:spcAft>
+              <a:buClr>
+                <a:schemeClr val="dk1"/>
+              </a:buClr>
+              <a:buSzPts val="2800"/>
+              <a:buFont typeface="Arial" panose="020B0604020202020204"/>
+              <a:buNone/>
+              <a:defRPr sz="2800" b="0" i="0" u="none" strike="noStrike" cap="none">
+                <a:solidFill>
+                  <a:schemeClr val="dk1"/>
+                </a:solidFill>
+                <a:latin typeface="Arial" panose="020B0604020202020204"/>
+                <a:ea typeface="Arial" panose="020B0604020202020204"/>
+                <a:cs typeface="Arial" panose="020B0604020202020204"/>
+                <a:sym typeface="Arial" panose="020B0604020202020204"/>
+              </a:defRPr>
+            </a:lvl6pPr>
+            <a:lvl7pPr marR="0" lvl="6" algn="l" rtl="0">
+              <a:lnSpc>
+                <a:spcPct val="100000"/>
+              </a:lnSpc>
+              <a:spcBef>
+                <a:spcPts val="0"/>
+              </a:spcBef>
+              <a:spcAft>
+                <a:spcPts val="0"/>
+              </a:spcAft>
+              <a:buClr>
+                <a:schemeClr val="dk1"/>
+              </a:buClr>
+              <a:buSzPts val="2800"/>
+              <a:buFont typeface="Arial" panose="020B0604020202020204"/>
+              <a:buNone/>
+              <a:defRPr sz="2800" b="0" i="0" u="none" strike="noStrike" cap="none">
+                <a:solidFill>
+                  <a:schemeClr val="dk1"/>
+                </a:solidFill>
+                <a:latin typeface="Arial" panose="020B0604020202020204"/>
+                <a:ea typeface="Arial" panose="020B0604020202020204"/>
+                <a:cs typeface="Arial" panose="020B0604020202020204"/>
+                <a:sym typeface="Arial" panose="020B0604020202020204"/>
+              </a:defRPr>
+            </a:lvl7pPr>
+            <a:lvl8pPr marR="0" lvl="7" algn="l" rtl="0">
+              <a:lnSpc>
+                <a:spcPct val="100000"/>
+              </a:lnSpc>
+              <a:spcBef>
+                <a:spcPts val="0"/>
+              </a:spcBef>
+              <a:spcAft>
+                <a:spcPts val="0"/>
+              </a:spcAft>
+              <a:buClr>
+                <a:schemeClr val="dk1"/>
+              </a:buClr>
+              <a:buSzPts val="2800"/>
+              <a:buFont typeface="Arial" panose="020B0604020202020204"/>
+              <a:buNone/>
+              <a:defRPr sz="2800" b="0" i="0" u="none" strike="noStrike" cap="none">
+                <a:solidFill>
+                  <a:schemeClr val="dk1"/>
+                </a:solidFill>
+                <a:latin typeface="Arial" panose="020B0604020202020204"/>
+                <a:ea typeface="Arial" panose="020B0604020202020204"/>
+                <a:cs typeface="Arial" panose="020B0604020202020204"/>
+                <a:sym typeface="Arial" panose="020B0604020202020204"/>
+              </a:defRPr>
+            </a:lvl8pPr>
+            <a:lvl9pPr marR="0" lvl="8" algn="l" rtl="0">
+              <a:lnSpc>
+                <a:spcPct val="100000"/>
+              </a:lnSpc>
+              <a:spcBef>
+                <a:spcPts val="0"/>
+              </a:spcBef>
+              <a:spcAft>
+                <a:spcPts val="0"/>
+              </a:spcAft>
+              <a:buClr>
+                <a:schemeClr val="dk1"/>
+              </a:buClr>
+              <a:buSzPts val="2800"/>
+              <a:buFont typeface="Arial" panose="020B0604020202020204"/>
+              <a:buNone/>
+              <a:defRPr sz="2800" b="0" i="0" u="none" strike="noStrike" cap="none">
+                <a:solidFill>
+                  <a:schemeClr val="dk1"/>
+                </a:solidFill>
+                <a:latin typeface="Arial" panose="020B0604020202020204"/>
+                <a:ea typeface="Arial" panose="020B0604020202020204"/>
+                <a:cs typeface="Arial" panose="020B0604020202020204"/>
+                <a:sym typeface="Arial" panose="020B0604020202020204"/>
+              </a:defRPr>
+            </a:lvl9pPr>
+          </a:lstStyle>
           <a:p>
-            <a:pPr marL="0" lvl="0" indent="0" algn="l" rtl="0">
+            <a:pPr>
               <a:lnSpc>
                 <a:spcPct val="115000"/>
               </a:lnSpc>
-              <a:spcBef>
-                <a:spcPts val="0"/>
-              </a:spcBef>
               <a:spcAft>
                 <a:spcPts val="1200"/>
               </a:spcAft>
-              <a:buNone/>
             </a:pPr>
             <a:r>
               <a:rPr lang="en-US" b="1" dirty="0">
                 <a:solidFill>
-                  <a:srgbClr val="980000"/>
+                  <a:srgbClr val="009242"/>
                 </a:solidFill>
                 <a:latin typeface="Times New Roman" panose="02020603050405020304" pitchFamily="18" charset="0"/>
                 <a:cs typeface="Times New Roman" panose="02020603050405020304" pitchFamily="18" charset="0"/>
@@ -11419,7 +14131,7 @@
             <a:r>
               <a:rPr lang="en-US" b="1" dirty="0" err="1">
                 <a:solidFill>
-                  <a:srgbClr val="980000"/>
+                  <a:srgbClr val="009242"/>
                 </a:solidFill>
                 <a:latin typeface="Times New Roman" panose="02020603050405020304" pitchFamily="18" charset="0"/>
                 <a:cs typeface="Times New Roman" panose="02020603050405020304" pitchFamily="18" charset="0"/>
@@ -11429,20 +14141,13 @@
             <a:r>
               <a:rPr lang="en-US" b="1" dirty="0">
                 <a:solidFill>
-                  <a:srgbClr val="980000"/>
+                  <a:srgbClr val="009242"/>
                 </a:solidFill>
                 <a:latin typeface="Times New Roman" panose="02020603050405020304" pitchFamily="18" charset="0"/>
                 <a:cs typeface="Times New Roman" panose="02020603050405020304" pitchFamily="18" charset="0"/>
               </a:rPr>
               <a:t> Account-7</a:t>
             </a:r>
-            <a:endParaRPr b="1" dirty="0">
-              <a:solidFill>
-                <a:srgbClr val="FF0000"/>
-              </a:solidFill>
-              <a:latin typeface="Times New Roman" panose="02020603050405020304" pitchFamily="18" charset="0"/>
-              <a:cs typeface="Times New Roman" panose="02020603050405020304" pitchFamily="18" charset="0"/>
-            </a:endParaRPr>
           </a:p>
         </p:txBody>
       </p:sp>
@@ -11479,8 +14184,8 @@
         </p:nvSpPr>
         <p:spPr>
           <a:xfrm>
-            <a:off x="311599" y="1010199"/>
-            <a:ext cx="4798702" cy="3867523"/>
+            <a:off x="311599" y="1137950"/>
+            <a:ext cx="4798702" cy="3739772"/>
           </a:xfrm>
           <a:prstGeom prst="rect">
             <a:avLst/>
@@ -11952,8 +14657,8 @@
         </p:blipFill>
         <p:spPr>
           <a:xfrm>
-            <a:off x="5184191" y="958273"/>
-            <a:ext cx="3573016" cy="3971373"/>
+            <a:off x="5422926" y="1199777"/>
+            <a:ext cx="3409475" cy="3867523"/>
           </a:xfrm>
           <a:prstGeom prst="rect">
             <a:avLst/>
@@ -11977,13 +14682,13 @@
             <a:spLocks noGrp="1"/>
           </p:cNvSpPr>
           <p:nvPr>
-            <p:ph type="title"/>
+            <p:ph type="title" idx="4294967295"/>
           </p:nvPr>
         </p:nvSpPr>
         <p:spPr>
           <a:xfrm>
-            <a:off x="311700" y="294625"/>
-            <a:ext cx="8520600" cy="572700"/>
+            <a:off x="553111" y="76200"/>
+            <a:ext cx="5363744" cy="638725"/>
           </a:xfrm>
           <a:prstGeom prst="rect">
             <a:avLst/>
@@ -12010,7 +14715,7 @@
             <a:r>
               <a:rPr lang="en-US" b="1" dirty="0">
                 <a:solidFill>
-                  <a:srgbClr val="980000"/>
+                  <a:srgbClr val="009242"/>
                 </a:solidFill>
                 <a:latin typeface="Times New Roman" panose="02020603050405020304" pitchFamily="18" charset="0"/>
                 <a:cs typeface="Times New Roman" panose="02020603050405020304" pitchFamily="18" charset="0"/>
@@ -12020,7 +14725,7 @@
             <a:r>
               <a:rPr lang="en-US" b="1" dirty="0" err="1">
                 <a:solidFill>
-                  <a:srgbClr val="980000"/>
+                  <a:srgbClr val="009242"/>
                 </a:solidFill>
                 <a:latin typeface="Times New Roman" panose="02020603050405020304" pitchFamily="18" charset="0"/>
                 <a:cs typeface="Times New Roman" panose="02020603050405020304" pitchFamily="18" charset="0"/>
@@ -12030,7 +14735,7 @@
             <a:r>
               <a:rPr lang="en-US" b="1" dirty="0">
                 <a:solidFill>
-                  <a:srgbClr val="980000"/>
+                  <a:srgbClr val="009242"/>
                 </a:solidFill>
                 <a:latin typeface="Times New Roman" panose="02020603050405020304" pitchFamily="18" charset="0"/>
                 <a:cs typeface="Times New Roman" panose="02020603050405020304" pitchFamily="18" charset="0"/>
@@ -12039,7 +14744,7 @@
             </a:r>
             <a:endParaRPr b="1" dirty="0">
               <a:solidFill>
-                <a:srgbClr val="FF0000"/>
+                <a:srgbClr val="009242"/>
               </a:solidFill>
               <a:latin typeface="Times New Roman" panose="02020603050405020304" pitchFamily="18" charset="0"/>
               <a:cs typeface="Times New Roman" panose="02020603050405020304" pitchFamily="18" charset="0"/>
@@ -12079,7 +14784,7 @@
             <a:spLocks noGrp="1"/>
           </p:cNvSpPr>
           <p:nvPr>
-            <p:ph type="title"/>
+            <p:ph type="title" idx="4294967295"/>
           </p:nvPr>
         </p:nvSpPr>
         <p:spPr>
@@ -12109,7 +14814,7 @@
             <a:r>
               <a:rPr lang="en-GB" b="1" dirty="0">
                 <a:solidFill>
-                  <a:srgbClr val="980000"/>
+                  <a:srgbClr val="009242"/>
                 </a:solidFill>
                 <a:latin typeface="Times New Roman" panose="02020603050405020304" pitchFamily="18" charset="0"/>
                 <a:cs typeface="Times New Roman" panose="02020603050405020304" pitchFamily="18" charset="0"/>
@@ -12118,7 +14823,7 @@
             </a:r>
             <a:endParaRPr b="1" dirty="0">
               <a:solidFill>
-                <a:srgbClr val="980000"/>
+                <a:srgbClr val="009242"/>
               </a:solidFill>
               <a:latin typeface="Times New Roman" panose="02020603050405020304" pitchFamily="18" charset="0"/>
               <a:cs typeface="Times New Roman" panose="02020603050405020304" pitchFamily="18" charset="0"/>
@@ -12133,13 +14838,13 @@
             <a:spLocks noGrp="1"/>
           </p:cNvSpPr>
           <p:nvPr>
-            <p:ph type="body" idx="1"/>
+            <p:ph type="body" idx="4294967295"/>
           </p:nvPr>
         </p:nvSpPr>
         <p:spPr>
           <a:xfrm>
-            <a:off x="230909" y="1087775"/>
-            <a:ext cx="8839199" cy="3416400"/>
+            <a:off x="304800" y="1087438"/>
+            <a:ext cx="8839200" cy="3416300"/>
           </a:xfrm>
           <a:prstGeom prst="rect">
             <a:avLst/>
@@ -12212,25 +14917,7 @@
                 <a:sym typeface="+mn-ea"/>
                 <a:hlinkClick r:id="rId3" action="ppaction://hlinksldjump"/>
               </a:rPr>
-              <a:t>[</a:t>
-            </a:r>
-            <a:r>
-              <a:rPr lang="en-GB" sz="2000">
-                <a:latin typeface="Times New Roman" panose="02020603050405020304" pitchFamily="18" charset="0"/>
-                <a:cs typeface="Times New Roman" panose="02020603050405020304" pitchFamily="18" charset="0"/>
-                <a:sym typeface="+mn-ea"/>
-                <a:hlinkClick r:id="rId3" action="ppaction://hlinksldjump"/>
-              </a:rPr>
-              <a:t>Slide 3</a:t>
-            </a:r>
-            <a:r>
-              <a:rPr lang="en-GB" sz="2000" dirty="0">
-                <a:latin typeface="Times New Roman" panose="02020603050405020304" pitchFamily="18" charset="0"/>
-                <a:cs typeface="Times New Roman" panose="02020603050405020304" pitchFamily="18" charset="0"/>
-                <a:sym typeface="+mn-ea"/>
-                <a:hlinkClick r:id="rId3" action="ppaction://hlinksldjump"/>
-              </a:rPr>
-              <a:t>] </a:t>
+              <a:t>[Slide 3] </a:t>
             </a:r>
             <a:endParaRPr sz="2000" dirty="0">
               <a:latin typeface="Times New Roman" panose="02020603050405020304" pitchFamily="18" charset="0"/>
@@ -12419,8 +15106,8 @@
         </p:nvSpPr>
         <p:spPr>
           <a:xfrm>
-            <a:off x="311700" y="294625"/>
-            <a:ext cx="8520600" cy="572700"/>
+            <a:off x="557233" y="76635"/>
+            <a:ext cx="6241500" cy="654938"/>
           </a:xfrm>
           <a:prstGeom prst="rect">
             <a:avLst/>
@@ -12693,7 +15380,7 @@
             <a:r>
               <a:rPr lang="en-US" b="1" dirty="0">
                 <a:solidFill>
-                  <a:srgbClr val="980000"/>
+                  <a:srgbClr val="009242"/>
                 </a:solidFill>
                 <a:latin typeface="Times New Roman" panose="02020603050405020304" pitchFamily="18" charset="0"/>
                 <a:cs typeface="Times New Roman" panose="02020603050405020304" pitchFamily="18" charset="0"/>
@@ -12703,7 +15390,7 @@
             <a:r>
               <a:rPr lang="en-US" b="1" dirty="0" err="1">
                 <a:solidFill>
-                  <a:srgbClr val="980000"/>
+                  <a:srgbClr val="009242"/>
                 </a:solidFill>
                 <a:latin typeface="Times New Roman" panose="02020603050405020304" pitchFamily="18" charset="0"/>
                 <a:cs typeface="Times New Roman" panose="02020603050405020304" pitchFamily="18" charset="0"/>
@@ -12713,20 +15400,13 @@
             <a:r>
               <a:rPr lang="en-US" b="1" dirty="0">
                 <a:solidFill>
-                  <a:srgbClr val="980000"/>
+                  <a:srgbClr val="009242"/>
                 </a:solidFill>
                 <a:latin typeface="Times New Roman" panose="02020603050405020304" pitchFamily="18" charset="0"/>
                 <a:cs typeface="Times New Roman" panose="02020603050405020304" pitchFamily="18" charset="0"/>
               </a:rPr>
               <a:t> Account-9</a:t>
             </a:r>
-            <a:endParaRPr lang="en-US" b="1" dirty="0">
-              <a:solidFill>
-                <a:srgbClr val="FF0000"/>
-              </a:solidFill>
-              <a:latin typeface="Times New Roman" panose="02020603050405020304" pitchFamily="18" charset="0"/>
-              <a:cs typeface="Times New Roman" panose="02020603050405020304" pitchFamily="18" charset="0"/>
-            </a:endParaRPr>
           </a:p>
         </p:txBody>
       </p:sp>
@@ -12738,7 +15418,7 @@
         </p:nvSpPr>
         <p:spPr>
           <a:xfrm>
-            <a:off x="311700" y="917835"/>
+            <a:off x="311700" y="1044838"/>
             <a:ext cx="7987274" cy="1308128"/>
           </a:xfrm>
           <a:prstGeom prst="rect">
@@ -13037,7 +15717,7 @@
         </p:blipFill>
         <p:spPr>
           <a:xfrm>
-            <a:off x="1166091" y="1388142"/>
+            <a:off x="1166091" y="1515145"/>
             <a:ext cx="6811818" cy="3585588"/>
           </a:xfrm>
           <a:prstGeom prst="rect">
@@ -13082,12 +15762,12 @@
             <a:spLocks noGrp="1"/>
           </p:cNvSpPr>
           <p:nvPr>
-            <p:ph type="title"/>
+            <p:ph type="title" idx="4294967295"/>
           </p:nvPr>
         </p:nvSpPr>
         <p:spPr>
           <a:xfrm>
-            <a:off x="311700" y="294625"/>
+            <a:off x="183750" y="539294"/>
             <a:ext cx="8776500" cy="572700"/>
           </a:xfrm>
           <a:prstGeom prst="rect">
@@ -13120,7 +15800,7 @@
             <a:r>
               <a:rPr lang="en-US" b="1" dirty="0">
                 <a:solidFill>
-                  <a:srgbClr val="980000"/>
+                  <a:srgbClr val="009242"/>
                 </a:solidFill>
                 <a:latin typeface="Times New Roman" panose="02020603050405020304" pitchFamily="18" charset="0"/>
                 <a:cs typeface="Times New Roman" panose="02020603050405020304" pitchFamily="18" charset="0"/>
@@ -13129,7 +15809,7 @@
             </a:r>
             <a:endParaRPr sz="2400" dirty="0">
               <a:solidFill>
-                <a:schemeClr val="dk2"/>
+                <a:srgbClr val="009242"/>
               </a:solidFill>
               <a:latin typeface="Times New Roman" panose="02020603050405020304" pitchFamily="18" charset="0"/>
               <a:cs typeface="Times New Roman" panose="02020603050405020304" pitchFamily="18" charset="0"/>
@@ -13144,12 +15824,12 @@
             <a:spLocks noGrp="1"/>
           </p:cNvSpPr>
           <p:nvPr>
-            <p:ph type="body" idx="1"/>
+            <p:ph type="body" idx="4294967295"/>
           </p:nvPr>
         </p:nvSpPr>
         <p:spPr>
           <a:xfrm>
-            <a:off x="311700" y="976525"/>
+            <a:off x="311700" y="1111994"/>
             <a:ext cx="8194991" cy="3930900"/>
           </a:xfrm>
           <a:prstGeom prst="rect">
@@ -13283,12 +15963,12 @@
             <a:spLocks noGrp="1"/>
           </p:cNvSpPr>
           <p:nvPr>
-            <p:ph type="title"/>
+            <p:ph type="title" idx="4294967295"/>
           </p:nvPr>
         </p:nvSpPr>
         <p:spPr>
           <a:xfrm>
-            <a:off x="311700" y="381825"/>
+            <a:off x="311700" y="483425"/>
             <a:ext cx="8520600" cy="572700"/>
           </a:xfrm>
           <a:prstGeom prst="rect">
@@ -13310,9 +15990,9 @@
               </a:spcAft>
             </a:pPr>
             <a:r>
-              <a:rPr lang="en-US" b="1" dirty="0">
-                <a:solidFill>
-                  <a:srgbClr val="980000"/>
+              <a:rPr lang="en-US" sz="2700" b="1" dirty="0">
+                <a:solidFill>
+                  <a:srgbClr val="009242"/>
                 </a:solidFill>
                 <a:latin typeface="Times New Roman" panose="02020603050405020304" pitchFamily="18" charset="0"/>
                 <a:cs typeface="Times New Roman" panose="02020603050405020304" pitchFamily="18" charset="0"/>
@@ -13329,7 +16009,7 @@
             <a:spLocks noGrp="1"/>
           </p:cNvSpPr>
           <p:nvPr>
-            <p:ph type="body" idx="1"/>
+            <p:ph type="body" idx="4294967295"/>
           </p:nvPr>
         </p:nvSpPr>
         <p:spPr>
@@ -13474,12 +16154,12 @@
             <a:spLocks noGrp="1"/>
           </p:cNvSpPr>
           <p:nvPr>
-            <p:ph type="body" idx="1"/>
+            <p:ph type="body" idx="4294967295"/>
           </p:nvPr>
         </p:nvSpPr>
         <p:spPr>
           <a:xfrm>
-            <a:off x="311700" y="1017725"/>
+            <a:off x="311700" y="1136259"/>
             <a:ext cx="8520600" cy="3416400"/>
           </a:xfrm>
           <a:prstGeom prst="rect">
@@ -13580,7 +16260,7 @@
         </p:blipFill>
         <p:spPr>
           <a:xfrm>
-            <a:off x="2295237" y="1892662"/>
+            <a:off x="2295237" y="2011196"/>
             <a:ext cx="4031672" cy="2829924"/>
           </a:xfrm>
           <a:prstGeom prst="rect">
@@ -13600,12 +16280,12 @@
             <a:spLocks noGrp="1"/>
           </p:cNvSpPr>
           <p:nvPr>
-            <p:ph type="title"/>
+            <p:ph type="title" idx="4294967295"/>
           </p:nvPr>
         </p:nvSpPr>
         <p:spPr>
           <a:xfrm>
-            <a:off x="311700" y="381825"/>
+            <a:off x="311700" y="561448"/>
             <a:ext cx="8520600" cy="572700"/>
           </a:xfrm>
           <a:prstGeom prst="rect">
@@ -13627,9 +16307,9 @@
               </a:spcAft>
             </a:pPr>
             <a:r>
-              <a:rPr lang="en-US" b="1" dirty="0">
-                <a:solidFill>
-                  <a:srgbClr val="980000"/>
+              <a:rPr lang="en-US" sz="2700" b="1" dirty="0">
+                <a:solidFill>
+                  <a:srgbClr val="009242"/>
                 </a:solidFill>
                 <a:latin typeface="Times New Roman" panose="02020603050405020304" pitchFamily="18" charset="0"/>
                 <a:cs typeface="Times New Roman" panose="02020603050405020304" pitchFamily="18" charset="0"/>
@@ -13671,12 +16351,12 @@
             <a:spLocks noGrp="1"/>
           </p:cNvSpPr>
           <p:nvPr>
-            <p:ph type="body" idx="1"/>
+            <p:ph type="body" idx="4294967295"/>
           </p:nvPr>
         </p:nvSpPr>
         <p:spPr>
           <a:xfrm>
-            <a:off x="311700" y="898400"/>
+            <a:off x="311700" y="1135470"/>
             <a:ext cx="8520600" cy="3930900"/>
           </a:xfrm>
           <a:prstGeom prst="rect">
@@ -13726,7 +16406,7 @@
         </p:blipFill>
         <p:spPr>
           <a:xfrm>
-            <a:off x="5974534" y="1032933"/>
+            <a:off x="5974534" y="1270003"/>
             <a:ext cx="430886" cy="272491"/>
           </a:xfrm>
           <a:prstGeom prst="rect">
@@ -13756,7 +16436,7 @@
         </p:blipFill>
         <p:spPr>
           <a:xfrm>
-            <a:off x="770020" y="1796327"/>
+            <a:off x="770020" y="2033397"/>
             <a:ext cx="7603960" cy="2331173"/>
           </a:xfrm>
           <a:prstGeom prst="rect">
@@ -13771,28 +16451,282 @@
       </p:pic>
       <p:sp>
         <p:nvSpPr>
-          <p:cNvPr id="4" name="Google Shape;230;p38"/>
+          <p:cNvPr id="2" name="Google Shape;230;p38">
+            <a:extLst>
+              <a:ext uri="{FF2B5EF4-FFF2-40B4-BE49-F238E27FC236}">
+                <a16:creationId xmlns:a16="http://schemas.microsoft.com/office/drawing/2014/main" id="{F14A8871-AA46-C5B5-D947-0C36F7DC122E}"/>
+              </a:ext>
+            </a:extLst>
+          </p:cNvPr>
           <p:cNvSpPr txBox="1">
-            <a:spLocks noGrp="1"/>
+            <a:spLocks/>
           </p:cNvSpPr>
-          <p:nvPr>
-            <p:ph type="title"/>
-          </p:nvPr>
+          <p:nvPr/>
         </p:nvSpPr>
         <p:spPr>
           <a:xfrm>
-            <a:off x="311700" y="381825"/>
+            <a:off x="311700" y="561448"/>
             <a:ext cx="8520600" cy="572700"/>
           </a:xfrm>
           <a:prstGeom prst="rect">
             <a:avLst/>
           </a:prstGeom>
+          <a:noFill/>
+          <a:ln>
+            <a:noFill/>
+          </a:ln>
         </p:spPr>
         <p:txBody>
           <a:bodyPr spcFirstLastPara="1" wrap="square" lIns="91425" tIns="91425" rIns="91425" bIns="91425" anchor="t" anchorCtr="0">
             <a:noAutofit/>
           </a:bodyPr>
-          <a:lstStyle/>
+          <a:lstStyle>
+            <a:defPPr marR="0" lvl="0" algn="l" rtl="0">
+              <a:lnSpc>
+                <a:spcPct val="100000"/>
+              </a:lnSpc>
+              <a:spcBef>
+                <a:spcPts val="0"/>
+              </a:spcBef>
+              <a:spcAft>
+                <a:spcPts val="0"/>
+              </a:spcAft>
+            </a:defPPr>
+            <a:lvl1pPr marR="0" lvl="0" algn="l" rtl="0">
+              <a:lnSpc>
+                <a:spcPct val="100000"/>
+              </a:lnSpc>
+              <a:spcBef>
+                <a:spcPts val="0"/>
+              </a:spcBef>
+              <a:spcAft>
+                <a:spcPts val="0"/>
+              </a:spcAft>
+              <a:buClr>
+                <a:schemeClr val="dk1"/>
+              </a:buClr>
+              <a:buSzPts val="2800"/>
+              <a:buFont typeface="Arial" panose="020B0604020202020204"/>
+              <a:buNone/>
+              <a:defRPr sz="2800" b="0" i="0" u="none" strike="noStrike" cap="none">
+                <a:solidFill>
+                  <a:schemeClr val="dk1"/>
+                </a:solidFill>
+                <a:latin typeface="Arial" panose="020B0604020202020204"/>
+                <a:ea typeface="Arial" panose="020B0604020202020204"/>
+                <a:cs typeface="Arial" panose="020B0604020202020204"/>
+                <a:sym typeface="Arial" panose="020B0604020202020204"/>
+              </a:defRPr>
+            </a:lvl1pPr>
+            <a:lvl2pPr marR="0" lvl="1" algn="l" rtl="0">
+              <a:lnSpc>
+                <a:spcPct val="100000"/>
+              </a:lnSpc>
+              <a:spcBef>
+                <a:spcPts val="0"/>
+              </a:spcBef>
+              <a:spcAft>
+                <a:spcPts val="0"/>
+              </a:spcAft>
+              <a:buClr>
+                <a:schemeClr val="dk1"/>
+              </a:buClr>
+              <a:buSzPts val="2800"/>
+              <a:buFont typeface="Arial" panose="020B0604020202020204"/>
+              <a:buNone/>
+              <a:defRPr sz="2800" b="0" i="0" u="none" strike="noStrike" cap="none">
+                <a:solidFill>
+                  <a:schemeClr val="dk1"/>
+                </a:solidFill>
+                <a:latin typeface="Arial" panose="020B0604020202020204"/>
+                <a:ea typeface="Arial" panose="020B0604020202020204"/>
+                <a:cs typeface="Arial" panose="020B0604020202020204"/>
+                <a:sym typeface="Arial" panose="020B0604020202020204"/>
+              </a:defRPr>
+            </a:lvl2pPr>
+            <a:lvl3pPr marR="0" lvl="2" algn="l" rtl="0">
+              <a:lnSpc>
+                <a:spcPct val="100000"/>
+              </a:lnSpc>
+              <a:spcBef>
+                <a:spcPts val="0"/>
+              </a:spcBef>
+              <a:spcAft>
+                <a:spcPts val="0"/>
+              </a:spcAft>
+              <a:buClr>
+                <a:schemeClr val="dk1"/>
+              </a:buClr>
+              <a:buSzPts val="2800"/>
+              <a:buFont typeface="Arial" panose="020B0604020202020204"/>
+              <a:buNone/>
+              <a:defRPr sz="2800" b="0" i="0" u="none" strike="noStrike" cap="none">
+                <a:solidFill>
+                  <a:schemeClr val="dk1"/>
+                </a:solidFill>
+                <a:latin typeface="Arial" panose="020B0604020202020204"/>
+                <a:ea typeface="Arial" panose="020B0604020202020204"/>
+                <a:cs typeface="Arial" panose="020B0604020202020204"/>
+                <a:sym typeface="Arial" panose="020B0604020202020204"/>
+              </a:defRPr>
+            </a:lvl3pPr>
+            <a:lvl4pPr marR="0" lvl="3" algn="l" rtl="0">
+              <a:lnSpc>
+                <a:spcPct val="100000"/>
+              </a:lnSpc>
+              <a:spcBef>
+                <a:spcPts val="0"/>
+              </a:spcBef>
+              <a:spcAft>
+                <a:spcPts val="0"/>
+              </a:spcAft>
+              <a:buClr>
+                <a:schemeClr val="dk1"/>
+              </a:buClr>
+              <a:buSzPts val="2800"/>
+              <a:buFont typeface="Arial" panose="020B0604020202020204"/>
+              <a:buNone/>
+              <a:defRPr sz="2800" b="0" i="0" u="none" strike="noStrike" cap="none">
+                <a:solidFill>
+                  <a:schemeClr val="dk1"/>
+                </a:solidFill>
+                <a:latin typeface="Arial" panose="020B0604020202020204"/>
+                <a:ea typeface="Arial" panose="020B0604020202020204"/>
+                <a:cs typeface="Arial" panose="020B0604020202020204"/>
+                <a:sym typeface="Arial" panose="020B0604020202020204"/>
+              </a:defRPr>
+            </a:lvl4pPr>
+            <a:lvl5pPr marR="0" lvl="4" algn="l" rtl="0">
+              <a:lnSpc>
+                <a:spcPct val="100000"/>
+              </a:lnSpc>
+              <a:spcBef>
+                <a:spcPts val="0"/>
+              </a:spcBef>
+              <a:spcAft>
+                <a:spcPts val="0"/>
+              </a:spcAft>
+              <a:buClr>
+                <a:schemeClr val="dk1"/>
+              </a:buClr>
+              <a:buSzPts val="2800"/>
+              <a:buFont typeface="Arial" panose="020B0604020202020204"/>
+              <a:buNone/>
+              <a:defRPr sz="2800" b="0" i="0" u="none" strike="noStrike" cap="none">
+                <a:solidFill>
+                  <a:schemeClr val="dk1"/>
+                </a:solidFill>
+                <a:latin typeface="Arial" panose="020B0604020202020204"/>
+                <a:ea typeface="Arial" panose="020B0604020202020204"/>
+                <a:cs typeface="Arial" panose="020B0604020202020204"/>
+                <a:sym typeface="Arial" panose="020B0604020202020204"/>
+              </a:defRPr>
+            </a:lvl5pPr>
+            <a:lvl6pPr marR="0" lvl="5" algn="l" rtl="0">
+              <a:lnSpc>
+                <a:spcPct val="100000"/>
+              </a:lnSpc>
+              <a:spcBef>
+                <a:spcPts val="0"/>
+              </a:spcBef>
+              <a:spcAft>
+                <a:spcPts val="0"/>
+              </a:spcAft>
+              <a:buClr>
+                <a:schemeClr val="dk1"/>
+              </a:buClr>
+              <a:buSzPts val="2800"/>
+              <a:buFont typeface="Arial" panose="020B0604020202020204"/>
+              <a:buNone/>
+              <a:defRPr sz="2800" b="0" i="0" u="none" strike="noStrike" cap="none">
+                <a:solidFill>
+                  <a:schemeClr val="dk1"/>
+                </a:solidFill>
+                <a:latin typeface="Arial" panose="020B0604020202020204"/>
+                <a:ea typeface="Arial" panose="020B0604020202020204"/>
+                <a:cs typeface="Arial" panose="020B0604020202020204"/>
+                <a:sym typeface="Arial" panose="020B0604020202020204"/>
+              </a:defRPr>
+            </a:lvl6pPr>
+            <a:lvl7pPr marR="0" lvl="6" algn="l" rtl="0">
+              <a:lnSpc>
+                <a:spcPct val="100000"/>
+              </a:lnSpc>
+              <a:spcBef>
+                <a:spcPts val="0"/>
+              </a:spcBef>
+              <a:spcAft>
+                <a:spcPts val="0"/>
+              </a:spcAft>
+              <a:buClr>
+                <a:schemeClr val="dk1"/>
+              </a:buClr>
+              <a:buSzPts val="2800"/>
+              <a:buFont typeface="Arial" panose="020B0604020202020204"/>
+              <a:buNone/>
+              <a:defRPr sz="2800" b="0" i="0" u="none" strike="noStrike" cap="none">
+                <a:solidFill>
+                  <a:schemeClr val="dk1"/>
+                </a:solidFill>
+                <a:latin typeface="Arial" panose="020B0604020202020204"/>
+                <a:ea typeface="Arial" panose="020B0604020202020204"/>
+                <a:cs typeface="Arial" panose="020B0604020202020204"/>
+                <a:sym typeface="Arial" panose="020B0604020202020204"/>
+              </a:defRPr>
+            </a:lvl7pPr>
+            <a:lvl8pPr marR="0" lvl="7" algn="l" rtl="0">
+              <a:lnSpc>
+                <a:spcPct val="100000"/>
+              </a:lnSpc>
+              <a:spcBef>
+                <a:spcPts val="0"/>
+              </a:spcBef>
+              <a:spcAft>
+                <a:spcPts val="0"/>
+              </a:spcAft>
+              <a:buClr>
+                <a:schemeClr val="dk1"/>
+              </a:buClr>
+              <a:buSzPts val="2800"/>
+              <a:buFont typeface="Arial" panose="020B0604020202020204"/>
+              <a:buNone/>
+              <a:defRPr sz="2800" b="0" i="0" u="none" strike="noStrike" cap="none">
+                <a:solidFill>
+                  <a:schemeClr val="dk1"/>
+                </a:solidFill>
+                <a:latin typeface="Arial" panose="020B0604020202020204"/>
+                <a:ea typeface="Arial" panose="020B0604020202020204"/>
+                <a:cs typeface="Arial" panose="020B0604020202020204"/>
+                <a:sym typeface="Arial" panose="020B0604020202020204"/>
+              </a:defRPr>
+            </a:lvl8pPr>
+            <a:lvl9pPr marR="0" lvl="8" algn="l" rtl="0">
+              <a:lnSpc>
+                <a:spcPct val="100000"/>
+              </a:lnSpc>
+              <a:spcBef>
+                <a:spcPts val="0"/>
+              </a:spcBef>
+              <a:spcAft>
+                <a:spcPts val="0"/>
+              </a:spcAft>
+              <a:buClr>
+                <a:schemeClr val="dk1"/>
+              </a:buClr>
+              <a:buSzPts val="2800"/>
+              <a:buFont typeface="Arial" panose="020B0604020202020204"/>
+              <a:buNone/>
+              <a:defRPr sz="2800" b="0" i="0" u="none" strike="noStrike" cap="none">
+                <a:solidFill>
+                  <a:schemeClr val="dk1"/>
+                </a:solidFill>
+                <a:latin typeface="Arial" panose="020B0604020202020204"/>
+                <a:ea typeface="Arial" panose="020B0604020202020204"/>
+                <a:cs typeface="Arial" panose="020B0604020202020204"/>
+                <a:sym typeface="Arial" panose="020B0604020202020204"/>
+              </a:defRPr>
+            </a:lvl9pPr>
+          </a:lstStyle>
           <a:p>
             <a:pPr>
               <a:lnSpc>
@@ -13803,9 +16737,9 @@
               </a:spcAft>
             </a:pPr>
             <a:r>
-              <a:rPr lang="en-US" b="1" dirty="0">
-                <a:solidFill>
-                  <a:srgbClr val="980000"/>
+              <a:rPr lang="en-US" sz="2700" b="1" dirty="0">
+                <a:solidFill>
+                  <a:srgbClr val="009242"/>
                 </a:solidFill>
                 <a:latin typeface="Times New Roman" panose="02020603050405020304" pitchFamily="18" charset="0"/>
                 <a:cs typeface="Times New Roman" panose="02020603050405020304" pitchFamily="18" charset="0"/>
@@ -13847,7 +16781,7 @@
             <a:spLocks noGrp="1"/>
           </p:cNvSpPr>
           <p:nvPr>
-            <p:ph type="body" idx="1"/>
+            <p:ph type="body" idx="4294967295"/>
           </p:nvPr>
         </p:nvSpPr>
         <p:spPr>
@@ -13945,298 +16879,6 @@
               <a:latin typeface="Times New Roman" panose="02020603050405020304" pitchFamily="18" charset="0"/>
               <a:cs typeface="Times New Roman" panose="02020603050405020304" pitchFamily="18" charset="0"/>
             </a:endParaRPr>
-          </a:p>
-        </p:txBody>
-      </p:sp>
-      <p:sp>
-        <p:nvSpPr>
-          <p:cNvPr id="4" name="Google Shape;230;p38"/>
-          <p:cNvSpPr txBox="1"/>
-          <p:nvPr/>
-        </p:nvSpPr>
-        <p:spPr>
-          <a:xfrm>
-            <a:off x="311700" y="381825"/>
-            <a:ext cx="8520600" cy="572700"/>
-          </a:xfrm>
-          <a:prstGeom prst="rect">
-            <a:avLst/>
-          </a:prstGeom>
-          <a:noFill/>
-          <a:ln>
-            <a:noFill/>
-          </a:ln>
-        </p:spPr>
-        <p:txBody>
-          <a:bodyPr spcFirstLastPara="1" wrap="square" lIns="91425" tIns="91425" rIns="91425" bIns="91425" anchor="t" anchorCtr="0">
-            <a:noAutofit/>
-          </a:bodyPr>
-          <a:lstStyle>
-            <a:defPPr marR="0" lvl="0" algn="l" rtl="0">
-              <a:lnSpc>
-                <a:spcPct val="100000"/>
-              </a:lnSpc>
-              <a:spcBef>
-                <a:spcPts val="0"/>
-              </a:spcBef>
-              <a:spcAft>
-                <a:spcPts val="0"/>
-              </a:spcAft>
-            </a:defPPr>
-            <a:lvl1pPr marR="0" lvl="0" algn="l" rtl="0">
-              <a:lnSpc>
-                <a:spcPct val="100000"/>
-              </a:lnSpc>
-              <a:spcBef>
-                <a:spcPts val="0"/>
-              </a:spcBef>
-              <a:spcAft>
-                <a:spcPts val="0"/>
-              </a:spcAft>
-              <a:buClr>
-                <a:schemeClr val="dk1"/>
-              </a:buClr>
-              <a:buSzPts val="2800"/>
-              <a:buFont typeface="Arial" panose="020B0604020202020204"/>
-              <a:buNone/>
-              <a:defRPr sz="2800" b="0" i="0" u="none" strike="noStrike" cap="none">
-                <a:solidFill>
-                  <a:schemeClr val="dk1"/>
-                </a:solidFill>
-                <a:latin typeface="Arial" panose="020B0604020202020204"/>
-                <a:ea typeface="Arial" panose="020B0604020202020204"/>
-                <a:cs typeface="Arial" panose="020B0604020202020204"/>
-                <a:sym typeface="Arial" panose="020B0604020202020204"/>
-              </a:defRPr>
-            </a:lvl1pPr>
-            <a:lvl2pPr marR="0" lvl="1" algn="l" rtl="0">
-              <a:lnSpc>
-                <a:spcPct val="100000"/>
-              </a:lnSpc>
-              <a:spcBef>
-                <a:spcPts val="0"/>
-              </a:spcBef>
-              <a:spcAft>
-                <a:spcPts val="0"/>
-              </a:spcAft>
-              <a:buClr>
-                <a:schemeClr val="dk1"/>
-              </a:buClr>
-              <a:buSzPts val="2800"/>
-              <a:buFont typeface="Arial" panose="020B0604020202020204"/>
-              <a:buNone/>
-              <a:defRPr sz="2800" b="0" i="0" u="none" strike="noStrike" cap="none">
-                <a:solidFill>
-                  <a:schemeClr val="dk1"/>
-                </a:solidFill>
-                <a:latin typeface="Arial" panose="020B0604020202020204"/>
-                <a:ea typeface="Arial" panose="020B0604020202020204"/>
-                <a:cs typeface="Arial" panose="020B0604020202020204"/>
-                <a:sym typeface="Arial" panose="020B0604020202020204"/>
-              </a:defRPr>
-            </a:lvl2pPr>
-            <a:lvl3pPr marR="0" lvl="2" algn="l" rtl="0">
-              <a:lnSpc>
-                <a:spcPct val="100000"/>
-              </a:lnSpc>
-              <a:spcBef>
-                <a:spcPts val="0"/>
-              </a:spcBef>
-              <a:spcAft>
-                <a:spcPts val="0"/>
-              </a:spcAft>
-              <a:buClr>
-                <a:schemeClr val="dk1"/>
-              </a:buClr>
-              <a:buSzPts val="2800"/>
-              <a:buFont typeface="Arial" panose="020B0604020202020204"/>
-              <a:buNone/>
-              <a:defRPr sz="2800" b="0" i="0" u="none" strike="noStrike" cap="none">
-                <a:solidFill>
-                  <a:schemeClr val="dk1"/>
-                </a:solidFill>
-                <a:latin typeface="Arial" panose="020B0604020202020204"/>
-                <a:ea typeface="Arial" panose="020B0604020202020204"/>
-                <a:cs typeface="Arial" panose="020B0604020202020204"/>
-                <a:sym typeface="Arial" panose="020B0604020202020204"/>
-              </a:defRPr>
-            </a:lvl3pPr>
-            <a:lvl4pPr marR="0" lvl="3" algn="l" rtl="0">
-              <a:lnSpc>
-                <a:spcPct val="100000"/>
-              </a:lnSpc>
-              <a:spcBef>
-                <a:spcPts val="0"/>
-              </a:spcBef>
-              <a:spcAft>
-                <a:spcPts val="0"/>
-              </a:spcAft>
-              <a:buClr>
-                <a:schemeClr val="dk1"/>
-              </a:buClr>
-              <a:buSzPts val="2800"/>
-              <a:buFont typeface="Arial" panose="020B0604020202020204"/>
-              <a:buNone/>
-              <a:defRPr sz="2800" b="0" i="0" u="none" strike="noStrike" cap="none">
-                <a:solidFill>
-                  <a:schemeClr val="dk1"/>
-                </a:solidFill>
-                <a:latin typeface="Arial" panose="020B0604020202020204"/>
-                <a:ea typeface="Arial" panose="020B0604020202020204"/>
-                <a:cs typeface="Arial" panose="020B0604020202020204"/>
-                <a:sym typeface="Arial" panose="020B0604020202020204"/>
-              </a:defRPr>
-            </a:lvl4pPr>
-            <a:lvl5pPr marR="0" lvl="4" algn="l" rtl="0">
-              <a:lnSpc>
-                <a:spcPct val="100000"/>
-              </a:lnSpc>
-              <a:spcBef>
-                <a:spcPts val="0"/>
-              </a:spcBef>
-              <a:spcAft>
-                <a:spcPts val="0"/>
-              </a:spcAft>
-              <a:buClr>
-                <a:schemeClr val="dk1"/>
-              </a:buClr>
-              <a:buSzPts val="2800"/>
-              <a:buFont typeface="Arial" panose="020B0604020202020204"/>
-              <a:buNone/>
-              <a:defRPr sz="2800" b="0" i="0" u="none" strike="noStrike" cap="none">
-                <a:solidFill>
-                  <a:schemeClr val="dk1"/>
-                </a:solidFill>
-                <a:latin typeface="Arial" panose="020B0604020202020204"/>
-                <a:ea typeface="Arial" panose="020B0604020202020204"/>
-                <a:cs typeface="Arial" panose="020B0604020202020204"/>
-                <a:sym typeface="Arial" panose="020B0604020202020204"/>
-              </a:defRPr>
-            </a:lvl5pPr>
-            <a:lvl6pPr marR="0" lvl="5" algn="l" rtl="0">
-              <a:lnSpc>
-                <a:spcPct val="100000"/>
-              </a:lnSpc>
-              <a:spcBef>
-                <a:spcPts val="0"/>
-              </a:spcBef>
-              <a:spcAft>
-                <a:spcPts val="0"/>
-              </a:spcAft>
-              <a:buClr>
-                <a:schemeClr val="dk1"/>
-              </a:buClr>
-              <a:buSzPts val="2800"/>
-              <a:buFont typeface="Arial" panose="020B0604020202020204"/>
-              <a:buNone/>
-              <a:defRPr sz="2800" b="0" i="0" u="none" strike="noStrike" cap="none">
-                <a:solidFill>
-                  <a:schemeClr val="dk1"/>
-                </a:solidFill>
-                <a:latin typeface="Arial" panose="020B0604020202020204"/>
-                <a:ea typeface="Arial" panose="020B0604020202020204"/>
-                <a:cs typeface="Arial" panose="020B0604020202020204"/>
-                <a:sym typeface="Arial" panose="020B0604020202020204"/>
-              </a:defRPr>
-            </a:lvl6pPr>
-            <a:lvl7pPr marR="0" lvl="6" algn="l" rtl="0">
-              <a:lnSpc>
-                <a:spcPct val="100000"/>
-              </a:lnSpc>
-              <a:spcBef>
-                <a:spcPts val="0"/>
-              </a:spcBef>
-              <a:spcAft>
-                <a:spcPts val="0"/>
-              </a:spcAft>
-              <a:buClr>
-                <a:schemeClr val="dk1"/>
-              </a:buClr>
-              <a:buSzPts val="2800"/>
-              <a:buFont typeface="Arial" panose="020B0604020202020204"/>
-              <a:buNone/>
-              <a:defRPr sz="2800" b="0" i="0" u="none" strike="noStrike" cap="none">
-                <a:solidFill>
-                  <a:schemeClr val="dk1"/>
-                </a:solidFill>
-                <a:latin typeface="Arial" panose="020B0604020202020204"/>
-                <a:ea typeface="Arial" panose="020B0604020202020204"/>
-                <a:cs typeface="Arial" panose="020B0604020202020204"/>
-                <a:sym typeface="Arial" panose="020B0604020202020204"/>
-              </a:defRPr>
-            </a:lvl7pPr>
-            <a:lvl8pPr marR="0" lvl="7" algn="l" rtl="0">
-              <a:lnSpc>
-                <a:spcPct val="100000"/>
-              </a:lnSpc>
-              <a:spcBef>
-                <a:spcPts val="0"/>
-              </a:spcBef>
-              <a:spcAft>
-                <a:spcPts val="0"/>
-              </a:spcAft>
-              <a:buClr>
-                <a:schemeClr val="dk1"/>
-              </a:buClr>
-              <a:buSzPts val="2800"/>
-              <a:buFont typeface="Arial" panose="020B0604020202020204"/>
-              <a:buNone/>
-              <a:defRPr sz="2800" b="0" i="0" u="none" strike="noStrike" cap="none">
-                <a:solidFill>
-                  <a:schemeClr val="dk1"/>
-                </a:solidFill>
-                <a:latin typeface="Arial" panose="020B0604020202020204"/>
-                <a:ea typeface="Arial" panose="020B0604020202020204"/>
-                <a:cs typeface="Arial" panose="020B0604020202020204"/>
-                <a:sym typeface="Arial" panose="020B0604020202020204"/>
-              </a:defRPr>
-            </a:lvl8pPr>
-            <a:lvl9pPr marR="0" lvl="8" algn="l" rtl="0">
-              <a:lnSpc>
-                <a:spcPct val="100000"/>
-              </a:lnSpc>
-              <a:spcBef>
-                <a:spcPts val="0"/>
-              </a:spcBef>
-              <a:spcAft>
-                <a:spcPts val="0"/>
-              </a:spcAft>
-              <a:buClr>
-                <a:schemeClr val="dk1"/>
-              </a:buClr>
-              <a:buSzPts val="2800"/>
-              <a:buFont typeface="Arial" panose="020B0604020202020204"/>
-              <a:buNone/>
-              <a:defRPr sz="2800" b="0" i="0" u="none" strike="noStrike" cap="none">
-                <a:solidFill>
-                  <a:schemeClr val="dk1"/>
-                </a:solidFill>
-                <a:latin typeface="Arial" panose="020B0604020202020204"/>
-                <a:ea typeface="Arial" panose="020B0604020202020204"/>
-                <a:cs typeface="Arial" panose="020B0604020202020204"/>
-                <a:sym typeface="Arial" panose="020B0604020202020204"/>
-              </a:defRPr>
-            </a:lvl9pPr>
-          </a:lstStyle>
-          <a:p>
-            <a:pPr>
-              <a:lnSpc>
-                <a:spcPct val="115000"/>
-              </a:lnSpc>
-              <a:spcAft>
-                <a:spcPts val="1200"/>
-              </a:spcAft>
-            </a:pPr>
-            <a:r>
-              <a:rPr lang="en-US" b="1" dirty="0">
-                <a:solidFill>
-                  <a:srgbClr val="980000"/>
-                </a:solidFill>
-                <a:latin typeface="Times New Roman" panose="02020603050405020304" pitchFamily="18" charset="0"/>
-                <a:cs typeface="Times New Roman" panose="02020603050405020304" pitchFamily="18" charset="0"/>
-              </a:rPr>
-              <a:t>3. Check or Edit a Submitted Review-4</a:t>
-            </a:r>
           </a:p>
         </p:txBody>
       </p:sp>
@@ -14256,7 +16898,7 @@
         </p:blipFill>
         <p:spPr>
           <a:xfrm>
-            <a:off x="4466045" y="1021433"/>
+            <a:off x="4466045" y="1214233"/>
             <a:ext cx="4567118" cy="3547442"/>
           </a:xfrm>
           <a:prstGeom prst="rect">
@@ -14269,6 +16911,306 @@
           </a:ln>
         </p:spPr>
       </p:pic>
+      <p:sp>
+        <p:nvSpPr>
+          <p:cNvPr id="2" name="Google Shape;230;p38">
+            <a:extLst>
+              <a:ext uri="{FF2B5EF4-FFF2-40B4-BE49-F238E27FC236}">
+                <a16:creationId xmlns:a16="http://schemas.microsoft.com/office/drawing/2014/main" id="{2254B0A3-4DB3-5347-FD59-E7D3CEDA2CA4}"/>
+              </a:ext>
+            </a:extLst>
+          </p:cNvPr>
+          <p:cNvSpPr txBox="1">
+            <a:spLocks/>
+          </p:cNvSpPr>
+          <p:nvPr/>
+        </p:nvSpPr>
+        <p:spPr>
+          <a:xfrm>
+            <a:off x="311700" y="561448"/>
+            <a:ext cx="8520600" cy="572700"/>
+          </a:xfrm>
+          <a:prstGeom prst="rect">
+            <a:avLst/>
+          </a:prstGeom>
+          <a:noFill/>
+          <a:ln>
+            <a:noFill/>
+          </a:ln>
+        </p:spPr>
+        <p:txBody>
+          <a:bodyPr spcFirstLastPara="1" wrap="square" lIns="91425" tIns="91425" rIns="91425" bIns="91425" anchor="t" anchorCtr="0">
+            <a:noAutofit/>
+          </a:bodyPr>
+          <a:lstStyle>
+            <a:defPPr marR="0" lvl="0" algn="l" rtl="0">
+              <a:lnSpc>
+                <a:spcPct val="100000"/>
+              </a:lnSpc>
+              <a:spcBef>
+                <a:spcPts val="0"/>
+              </a:spcBef>
+              <a:spcAft>
+                <a:spcPts val="0"/>
+              </a:spcAft>
+            </a:defPPr>
+            <a:lvl1pPr marR="0" lvl="0" algn="l" rtl="0">
+              <a:lnSpc>
+                <a:spcPct val="100000"/>
+              </a:lnSpc>
+              <a:spcBef>
+                <a:spcPts val="0"/>
+              </a:spcBef>
+              <a:spcAft>
+                <a:spcPts val="0"/>
+              </a:spcAft>
+              <a:buClr>
+                <a:schemeClr val="dk1"/>
+              </a:buClr>
+              <a:buSzPts val="2800"/>
+              <a:buFont typeface="Arial" panose="020B0604020202020204"/>
+              <a:buNone/>
+              <a:defRPr sz="2800" b="0" i="0" u="none" strike="noStrike" cap="none">
+                <a:solidFill>
+                  <a:schemeClr val="dk1"/>
+                </a:solidFill>
+                <a:latin typeface="Arial" panose="020B0604020202020204"/>
+                <a:ea typeface="Arial" panose="020B0604020202020204"/>
+                <a:cs typeface="Arial" panose="020B0604020202020204"/>
+                <a:sym typeface="Arial" panose="020B0604020202020204"/>
+              </a:defRPr>
+            </a:lvl1pPr>
+            <a:lvl2pPr marR="0" lvl="1" algn="l" rtl="0">
+              <a:lnSpc>
+                <a:spcPct val="100000"/>
+              </a:lnSpc>
+              <a:spcBef>
+                <a:spcPts val="0"/>
+              </a:spcBef>
+              <a:spcAft>
+                <a:spcPts val="0"/>
+              </a:spcAft>
+              <a:buClr>
+                <a:schemeClr val="dk1"/>
+              </a:buClr>
+              <a:buSzPts val="2800"/>
+              <a:buFont typeface="Arial" panose="020B0604020202020204"/>
+              <a:buNone/>
+              <a:defRPr sz="2800" b="0" i="0" u="none" strike="noStrike" cap="none">
+                <a:solidFill>
+                  <a:schemeClr val="dk1"/>
+                </a:solidFill>
+                <a:latin typeface="Arial" panose="020B0604020202020204"/>
+                <a:ea typeface="Arial" panose="020B0604020202020204"/>
+                <a:cs typeface="Arial" panose="020B0604020202020204"/>
+                <a:sym typeface="Arial" panose="020B0604020202020204"/>
+              </a:defRPr>
+            </a:lvl2pPr>
+            <a:lvl3pPr marR="0" lvl="2" algn="l" rtl="0">
+              <a:lnSpc>
+                <a:spcPct val="100000"/>
+              </a:lnSpc>
+              <a:spcBef>
+                <a:spcPts val="0"/>
+              </a:spcBef>
+              <a:spcAft>
+                <a:spcPts val="0"/>
+              </a:spcAft>
+              <a:buClr>
+                <a:schemeClr val="dk1"/>
+              </a:buClr>
+              <a:buSzPts val="2800"/>
+              <a:buFont typeface="Arial" panose="020B0604020202020204"/>
+              <a:buNone/>
+              <a:defRPr sz="2800" b="0" i="0" u="none" strike="noStrike" cap="none">
+                <a:solidFill>
+                  <a:schemeClr val="dk1"/>
+                </a:solidFill>
+                <a:latin typeface="Arial" panose="020B0604020202020204"/>
+                <a:ea typeface="Arial" panose="020B0604020202020204"/>
+                <a:cs typeface="Arial" panose="020B0604020202020204"/>
+                <a:sym typeface="Arial" panose="020B0604020202020204"/>
+              </a:defRPr>
+            </a:lvl3pPr>
+            <a:lvl4pPr marR="0" lvl="3" algn="l" rtl="0">
+              <a:lnSpc>
+                <a:spcPct val="100000"/>
+              </a:lnSpc>
+              <a:spcBef>
+                <a:spcPts val="0"/>
+              </a:spcBef>
+              <a:spcAft>
+                <a:spcPts val="0"/>
+              </a:spcAft>
+              <a:buClr>
+                <a:schemeClr val="dk1"/>
+              </a:buClr>
+              <a:buSzPts val="2800"/>
+              <a:buFont typeface="Arial" panose="020B0604020202020204"/>
+              <a:buNone/>
+              <a:defRPr sz="2800" b="0" i="0" u="none" strike="noStrike" cap="none">
+                <a:solidFill>
+                  <a:schemeClr val="dk1"/>
+                </a:solidFill>
+                <a:latin typeface="Arial" panose="020B0604020202020204"/>
+                <a:ea typeface="Arial" panose="020B0604020202020204"/>
+                <a:cs typeface="Arial" panose="020B0604020202020204"/>
+                <a:sym typeface="Arial" panose="020B0604020202020204"/>
+              </a:defRPr>
+            </a:lvl4pPr>
+            <a:lvl5pPr marR="0" lvl="4" algn="l" rtl="0">
+              <a:lnSpc>
+                <a:spcPct val="100000"/>
+              </a:lnSpc>
+              <a:spcBef>
+                <a:spcPts val="0"/>
+              </a:spcBef>
+              <a:spcAft>
+                <a:spcPts val="0"/>
+              </a:spcAft>
+              <a:buClr>
+                <a:schemeClr val="dk1"/>
+              </a:buClr>
+              <a:buSzPts val="2800"/>
+              <a:buFont typeface="Arial" panose="020B0604020202020204"/>
+              <a:buNone/>
+              <a:defRPr sz="2800" b="0" i="0" u="none" strike="noStrike" cap="none">
+                <a:solidFill>
+                  <a:schemeClr val="dk1"/>
+                </a:solidFill>
+                <a:latin typeface="Arial" panose="020B0604020202020204"/>
+                <a:ea typeface="Arial" panose="020B0604020202020204"/>
+                <a:cs typeface="Arial" panose="020B0604020202020204"/>
+                <a:sym typeface="Arial" panose="020B0604020202020204"/>
+              </a:defRPr>
+            </a:lvl5pPr>
+            <a:lvl6pPr marR="0" lvl="5" algn="l" rtl="0">
+              <a:lnSpc>
+                <a:spcPct val="100000"/>
+              </a:lnSpc>
+              <a:spcBef>
+                <a:spcPts val="0"/>
+              </a:spcBef>
+              <a:spcAft>
+                <a:spcPts val="0"/>
+              </a:spcAft>
+              <a:buClr>
+                <a:schemeClr val="dk1"/>
+              </a:buClr>
+              <a:buSzPts val="2800"/>
+              <a:buFont typeface="Arial" panose="020B0604020202020204"/>
+              <a:buNone/>
+              <a:defRPr sz="2800" b="0" i="0" u="none" strike="noStrike" cap="none">
+                <a:solidFill>
+                  <a:schemeClr val="dk1"/>
+                </a:solidFill>
+                <a:latin typeface="Arial" panose="020B0604020202020204"/>
+                <a:ea typeface="Arial" panose="020B0604020202020204"/>
+                <a:cs typeface="Arial" panose="020B0604020202020204"/>
+                <a:sym typeface="Arial" panose="020B0604020202020204"/>
+              </a:defRPr>
+            </a:lvl6pPr>
+            <a:lvl7pPr marR="0" lvl="6" algn="l" rtl="0">
+              <a:lnSpc>
+                <a:spcPct val="100000"/>
+              </a:lnSpc>
+              <a:spcBef>
+                <a:spcPts val="0"/>
+              </a:spcBef>
+              <a:spcAft>
+                <a:spcPts val="0"/>
+              </a:spcAft>
+              <a:buClr>
+                <a:schemeClr val="dk1"/>
+              </a:buClr>
+              <a:buSzPts val="2800"/>
+              <a:buFont typeface="Arial" panose="020B0604020202020204"/>
+              <a:buNone/>
+              <a:defRPr sz="2800" b="0" i="0" u="none" strike="noStrike" cap="none">
+                <a:solidFill>
+                  <a:schemeClr val="dk1"/>
+                </a:solidFill>
+                <a:latin typeface="Arial" panose="020B0604020202020204"/>
+                <a:ea typeface="Arial" panose="020B0604020202020204"/>
+                <a:cs typeface="Arial" panose="020B0604020202020204"/>
+                <a:sym typeface="Arial" panose="020B0604020202020204"/>
+              </a:defRPr>
+            </a:lvl7pPr>
+            <a:lvl8pPr marR="0" lvl="7" algn="l" rtl="0">
+              <a:lnSpc>
+                <a:spcPct val="100000"/>
+              </a:lnSpc>
+              <a:spcBef>
+                <a:spcPts val="0"/>
+              </a:spcBef>
+              <a:spcAft>
+                <a:spcPts val="0"/>
+              </a:spcAft>
+              <a:buClr>
+                <a:schemeClr val="dk1"/>
+              </a:buClr>
+              <a:buSzPts val="2800"/>
+              <a:buFont typeface="Arial" panose="020B0604020202020204"/>
+              <a:buNone/>
+              <a:defRPr sz="2800" b="0" i="0" u="none" strike="noStrike" cap="none">
+                <a:solidFill>
+                  <a:schemeClr val="dk1"/>
+                </a:solidFill>
+                <a:latin typeface="Arial" panose="020B0604020202020204"/>
+                <a:ea typeface="Arial" panose="020B0604020202020204"/>
+                <a:cs typeface="Arial" panose="020B0604020202020204"/>
+                <a:sym typeface="Arial" panose="020B0604020202020204"/>
+              </a:defRPr>
+            </a:lvl8pPr>
+            <a:lvl9pPr marR="0" lvl="8" algn="l" rtl="0">
+              <a:lnSpc>
+                <a:spcPct val="100000"/>
+              </a:lnSpc>
+              <a:spcBef>
+                <a:spcPts val="0"/>
+              </a:spcBef>
+              <a:spcAft>
+                <a:spcPts val="0"/>
+              </a:spcAft>
+              <a:buClr>
+                <a:schemeClr val="dk1"/>
+              </a:buClr>
+              <a:buSzPts val="2800"/>
+              <a:buFont typeface="Arial" panose="020B0604020202020204"/>
+              <a:buNone/>
+              <a:defRPr sz="2800" b="0" i="0" u="none" strike="noStrike" cap="none">
+                <a:solidFill>
+                  <a:schemeClr val="dk1"/>
+                </a:solidFill>
+                <a:latin typeface="Arial" panose="020B0604020202020204"/>
+                <a:ea typeface="Arial" panose="020B0604020202020204"/>
+                <a:cs typeface="Arial" panose="020B0604020202020204"/>
+                <a:sym typeface="Arial" panose="020B0604020202020204"/>
+              </a:defRPr>
+            </a:lvl9pPr>
+          </a:lstStyle>
+          <a:p>
+            <a:pPr>
+              <a:lnSpc>
+                <a:spcPct val="115000"/>
+              </a:lnSpc>
+              <a:spcAft>
+                <a:spcPts val="1200"/>
+              </a:spcAft>
+            </a:pPr>
+            <a:r>
+              <a:rPr lang="en-US" sz="2700" b="1" dirty="0">
+                <a:solidFill>
+                  <a:srgbClr val="009242"/>
+                </a:solidFill>
+                <a:latin typeface="Times New Roman" panose="02020603050405020304" pitchFamily="18" charset="0"/>
+                <a:cs typeface="Times New Roman" panose="02020603050405020304" pitchFamily="18" charset="0"/>
+              </a:rPr>
+              <a:t>3. Check or Edit a Submitted Review-4</a:t>
+            </a:r>
+          </a:p>
+        </p:txBody>
+      </p:sp>
     </p:spTree>
   </p:cSld>
   <p:clrMapOvr>
@@ -14301,7 +17243,7 @@
             <a:spLocks noGrp="1"/>
           </p:cNvSpPr>
           <p:nvPr>
-            <p:ph type="body" idx="1"/>
+            <p:ph type="body" idx="4294967295"/>
           </p:nvPr>
         </p:nvSpPr>
         <p:spPr>
@@ -14361,7 +17303,7 @@
         </p:nvSpPr>
         <p:spPr>
           <a:xfrm>
-            <a:off x="311700" y="418990"/>
+            <a:off x="311700" y="545991"/>
             <a:ext cx="8520600" cy="572700"/>
           </a:xfrm>
           <a:prstGeom prst="rect">
@@ -14639,7 +17581,7 @@
             <a:r>
               <a:rPr lang="en-US" altLang="zh-CN" sz="2700" b="1" dirty="0">
                 <a:solidFill>
-                  <a:srgbClr val="980000"/>
+                  <a:srgbClr val="009242"/>
                 </a:solidFill>
                 <a:latin typeface="Times New Roman" panose="02020603050405020304" pitchFamily="18" charset="0"/>
                 <a:cs typeface="Times New Roman" panose="02020603050405020304" pitchFamily="18" charset="0"/>
@@ -14681,7 +17623,7 @@
             <a:spLocks noGrp="1"/>
           </p:cNvSpPr>
           <p:nvPr>
-            <p:ph type="title"/>
+            <p:ph type="title" idx="4294967295"/>
           </p:nvPr>
         </p:nvSpPr>
         <p:spPr>
@@ -14717,7 +17659,7 @@
             <a:r>
               <a:rPr lang="en-US" altLang="zh-CN" sz="3110" b="1" dirty="0">
                 <a:solidFill>
-                  <a:srgbClr val="980000"/>
+                  <a:srgbClr val="009242"/>
                 </a:solidFill>
                 <a:latin typeface="Times New Roman" panose="02020603050405020304" pitchFamily="18" charset="0"/>
                 <a:cs typeface="Times New Roman" panose="02020603050405020304" pitchFamily="18" charset="0"/>
@@ -14727,7 +17669,7 @@
             <a:r>
               <a:rPr lang="en-US" altLang="zh-CN" sz="3110" b="1" dirty="0" err="1">
                 <a:solidFill>
-                  <a:srgbClr val="980000"/>
+                  <a:srgbClr val="009242"/>
                 </a:solidFill>
                 <a:latin typeface="Times New Roman" panose="02020603050405020304" pitchFamily="18" charset="0"/>
                 <a:cs typeface="Times New Roman" panose="02020603050405020304" pitchFamily="18" charset="0"/>
@@ -14737,7 +17679,7 @@
             <a:r>
               <a:rPr lang="en-US" altLang="zh-CN" sz="3110" b="1" dirty="0">
                 <a:solidFill>
-                  <a:srgbClr val="980000"/>
+                  <a:srgbClr val="009242"/>
                 </a:solidFill>
                 <a:latin typeface="Times New Roman" panose="02020603050405020304" pitchFamily="18" charset="0"/>
                 <a:cs typeface="Times New Roman" panose="02020603050405020304" pitchFamily="18" charset="0"/>
@@ -14754,7 +17696,7 @@
             <a:spLocks noGrp="1"/>
           </p:cNvSpPr>
           <p:nvPr>
-            <p:ph type="body" idx="1"/>
+            <p:ph type="body" idx="4294967295"/>
           </p:nvPr>
         </p:nvSpPr>
         <p:spPr>
@@ -15106,7 +18048,7 @@
             <a:spLocks noGrp="1"/>
           </p:cNvSpPr>
           <p:nvPr>
-            <p:ph type="body" idx="1"/>
+            <p:ph type="body" idx="4294967295"/>
           </p:nvPr>
         </p:nvSpPr>
         <p:spPr>
@@ -15496,36 +18438,29 @@
             </a:lvl9pPr>
           </a:lstStyle>
           <a:p>
-            <a:pPr marL="457200" lvl="0" indent="-381000" algn="l" rtl="0">
+            <a:pPr marL="76200" lvl="0">
               <a:lnSpc>
                 <a:spcPct val="115000"/>
               </a:lnSpc>
-              <a:spcBef>
-                <a:spcPts val="0"/>
-              </a:spcBef>
-              <a:spcAft>
-                <a:spcPts val="0"/>
-              </a:spcAft>
               <a:buClr>
                 <a:srgbClr val="980000"/>
               </a:buClr>
               <a:buSzPts val="2400"/>
-              <a:buAutoNum type="arabicPeriod"/>
             </a:pPr>
             <a:r>
               <a:rPr lang="en-US" altLang="zh-CN" b="1" dirty="0">
                 <a:solidFill>
-                  <a:srgbClr val="980000"/>
+                  <a:srgbClr val="009242"/>
                 </a:solidFill>
                 <a:latin typeface="Times New Roman" panose="02020603050405020304" pitchFamily="18" charset="0"/>
                 <a:cs typeface="Times New Roman" panose="02020603050405020304" pitchFamily="18" charset="0"/>
               </a:rPr>
-              <a:t>Create an </a:t>
+              <a:t>1. Create an </a:t>
             </a:r>
             <a:r>
               <a:rPr lang="en-US" altLang="zh-CN" b="1" dirty="0" err="1">
                 <a:solidFill>
-                  <a:srgbClr val="980000"/>
+                  <a:srgbClr val="009242"/>
                 </a:solidFill>
                 <a:latin typeface="Times New Roman" panose="02020603050405020304" pitchFamily="18" charset="0"/>
                 <a:cs typeface="Times New Roman" panose="02020603050405020304" pitchFamily="18" charset="0"/>
@@ -15535,7 +18470,7 @@
             <a:r>
               <a:rPr lang="en-US" altLang="zh-CN" b="1" dirty="0">
                 <a:solidFill>
-                  <a:srgbClr val="980000"/>
+                  <a:srgbClr val="009242"/>
                 </a:solidFill>
                 <a:latin typeface="Times New Roman" panose="02020603050405020304" pitchFamily="18" charset="0"/>
                 <a:cs typeface="Times New Roman" panose="02020603050405020304" pitchFamily="18" charset="0"/>
@@ -15577,7 +18512,7 @@
             <a:spLocks noGrp="1"/>
           </p:cNvSpPr>
           <p:nvPr>
-            <p:ph type="body" idx="1"/>
+            <p:ph type="body" idx="4294967295"/>
           </p:nvPr>
         </p:nvSpPr>
         <p:spPr>
@@ -15679,7 +18614,7 @@
             <a:spLocks noGrp="1"/>
           </p:cNvSpPr>
           <p:nvPr>
-            <p:ph type="title"/>
+            <p:ph type="title" idx="4294967295"/>
           </p:nvPr>
         </p:nvSpPr>
         <p:spPr>
@@ -15697,36 +18632,29 @@
           </a:bodyPr>
           <a:lstStyle/>
           <a:p>
-            <a:pPr marL="457200" lvl="0" indent="-381000" algn="l" rtl="0">
+            <a:pPr marL="76200" lvl="0">
               <a:lnSpc>
                 <a:spcPct val="115000"/>
               </a:lnSpc>
-              <a:spcBef>
-                <a:spcPts val="0"/>
-              </a:spcBef>
-              <a:spcAft>
-                <a:spcPts val="0"/>
-              </a:spcAft>
               <a:buClr>
                 <a:srgbClr val="980000"/>
               </a:buClr>
               <a:buSzPts val="2400"/>
-              <a:buAutoNum type="arabicPeriod"/>
             </a:pPr>
             <a:r>
               <a:rPr lang="en-US" altLang="zh-CN" sz="3110" b="1" dirty="0">
                 <a:solidFill>
-                  <a:srgbClr val="980000"/>
+                  <a:srgbClr val="009242"/>
                 </a:solidFill>
                 <a:latin typeface="Times New Roman" panose="02020603050405020304" pitchFamily="18" charset="0"/>
                 <a:cs typeface="Times New Roman" panose="02020603050405020304" pitchFamily="18" charset="0"/>
               </a:rPr>
-              <a:t>Create an </a:t>
+              <a:t>1. Create an </a:t>
             </a:r>
             <a:r>
               <a:rPr lang="en-US" altLang="zh-CN" sz="3110" b="1" dirty="0" err="1">
                 <a:solidFill>
-                  <a:srgbClr val="980000"/>
+                  <a:srgbClr val="009242"/>
                 </a:solidFill>
                 <a:latin typeface="Times New Roman" panose="02020603050405020304" pitchFamily="18" charset="0"/>
                 <a:cs typeface="Times New Roman" panose="02020603050405020304" pitchFamily="18" charset="0"/>
@@ -15736,13 +18664,20 @@
             <a:r>
               <a:rPr lang="en-US" altLang="zh-CN" sz="3110" b="1" dirty="0">
                 <a:solidFill>
-                  <a:srgbClr val="980000"/>
+                  <a:srgbClr val="009242"/>
                 </a:solidFill>
                 <a:latin typeface="Times New Roman" panose="02020603050405020304" pitchFamily="18" charset="0"/>
                 <a:cs typeface="Times New Roman" panose="02020603050405020304" pitchFamily="18" charset="0"/>
               </a:rPr>
               <a:t> Account-3</a:t>
             </a:r>
+            <a:endParaRPr lang="en-US" altLang="zh-CN" sz="3110" b="1" dirty="0">
+              <a:solidFill>
+                <a:srgbClr val="980000"/>
+              </a:solidFill>
+              <a:latin typeface="Times New Roman" panose="02020603050405020304" pitchFamily="18" charset="0"/>
+              <a:cs typeface="Times New Roman" panose="02020603050405020304" pitchFamily="18" charset="0"/>
+            </a:endParaRPr>
           </a:p>
         </p:txBody>
       </p:sp>
@@ -15778,7 +18713,7 @@
             <a:spLocks noGrp="1"/>
           </p:cNvSpPr>
           <p:nvPr>
-            <p:ph type="body" idx="1"/>
+            <p:ph type="body" idx="4294967295"/>
           </p:nvPr>
         </p:nvSpPr>
         <p:spPr>
@@ -16063,7 +18998,7 @@
             <a:spLocks noGrp="1"/>
           </p:cNvSpPr>
           <p:nvPr>
-            <p:ph type="title"/>
+            <p:ph type="title" idx="4294967295"/>
           </p:nvPr>
         </p:nvSpPr>
         <p:spPr>
@@ -16081,36 +19016,29 @@
           </a:bodyPr>
           <a:lstStyle/>
           <a:p>
-            <a:pPr marL="457200" lvl="0" indent="-381000" algn="l" rtl="0">
+            <a:pPr marL="76200" lvl="0">
               <a:lnSpc>
                 <a:spcPct val="115000"/>
               </a:lnSpc>
-              <a:spcBef>
-                <a:spcPts val="0"/>
-              </a:spcBef>
-              <a:spcAft>
-                <a:spcPts val="0"/>
-              </a:spcAft>
               <a:buClr>
                 <a:srgbClr val="980000"/>
               </a:buClr>
               <a:buSzPts val="2400"/>
-              <a:buAutoNum type="arabicPeriod"/>
             </a:pPr>
             <a:r>
               <a:rPr lang="en-US" altLang="zh-CN" sz="3110" b="1" dirty="0">
                 <a:solidFill>
-                  <a:srgbClr val="980000"/>
+                  <a:srgbClr val="009242"/>
                 </a:solidFill>
                 <a:latin typeface="Times New Roman" panose="02020603050405020304" pitchFamily="18" charset="0"/>
                 <a:cs typeface="Times New Roman" panose="02020603050405020304" pitchFamily="18" charset="0"/>
               </a:rPr>
-              <a:t>Create an </a:t>
+              <a:t>1. Create an </a:t>
             </a:r>
             <a:r>
               <a:rPr lang="en-US" altLang="zh-CN" sz="3110" b="1" dirty="0" err="1">
                 <a:solidFill>
-                  <a:srgbClr val="980000"/>
+                  <a:srgbClr val="009242"/>
                 </a:solidFill>
                 <a:latin typeface="Times New Roman" panose="02020603050405020304" pitchFamily="18" charset="0"/>
                 <a:cs typeface="Times New Roman" panose="02020603050405020304" pitchFamily="18" charset="0"/>
@@ -16120,13 +19048,20 @@
             <a:r>
               <a:rPr lang="en-US" altLang="zh-CN" sz="3110" b="1" dirty="0">
                 <a:solidFill>
-                  <a:srgbClr val="980000"/>
+                  <a:srgbClr val="009242"/>
                 </a:solidFill>
                 <a:latin typeface="Times New Roman" panose="02020603050405020304" pitchFamily="18" charset="0"/>
                 <a:cs typeface="Times New Roman" panose="02020603050405020304" pitchFamily="18" charset="0"/>
               </a:rPr>
               <a:t> Account-4</a:t>
             </a:r>
+            <a:endParaRPr lang="en-US" altLang="zh-CN" sz="3110" b="1" dirty="0">
+              <a:solidFill>
+                <a:srgbClr val="980000"/>
+              </a:solidFill>
+              <a:latin typeface="Times New Roman" panose="02020603050405020304" pitchFamily="18" charset="0"/>
+              <a:cs typeface="Times New Roman" panose="02020603050405020304" pitchFamily="18" charset="0"/>
+            </a:endParaRPr>
           </a:p>
         </p:txBody>
       </p:sp>
@@ -16194,7 +19129,7 @@
             <a:spLocks noGrp="1"/>
           </p:cNvSpPr>
           <p:nvPr>
-            <p:ph type="body" idx="1"/>
+            <p:ph type="body" idx="4294967295"/>
           </p:nvPr>
         </p:nvSpPr>
         <p:spPr>
@@ -16353,7 +19288,7 @@
             <a:spLocks noGrp="1"/>
           </p:cNvSpPr>
           <p:nvPr>
-            <p:ph type="title"/>
+            <p:ph type="title" idx="4294967295"/>
           </p:nvPr>
         </p:nvSpPr>
         <p:spPr>
@@ -16371,40 +19306,31 @@
           </a:bodyPr>
           <a:lstStyle/>
           <a:p>
-            <a:pPr marL="457200" lvl="0" indent="-381000" algn="l" rtl="0">
+            <a:pPr marL="76200" lvl="0">
               <a:lnSpc>
                 <a:spcPct val="115000"/>
               </a:lnSpc>
-              <a:spcBef>
-                <a:spcPts val="0"/>
-              </a:spcBef>
-              <a:spcAft>
-                <a:spcPts val="0"/>
-              </a:spcAft>
               <a:buClr>
                 <a:srgbClr val="980000"/>
               </a:buClr>
               <a:buSzPts val="2400"/>
-              <a:buAutoNum type="arabicPeriod"/>
             </a:pPr>
             <a:r>
               <a:rPr lang="en-US" altLang="zh-CN" sz="3110" b="1" dirty="0">
                 <a:solidFill>
-                  <a:srgbClr val="980000"/>
+                  <a:srgbClr val="009242"/>
                 </a:solidFill>
                 <a:latin typeface="Times New Roman" panose="02020603050405020304" pitchFamily="18" charset="0"/>
-                <a:ea typeface="SimSun" panose="02010600030101010101" pitchFamily="2" charset="-122"/>
                 <a:cs typeface="Times New Roman" panose="02020603050405020304" pitchFamily="18" charset="0"/>
               </a:rPr>
-              <a:t>Create an </a:t>
+              <a:t>1. Create an </a:t>
             </a:r>
             <a:r>
               <a:rPr lang="en-US" altLang="zh-CN" sz="3110" b="1" dirty="0" err="1">
                 <a:solidFill>
-                  <a:srgbClr val="980000"/>
+                  <a:srgbClr val="009242"/>
                 </a:solidFill>
                 <a:latin typeface="Times New Roman" panose="02020603050405020304" pitchFamily="18" charset="0"/>
-                <a:ea typeface="SimSun" panose="02010600030101010101" pitchFamily="2" charset="-122"/>
                 <a:cs typeface="Times New Roman" panose="02020603050405020304" pitchFamily="18" charset="0"/>
               </a:rPr>
               <a:t>EasyChair</a:t>
@@ -16412,14 +19338,21 @@
             <a:r>
               <a:rPr lang="en-US" altLang="zh-CN" sz="3110" b="1" dirty="0">
                 <a:solidFill>
-                  <a:srgbClr val="980000"/>
+                  <a:srgbClr val="009242"/>
                 </a:solidFill>
                 <a:latin typeface="Times New Roman" panose="02020603050405020304" pitchFamily="18" charset="0"/>
-                <a:ea typeface="SimSun" panose="02010600030101010101" pitchFamily="2" charset="-122"/>
                 <a:cs typeface="Times New Roman" panose="02020603050405020304" pitchFamily="18" charset="0"/>
               </a:rPr>
               <a:t> Account-5</a:t>
             </a:r>
+            <a:endParaRPr lang="en-US" altLang="zh-CN" sz="3110" b="1" dirty="0">
+              <a:solidFill>
+                <a:srgbClr val="980000"/>
+              </a:solidFill>
+              <a:latin typeface="Times New Roman" panose="02020603050405020304" pitchFamily="18" charset="0"/>
+              <a:ea typeface="SimSun" panose="02010600030101010101" pitchFamily="2" charset="-122"/>
+              <a:cs typeface="Times New Roman" panose="02020603050405020304" pitchFamily="18" charset="0"/>
+            </a:endParaRPr>
           </a:p>
         </p:txBody>
       </p:sp>
@@ -16455,7 +19388,7 @@
             <a:spLocks noGrp="1"/>
           </p:cNvSpPr>
           <p:nvPr>
-            <p:ph type="body" idx="1"/>
+            <p:ph type="body" idx="4294967295"/>
           </p:nvPr>
         </p:nvSpPr>
         <p:spPr>
@@ -16641,7 +19574,7 @@
             <a:spLocks noGrp="1"/>
           </p:cNvSpPr>
           <p:nvPr>
-            <p:ph type="title"/>
+            <p:ph type="title" idx="4294967295"/>
           </p:nvPr>
         </p:nvSpPr>
         <p:spPr>
@@ -16659,36 +19592,29 @@
           </a:bodyPr>
           <a:lstStyle/>
           <a:p>
-            <a:pPr marL="457200" lvl="0" indent="-381000" algn="l" rtl="0">
+            <a:pPr marL="76200" lvl="0">
               <a:lnSpc>
                 <a:spcPct val="115000"/>
               </a:lnSpc>
-              <a:spcBef>
-                <a:spcPts val="0"/>
-              </a:spcBef>
-              <a:spcAft>
-                <a:spcPts val="0"/>
-              </a:spcAft>
               <a:buClr>
                 <a:srgbClr val="980000"/>
               </a:buClr>
               <a:buSzPts val="2400"/>
-              <a:buAutoNum type="arabicPeriod"/>
             </a:pPr>
             <a:r>
               <a:rPr lang="en-US" altLang="zh-CN" sz="3110" b="1" dirty="0">
                 <a:solidFill>
-                  <a:srgbClr val="980000"/>
+                  <a:srgbClr val="009242"/>
                 </a:solidFill>
                 <a:latin typeface="Times New Roman" panose="02020603050405020304" pitchFamily="18" charset="0"/>
                 <a:cs typeface="Times New Roman" panose="02020603050405020304" pitchFamily="18" charset="0"/>
               </a:rPr>
-              <a:t>Create an </a:t>
+              <a:t>1. Create an </a:t>
             </a:r>
             <a:r>
               <a:rPr lang="en-US" altLang="zh-CN" sz="3110" b="1" dirty="0" err="1">
                 <a:solidFill>
-                  <a:srgbClr val="980000"/>
+                  <a:srgbClr val="009242"/>
                 </a:solidFill>
                 <a:latin typeface="Times New Roman" panose="02020603050405020304" pitchFamily="18" charset="0"/>
                 <a:cs typeface="Times New Roman" panose="02020603050405020304" pitchFamily="18" charset="0"/>
@@ -16698,13 +19624,20 @@
             <a:r>
               <a:rPr lang="en-US" altLang="zh-CN" sz="3110" b="1" dirty="0">
                 <a:solidFill>
-                  <a:srgbClr val="980000"/>
+                  <a:srgbClr val="009242"/>
                 </a:solidFill>
                 <a:latin typeface="Times New Roman" panose="02020603050405020304" pitchFamily="18" charset="0"/>
                 <a:cs typeface="Times New Roman" panose="02020603050405020304" pitchFamily="18" charset="0"/>
               </a:rPr>
               <a:t> Account-6</a:t>
             </a:r>
+            <a:endParaRPr lang="en-US" altLang="zh-CN" sz="3110" b="1" dirty="0">
+              <a:solidFill>
+                <a:srgbClr val="980000"/>
+              </a:solidFill>
+              <a:latin typeface="Times New Roman" panose="02020603050405020304" pitchFamily="18" charset="0"/>
+              <a:cs typeface="Times New Roman" panose="02020603050405020304" pitchFamily="18" charset="0"/>
+            </a:endParaRPr>
           </a:p>
         </p:txBody>
       </p:sp>
@@ -16740,12 +19673,12 @@
             <a:spLocks noGrp="1"/>
           </p:cNvSpPr>
           <p:nvPr>
-            <p:ph type="body" idx="1"/>
+            <p:ph type="body" idx="4294967295"/>
           </p:nvPr>
         </p:nvSpPr>
         <p:spPr>
           <a:xfrm>
-            <a:off x="156124" y="555424"/>
+            <a:off x="156124" y="1359762"/>
             <a:ext cx="8520600" cy="4048943"/>
           </a:xfrm>
           <a:prstGeom prst="rect">
@@ -17061,7 +19994,7 @@
         </p:nvGrpSpPr>
         <p:grpSpPr>
           <a:xfrm>
-            <a:off x="156124" y="1412933"/>
+            <a:off x="156124" y="2217271"/>
             <a:ext cx="8977800" cy="1633855"/>
             <a:chOff x="156124" y="1526222"/>
             <a:chExt cx="8977800" cy="1633855"/>
@@ -17151,10 +20084,10 @@
             <p:nvPr/>
           </p:nvPicPr>
           <p:blipFill>
-            <a:blip r:embed="rId5">
+            <a:blip>
               <a:extLst>
                 <a:ext uri="{96DAC541-7B7A-43D3-8B79-37D633B846F1}">
-                  <asvg:svgBlip xmlns:asvg="http://schemas.microsoft.com/office/drawing/2016/SVG/main" r:embed="rId6"/>
+                  <asvg:svgBlip xmlns:asvg="http://schemas.microsoft.com/office/drawing/2016/SVG/main" r:embed="rId5"/>
                 </a:ext>
               </a:extLst>
             </a:blip>
@@ -17175,15 +20108,21 @@
       </p:grpSp>
       <p:sp>
         <p:nvSpPr>
-          <p:cNvPr id="66" name="Google Shape;66;p15"/>
+          <p:cNvPr id="3" name="Google Shape;66;p15">
+            <a:extLst>
+              <a:ext uri="{FF2B5EF4-FFF2-40B4-BE49-F238E27FC236}">
+                <a16:creationId xmlns:a16="http://schemas.microsoft.com/office/drawing/2014/main" id="{E50A0CB2-0814-00AF-31F1-ED820F801B74}"/>
+              </a:ext>
+            </a:extLst>
+          </p:cNvPr>
           <p:cNvSpPr txBox="1">
-            <a:spLocks noGrp="1"/>
+            <a:spLocks/>
           </p:cNvSpPr>
           <p:nvPr/>
         </p:nvSpPr>
         <p:spPr>
           <a:xfrm>
-            <a:off x="250740" y="62120"/>
+            <a:off x="311700" y="445025"/>
             <a:ext cx="8520600" cy="572700"/>
           </a:xfrm>
           <a:prstGeom prst="rect">
@@ -17195,8 +20134,8 @@
           </a:ln>
         </p:spPr>
         <p:txBody>
-          <a:bodyPr wrap="square" lIns="91425" tIns="91425" rIns="91425" bIns="91425" anchor="t" anchorCtr="0">
-            <a:normAutofit fontScale="70000"/>
+          <a:bodyPr spcFirstLastPara="1" wrap="square" lIns="91425" tIns="91425" rIns="91425" bIns="91425" anchor="t" anchorCtr="0">
+            <a:normAutofit fontScale="82500" lnSpcReduction="20000"/>
           </a:bodyPr>
           <a:lstStyle>
             <a:defPPr marR="0" lvl="0" algn="l" rtl="0">
@@ -17446,36 +20385,29 @@
             </a:lvl9pPr>
           </a:lstStyle>
           <a:p>
-            <a:pPr marL="457200" lvl="0" indent="-381000" algn="l" rtl="0">
+            <a:pPr marL="76200">
               <a:lnSpc>
                 <a:spcPct val="115000"/>
               </a:lnSpc>
-              <a:spcBef>
-                <a:spcPts val="0"/>
-              </a:spcBef>
-              <a:spcAft>
-                <a:spcPts val="0"/>
-              </a:spcAft>
               <a:buClr>
                 <a:srgbClr val="980000"/>
               </a:buClr>
               <a:buSzPts val="2400"/>
-              <a:buAutoNum type="arabicPeriod"/>
             </a:pPr>
             <a:r>
               <a:rPr lang="en-US" altLang="zh-CN" sz="3110" b="1" dirty="0">
                 <a:solidFill>
-                  <a:srgbClr val="980000"/>
+                  <a:srgbClr val="009242"/>
                 </a:solidFill>
                 <a:latin typeface="Times New Roman" panose="02020603050405020304" pitchFamily="18" charset="0"/>
                 <a:cs typeface="Times New Roman" panose="02020603050405020304" pitchFamily="18" charset="0"/>
               </a:rPr>
-              <a:t>Create an </a:t>
+              <a:t>1. Create an </a:t>
             </a:r>
             <a:r>
               <a:rPr lang="en-US" altLang="zh-CN" sz="3110" b="1" dirty="0" err="1">
                 <a:solidFill>
-                  <a:srgbClr val="980000"/>
+                  <a:srgbClr val="009242"/>
                 </a:solidFill>
                 <a:latin typeface="Times New Roman" panose="02020603050405020304" pitchFamily="18" charset="0"/>
                 <a:cs typeface="Times New Roman" panose="02020603050405020304" pitchFamily="18" charset="0"/>
@@ -17485,13 +20417,20 @@
             <a:r>
               <a:rPr lang="en-US" altLang="zh-CN" sz="3110" b="1" dirty="0">
                 <a:solidFill>
-                  <a:srgbClr val="980000"/>
+                  <a:srgbClr val="009242"/>
                 </a:solidFill>
                 <a:latin typeface="Times New Roman" panose="02020603050405020304" pitchFamily="18" charset="0"/>
                 <a:cs typeface="Times New Roman" panose="02020603050405020304" pitchFamily="18" charset="0"/>
               </a:rPr>
               <a:t> Account-7</a:t>
             </a:r>
+            <a:endParaRPr lang="en-US" altLang="zh-CN" sz="3110" b="1" dirty="0">
+              <a:solidFill>
+                <a:srgbClr val="980000"/>
+              </a:solidFill>
+              <a:latin typeface="Times New Roman" panose="02020603050405020304" pitchFamily="18" charset="0"/>
+              <a:cs typeface="Times New Roman" panose="02020603050405020304" pitchFamily="18" charset="0"/>
+            </a:endParaRPr>
           </a:p>
         </p:txBody>
       </p:sp>
